--- a/deck/pepsico-petrolina-porque.pptx
+++ b/deck/pepsico-petrolina-porque.pptx
@@ -1634,30 +1634,54 @@
         </p:nvSpPr>
         <p:spPr>
           <a:xfrm>
-            <a:off x="457200" y="4279392"/>
-            <a:ext cx="3840480" cy="7315"/>
+            <a:off x="457200" y="4224528"/>
+            <a:ext cx="4023360" cy="9144"/>
           </a:xfrm>
           <a:prstGeom prst="rect">
             <a:avLst/>
           </a:prstGeom>
           <a:solidFill>
-            <a:srgbClr val="4D6640">
-              <a:alpha val="50000"/>
+            <a:srgbClr val="7E8C90">
+              <a:alpha val="54000"/>
             </a:srgbClr>
           </a:solidFill>
           <a:ln/>
         </p:spPr>
       </p:sp>
-      <p:sp>
-        <p:nvSpPr>
-          <p:cNvPr id="8" name="Text 6"/>
-          <p:cNvSpPr txBox="1"/>
-          <p:nvPr/>
-        </p:nvSpPr>
-        <p:spPr>
-          <a:xfrm>
-            <a:off x="457200" y="4389120"/>
-            <a:ext cx="4206240" cy="155448"/>
+      <p:pic>
+        <p:nvPicPr>
+          <p:cNvPr id="8" name="Image 0" descr="/home/user/clipping/design-system/.preview/deck-assets/ico/coco-husk.png">    </p:cNvPr>
+          <p:cNvPicPr>
+            <a:picLocks noChangeAspect="1"/>
+          </p:cNvPicPr>
+          <p:nvPr/>
+        </p:nvPicPr>
+        <p:blipFill>
+          <a:blip r:embed="rId2"/>
+          <a:stretch>
+            <a:fillRect/>
+          </a:stretch>
+        </p:blipFill>
+        <p:spPr>
+          <a:xfrm>
+            <a:off x="457200" y="4352544"/>
+            <a:ext cx="256032" cy="256032"/>
+          </a:xfrm>
+          <a:prstGeom prst="rect">
+            <a:avLst/>
+          </a:prstGeom>
+        </p:spPr>
+      </p:pic>
+      <p:sp>
+        <p:nvSpPr>
+          <p:cNvPr id="9" name="Text 6"/>
+          <p:cNvSpPr txBox="1"/>
+          <p:nvPr/>
+        </p:nvSpPr>
+        <p:spPr>
+          <a:xfrm>
+            <a:off x="786384" y="4416552"/>
+            <a:ext cx="1005840" cy="155448"/>
           </a:xfrm>
           <a:prstGeom prst="rect">
             <a:avLst/>
@@ -1675,13 +1699,217 @@
             <a:r>
               <a:rPr lang="en-US" sz="750" spc="260" kern="0" dirty="0">
                 <a:solidFill>
+                  <a:srgbClr val="8A7050"/>
+                </a:solidFill>
+                <a:latin typeface="Arial" pitchFamily="34" charset="0"/>
+                <a:ea typeface="Arial" pitchFamily="34" charset="-122"/>
+                <a:cs typeface="Arial" pitchFamily="34" charset="-120"/>
+              </a:rPr>
+              <a:t>BIOMASSA</a:t>
+            </a:r>
+            <a:endParaRPr lang="en-US" sz="750" dirty="0"/>
+          </a:p>
+        </p:txBody>
+      </p:sp>
+      <p:sp>
+        <p:nvSpPr>
+          <p:cNvPr id="10" name="Text 7"/>
+          <p:cNvSpPr txBox="1"/>
+          <p:nvPr/>
+        </p:nvSpPr>
+        <p:spPr>
+          <a:xfrm>
+            <a:off x="1609344" y="4416552"/>
+            <a:ext cx="182880" cy="155448"/>
+          </a:xfrm>
+          <a:prstGeom prst="rect">
+            <a:avLst/>
+          </a:prstGeom>
+          <a:noFill/>
+          <a:ln/>
+        </p:spPr>
+        <p:txBody>
+          <a:bodyPr wrap="square" lIns="0" tIns="0" rIns="0" bIns="0" rtlCol="0" anchor="ctr"/>
+          <a:lstStyle/>
+          <a:p>
+            <a:pPr algn="ctr" indent="0" marL="0">
+              <a:buNone/>
+            </a:pPr>
+            <a:r>
+              <a:rPr lang="en-US" sz="800" spc="260" kern="0" dirty="0">
+                <a:solidFill>
+                  <a:srgbClr val="7E8C90"/>
+                </a:solidFill>
+                <a:latin typeface="Arial" pitchFamily="34" charset="0"/>
+                <a:ea typeface="Arial" pitchFamily="34" charset="-122"/>
+                <a:cs typeface="Arial" pitchFamily="34" charset="-120"/>
+              </a:rPr>
+              <a:t>→</a:t>
+            </a:r>
+            <a:endParaRPr lang="en-US" sz="800" dirty="0"/>
+          </a:p>
+        </p:txBody>
+      </p:sp>
+      <p:pic>
+        <p:nvPicPr>
+          <p:cNvPr id="11" name="Image 1" descr="/home/user/clipping/design-system/.preview/deck-assets/ico/char-dark.png">    </p:cNvPr>
+          <p:cNvPicPr>
+            <a:picLocks noChangeAspect="1"/>
+          </p:cNvPicPr>
+          <p:nvPr/>
+        </p:nvPicPr>
+        <p:blipFill>
+          <a:blip r:embed="rId3"/>
+          <a:stretch>
+            <a:fillRect/>
+          </a:stretch>
+        </p:blipFill>
+        <p:spPr>
+          <a:xfrm>
+            <a:off x="1847088" y="4352544"/>
+            <a:ext cx="256032" cy="256032"/>
+          </a:xfrm>
+          <a:prstGeom prst="rect">
+            <a:avLst/>
+          </a:prstGeom>
+        </p:spPr>
+      </p:pic>
+      <p:sp>
+        <p:nvSpPr>
+          <p:cNvPr id="12" name="Text 8"/>
+          <p:cNvSpPr txBox="1"/>
+          <p:nvPr/>
+        </p:nvSpPr>
+        <p:spPr>
+          <a:xfrm>
+            <a:off x="2176272" y="4416552"/>
+            <a:ext cx="1005840" cy="155448"/>
+          </a:xfrm>
+          <a:prstGeom prst="rect">
+            <a:avLst/>
+          </a:prstGeom>
+          <a:noFill/>
+          <a:ln/>
+        </p:spPr>
+        <p:txBody>
+          <a:bodyPr wrap="square" lIns="0" tIns="0" rIns="0" bIns="0" rtlCol="0" anchor="ctr"/>
+          <a:lstStyle/>
+          <a:p>
+            <a:pPr algn="l" indent="0" marL="0">
+              <a:buNone/>
+            </a:pPr>
+            <a:r>
+              <a:rPr lang="en-US" sz="750" spc="260" kern="0" dirty="0">
+                <a:solidFill>
+                  <a:srgbClr val="2F3A26"/>
+                </a:solidFill>
+                <a:latin typeface="Arial" pitchFamily="34" charset="0"/>
+                <a:ea typeface="Arial" pitchFamily="34" charset="-122"/>
+                <a:cs typeface="Arial" pitchFamily="34" charset="-120"/>
+              </a:rPr>
+              <a:t>BIOCHAR</a:t>
+            </a:r>
+            <a:endParaRPr lang="en-US" sz="750" dirty="0"/>
+          </a:p>
+        </p:txBody>
+      </p:sp>
+      <p:sp>
+        <p:nvSpPr>
+          <p:cNvPr id="13" name="Text 9"/>
+          <p:cNvSpPr txBox="1"/>
+          <p:nvPr/>
+        </p:nvSpPr>
+        <p:spPr>
+          <a:xfrm>
+            <a:off x="2999232" y="4416552"/>
+            <a:ext cx="182880" cy="155448"/>
+          </a:xfrm>
+          <a:prstGeom prst="rect">
+            <a:avLst/>
+          </a:prstGeom>
+          <a:noFill/>
+          <a:ln/>
+        </p:spPr>
+        <p:txBody>
+          <a:bodyPr wrap="square" lIns="0" tIns="0" rIns="0" bIns="0" rtlCol="0" anchor="ctr"/>
+          <a:lstStyle/>
+          <a:p>
+            <a:pPr algn="ctr" indent="0" marL="0">
+              <a:buNone/>
+            </a:pPr>
+            <a:r>
+              <a:rPr lang="en-US" sz="800" spc="260" kern="0" dirty="0">
+                <a:solidFill>
+                  <a:srgbClr val="7E8C90"/>
+                </a:solidFill>
+                <a:latin typeface="Arial" pitchFamily="34" charset="0"/>
+                <a:ea typeface="Arial" pitchFamily="34" charset="-122"/>
+                <a:cs typeface="Arial" pitchFamily="34" charset="-120"/>
+              </a:rPr>
+              <a:t>→</a:t>
+            </a:r>
+            <a:endParaRPr lang="en-US" sz="800" dirty="0"/>
+          </a:p>
+        </p:txBody>
+      </p:sp>
+      <p:pic>
+        <p:nvPicPr>
+          <p:cNvPr id="14" name="Image 2" descr="/home/user/clipping/design-system/.preview/deck-assets/ico/registro-palm.png">    </p:cNvPr>
+          <p:cNvPicPr>
+            <a:picLocks noChangeAspect="1"/>
+          </p:cNvPicPr>
+          <p:nvPr/>
+        </p:nvPicPr>
+        <p:blipFill>
+          <a:blip r:embed="rId4"/>
+          <a:stretch>
+            <a:fillRect/>
+          </a:stretch>
+        </p:blipFill>
+        <p:spPr>
+          <a:xfrm>
+            <a:off x="3236976" y="4352544"/>
+            <a:ext cx="256032" cy="256032"/>
+          </a:xfrm>
+          <a:prstGeom prst="rect">
+            <a:avLst/>
+          </a:prstGeom>
+        </p:spPr>
+      </p:pic>
+      <p:sp>
+        <p:nvSpPr>
+          <p:cNvPr id="15" name="Text 10"/>
+          <p:cNvSpPr txBox="1"/>
+          <p:nvPr/>
+        </p:nvSpPr>
+        <p:spPr>
+          <a:xfrm>
+            <a:off x="3566160" y="4416552"/>
+            <a:ext cx="1005840" cy="155448"/>
+          </a:xfrm>
+          <a:prstGeom prst="rect">
+            <a:avLst/>
+          </a:prstGeom>
+          <a:noFill/>
+          <a:ln/>
+        </p:spPr>
+        <p:txBody>
+          <a:bodyPr wrap="square" lIns="0" tIns="0" rIns="0" bIns="0" rtlCol="0" anchor="ctr"/>
+          <a:lstStyle/>
+          <a:p>
+            <a:pPr algn="l" indent="0" marL="0">
+              <a:buNone/>
+            </a:pPr>
+            <a:r>
+              <a:rPr lang="en-US" sz="750" spc="260" kern="0" dirty="0">
+                <a:solidFill>
                   <a:srgbClr val="4D6640"/>
                 </a:solidFill>
                 <a:latin typeface="Arial" pitchFamily="34" charset="0"/>
                 <a:ea typeface="Arial" pitchFamily="34" charset="-122"/>
                 <a:cs typeface="Arial" pitchFamily="34" charset="-120"/>
               </a:rPr>
-              <a:t>BIOMASSA   →   BIOCHAR   →   VALOR</a:t>
+              <a:t>VALOR</a:t>
             </a:r>
             <a:endParaRPr lang="en-US" sz="750" dirty="0"/>
           </a:p>
@@ -1689,7 +1917,7 @@
       </p:sp>
       <p:sp>
         <p:nvSpPr>
-          <p:cNvPr id="9" name="Shape 7"/>
+          <p:cNvPr id="16" name="Shape 11"/>
           <p:cNvSpPr/>
           <p:nvPr/>
         </p:nvSpPr>
@@ -1711,7 +1939,7 @@
       </p:sp>
       <p:sp>
         <p:nvSpPr>
-          <p:cNvPr id="10" name="Text 8"/>
+          <p:cNvPr id="17" name="Text 12"/>
           <p:cNvSpPr txBox="1"/>
           <p:nvPr/>
         </p:nvSpPr>
@@ -2071,8 +2299,8 @@
         </p:nvSpPr>
         <p:spPr>
           <a:xfrm>
-            <a:off x="1554480" y="1883664"/>
-            <a:ext cx="1920240" cy="155448"/>
+            <a:off x="1920240" y="1883664"/>
+            <a:ext cx="1554480" cy="155448"/>
           </a:xfrm>
           <a:prstGeom prst="rect">
             <a:avLst/>
@@ -2096,7 +2324,7 @@
                 <a:ea typeface="Arial" pitchFamily="34" charset="-122"/>
                 <a:cs typeface="Arial" pitchFamily="34" charset="-120"/>
               </a:rPr>
-              <a:t>PIRÓLISE · POUCO OXIGÊNIO</a:t>
+              <a:t>POUCO OXIGÊNIO</a:t>
             </a:r>
             <a:endParaRPr lang="en-US" sz="620" dirty="0"/>
           </a:p>
@@ -2105,45 +2333,6 @@
       <p:sp>
         <p:nvSpPr>
           <p:cNvPr id="10" name="Text 8"/>
-          <p:cNvSpPr txBox="1"/>
-          <p:nvPr/>
-        </p:nvSpPr>
-        <p:spPr>
-          <a:xfrm>
-            <a:off x="3291840" y="4261104"/>
-            <a:ext cx="2194560" cy="155448"/>
-          </a:xfrm>
-          <a:prstGeom prst="rect">
-            <a:avLst/>
-          </a:prstGeom>
-          <a:noFill/>
-          <a:ln/>
-        </p:spPr>
-        <p:txBody>
-          <a:bodyPr wrap="square" lIns="0" tIns="0" rIns="0" bIns="0" rtlCol="0" anchor="ctr"/>
-          <a:lstStyle/>
-          <a:p>
-            <a:pPr algn="ctr" indent="0" marL="0">
-              <a:buNone/>
-            </a:pPr>
-            <a:r>
-              <a:rPr lang="en-US" sz="620" spc="260" kern="0" dirty="0">
-                <a:solidFill>
-                  <a:srgbClr val="6D8F60"/>
-                </a:solidFill>
-                <a:latin typeface="Arial" pitchFamily="34" charset="0"/>
-                <a:ea typeface="Arial" pitchFamily="34" charset="-122"/>
-                <a:cs typeface="Arial" pitchFamily="34" charset="-120"/>
-              </a:rPr>
-              <a:t>GASES RECIRCULAM COMO CALOR</a:t>
-            </a:r>
-            <a:endParaRPr lang="en-US" sz="620" dirty="0"/>
-          </a:p>
-        </p:txBody>
-      </p:sp>
-      <p:sp>
-        <p:nvSpPr>
-          <p:cNvPr id="11" name="Text 9"/>
           <p:cNvSpPr txBox="1"/>
           <p:nvPr/>
         </p:nvSpPr>
@@ -2182,7 +2371,7 @@
       </p:sp>
       <p:sp>
         <p:nvSpPr>
-          <p:cNvPr id="12" name="Text 10"/>
+          <p:cNvPr id="11" name="Text 9"/>
           <p:cNvSpPr txBox="1"/>
           <p:nvPr/>
         </p:nvSpPr>
@@ -2221,7 +2410,7 @@
       </p:sp>
       <p:sp>
         <p:nvSpPr>
-          <p:cNvPr id="13" name="Text 11"/>
+          <p:cNvPr id="12" name="Text 10"/>
           <p:cNvSpPr txBox="1"/>
           <p:nvPr/>
         </p:nvSpPr>
@@ -2260,14 +2449,60 @@
       </p:sp>
       <p:sp>
         <p:nvSpPr>
-          <p:cNvPr id="14" name="Text 12"/>
-          <p:cNvSpPr txBox="1"/>
-          <p:nvPr/>
-        </p:nvSpPr>
-        <p:spPr>
-          <a:xfrm>
-            <a:off x="5486400" y="4078224"/>
-            <a:ext cx="3200400" cy="155448"/>
+          <p:cNvPr id="13" name="Shape 11"/>
+          <p:cNvSpPr/>
+          <p:nvPr/>
+        </p:nvSpPr>
+        <p:spPr>
+          <a:xfrm>
+            <a:off x="457200" y="3822192"/>
+            <a:ext cx="8229600" cy="9144"/>
+          </a:xfrm>
+          <a:prstGeom prst="rect">
+            <a:avLst/>
+          </a:prstGeom>
+          <a:solidFill>
+            <a:srgbClr val="7E8C90">
+              <a:alpha val="54000"/>
+            </a:srgbClr>
+          </a:solidFill>
+          <a:ln/>
+        </p:spPr>
+      </p:sp>
+      <p:pic>
+        <p:nvPicPr>
+          <p:cNvPr id="14" name="Image 0" descr="/home/user/clipping/design-system/.preview/deck-assets/ico/pilha-husk.png">    </p:cNvPr>
+          <p:cNvPicPr>
+            <a:picLocks noChangeAspect="1"/>
+          </p:cNvPicPr>
+          <p:nvPr/>
+        </p:nvPicPr>
+        <p:blipFill>
+          <a:blip r:embed="rId2"/>
+          <a:stretch>
+            <a:fillRect/>
+          </a:stretch>
+        </p:blipFill>
+        <p:spPr>
+          <a:xfrm>
+            <a:off x="457200" y="3913632"/>
+            <a:ext cx="256032" cy="256032"/>
+          </a:xfrm>
+          <a:prstGeom prst="rect">
+            <a:avLst/>
+          </a:prstGeom>
+        </p:spPr>
+      </p:pic>
+      <p:sp>
+        <p:nvSpPr>
+          <p:cNvPr id="15" name="Text 12"/>
+          <p:cNvSpPr txBox="1"/>
+          <p:nvPr/>
+        </p:nvSpPr>
+        <p:spPr>
+          <a:xfrm>
+            <a:off x="786384" y="3977640"/>
+            <a:ext cx="1280160" cy="155448"/>
           </a:xfrm>
           <a:prstGeom prst="rect">
             <a:avLst/>
@@ -2279,34 +2514,100 @@
           <a:bodyPr wrap="square" lIns="0" tIns="0" rIns="0" bIns="0" rtlCol="0" anchor="ctr"/>
           <a:lstStyle/>
           <a:p>
-            <a:pPr algn="r" indent="0" marL="0">
-              <a:buNone/>
-            </a:pPr>
-            <a:r>
-              <a:rPr lang="en-US" sz="620" spc="260" kern="0" dirty="0">
-                <a:solidFill>
-                  <a:srgbClr val="4D6640"/>
-                </a:solidFill>
-                <a:latin typeface="Arial" pitchFamily="34" charset="0"/>
-                <a:ea typeface="Arial" pitchFamily="34" charset="-122"/>
-                <a:cs typeface="Arial" pitchFamily="34" charset="-120"/>
-              </a:rPr>
-              <a:t>TECNOLOGIA COMERCIAL · OPERAÇÃO CONTÍNUA</a:t>
-            </a:r>
-            <a:endParaRPr lang="en-US" sz="620" dirty="0"/>
-          </a:p>
-        </p:txBody>
-      </p:sp>
-      <p:sp>
-        <p:nvSpPr>
-          <p:cNvPr id="15" name="Text 13"/>
-          <p:cNvSpPr txBox="1"/>
-          <p:nvPr/>
-        </p:nvSpPr>
-        <p:spPr>
-          <a:xfrm>
-            <a:off x="5486400" y="4261104"/>
-            <a:ext cx="3200400" cy="155448"/>
+            <a:pPr algn="l" indent="0" marL="0">
+              <a:buNone/>
+            </a:pPr>
+            <a:r>
+              <a:rPr lang="en-US" sz="750" spc="260" kern="0" dirty="0">
+                <a:solidFill>
+                  <a:srgbClr val="8A7050"/>
+                </a:solidFill>
+                <a:latin typeface="Arial" pitchFamily="34" charset="0"/>
+                <a:ea typeface="Arial" pitchFamily="34" charset="-122"/>
+                <a:cs typeface="Arial" pitchFamily="34" charset="-120"/>
+              </a:rPr>
+              <a:t>BIOMASSA</a:t>
+            </a:r>
+            <a:endParaRPr lang="en-US" sz="750" dirty="0"/>
+          </a:p>
+        </p:txBody>
+      </p:sp>
+      <p:sp>
+        <p:nvSpPr>
+          <p:cNvPr id="16" name="Text 13"/>
+          <p:cNvSpPr txBox="1"/>
+          <p:nvPr/>
+        </p:nvSpPr>
+        <p:spPr>
+          <a:xfrm>
+            <a:off x="457200" y="4242816"/>
+            <a:ext cx="1536192" cy="310896"/>
+          </a:xfrm>
+          <a:prstGeom prst="rect">
+            <a:avLst/>
+          </a:prstGeom>
+          <a:noFill/>
+          <a:ln/>
+        </p:spPr>
+        <p:txBody>
+          <a:bodyPr wrap="square" lIns="0" tIns="0" rIns="0" bIns="0" rtlCol="0" anchor="t"/>
+          <a:lstStyle/>
+          <a:p>
+            <a:pPr indent="0" marL="0">
+              <a:lnSpc>
+                <a:spcPts val="1163"/>
+              </a:lnSpc>
+              <a:buNone/>
+            </a:pPr>
+            <a:r>
+              <a:rPr lang="en-US" sz="750" dirty="0">
+                <a:solidFill>
+                  <a:srgbClr val="5C5B48"/>
+                </a:solidFill>
+                <a:latin typeface="Arial" pitchFamily="34" charset="0"/>
+                <a:ea typeface="Arial" pitchFamily="34" charset="-122"/>
+                <a:cs typeface="Arial" pitchFamily="34" charset="-120"/>
+              </a:rPr>
+              <a:t>casca úmida, como sai da unidade</a:t>
+            </a:r>
+            <a:endParaRPr lang="en-US" sz="750" dirty="0"/>
+          </a:p>
+        </p:txBody>
+      </p:sp>
+      <p:pic>
+        <p:nvPicPr>
+          <p:cNvPr id="17" name="Image 1" descr="/home/user/clipping/design-system/.preview/deck-assets/ico/calor-steel.png">    </p:cNvPr>
+          <p:cNvPicPr>
+            <a:picLocks noChangeAspect="1"/>
+          </p:cNvPicPr>
+          <p:nvPr/>
+        </p:nvPicPr>
+        <p:blipFill>
+          <a:blip r:embed="rId3"/>
+          <a:stretch>
+            <a:fillRect/>
+          </a:stretch>
+        </p:blipFill>
+        <p:spPr>
+          <a:xfrm>
+            <a:off x="2103120" y="3913632"/>
+            <a:ext cx="256032" cy="256032"/>
+          </a:xfrm>
+          <a:prstGeom prst="rect">
+            <a:avLst/>
+          </a:prstGeom>
+        </p:spPr>
+      </p:pic>
+      <p:sp>
+        <p:nvSpPr>
+          <p:cNvPr id="18" name="Text 14"/>
+          <p:cNvSpPr txBox="1"/>
+          <p:nvPr/>
+        </p:nvSpPr>
+        <p:spPr>
+          <a:xfrm>
+            <a:off x="2432304" y="3977640"/>
+            <a:ext cx="1280160" cy="155448"/>
           </a:xfrm>
           <a:prstGeom prst="rect">
             <a:avLst/>
@@ -2318,11 +2619,326 @@
           <a:bodyPr wrap="square" lIns="0" tIns="0" rIns="0" bIns="0" rtlCol="0" anchor="ctr"/>
           <a:lstStyle/>
           <a:p>
-            <a:pPr algn="r" indent="0" marL="0">
-              <a:buNone/>
-            </a:pPr>
-            <a:r>
-              <a:rPr lang="en-US" sz="700" spc="260" kern="0" dirty="0">
+            <a:pPr algn="l" indent="0" marL="0">
+              <a:buNone/>
+            </a:pPr>
+            <a:r>
+              <a:rPr lang="en-US" sz="750" spc="260" kern="0" dirty="0">
+                <a:solidFill>
+                  <a:srgbClr val="7E8C90"/>
+                </a:solidFill>
+                <a:latin typeface="Arial" pitchFamily="34" charset="0"/>
+                <a:ea typeface="Arial" pitchFamily="34" charset="-122"/>
+                <a:cs typeface="Arial" pitchFamily="34" charset="-120"/>
+              </a:rPr>
+              <a:t>PREPARO</a:t>
+            </a:r>
+            <a:endParaRPr lang="en-US" sz="750" dirty="0"/>
+          </a:p>
+        </p:txBody>
+      </p:sp>
+      <p:sp>
+        <p:nvSpPr>
+          <p:cNvPr id="19" name="Text 15"/>
+          <p:cNvSpPr txBox="1"/>
+          <p:nvPr/>
+        </p:nvSpPr>
+        <p:spPr>
+          <a:xfrm>
+            <a:off x="2103120" y="4242816"/>
+            <a:ext cx="1536192" cy="310896"/>
+          </a:xfrm>
+          <a:prstGeom prst="rect">
+            <a:avLst/>
+          </a:prstGeom>
+          <a:noFill/>
+          <a:ln/>
+        </p:spPr>
+        <p:txBody>
+          <a:bodyPr wrap="square" lIns="0" tIns="0" rIns="0" bIns="0" rtlCol="0" anchor="t"/>
+          <a:lstStyle/>
+          <a:p>
+            <a:pPr indent="0" marL="0">
+              <a:lnSpc>
+                <a:spcPts val="1163"/>
+              </a:lnSpc>
+              <a:buNone/>
+            </a:pPr>
+            <a:r>
+              <a:rPr lang="en-US" sz="750" dirty="0">
+                <a:solidFill>
+                  <a:srgbClr val="5C5B48"/>
+                </a:solidFill>
+                <a:latin typeface="Arial" pitchFamily="34" charset="0"/>
+                <a:ea typeface="Arial" pitchFamily="34" charset="-122"/>
+                <a:cs typeface="Arial" pitchFamily="34" charset="-120"/>
+              </a:rPr>
+              <a:t>secagem com calor do próprio processo</a:t>
+            </a:r>
+            <a:endParaRPr lang="en-US" sz="750" dirty="0"/>
+          </a:p>
+        </p:txBody>
+      </p:sp>
+      <p:pic>
+        <p:nvPicPr>
+          <p:cNvPr id="20" name="Image 2" descr="/home/user/clipping/design-system/.preview/deck-assets/ico/reator-steel.png">    </p:cNvPr>
+          <p:cNvPicPr>
+            <a:picLocks noChangeAspect="1"/>
+          </p:cNvPicPr>
+          <p:nvPr/>
+        </p:nvPicPr>
+        <p:blipFill>
+          <a:blip r:embed="rId4"/>
+          <a:stretch>
+            <a:fillRect/>
+          </a:stretch>
+        </p:blipFill>
+        <p:spPr>
+          <a:xfrm>
+            <a:off x="3749040" y="3913632"/>
+            <a:ext cx="256032" cy="256032"/>
+          </a:xfrm>
+          <a:prstGeom prst="rect">
+            <a:avLst/>
+          </a:prstGeom>
+        </p:spPr>
+      </p:pic>
+      <p:sp>
+        <p:nvSpPr>
+          <p:cNvPr id="21" name="Text 16"/>
+          <p:cNvSpPr txBox="1"/>
+          <p:nvPr/>
+        </p:nvSpPr>
+        <p:spPr>
+          <a:xfrm>
+            <a:off x="4078224" y="3977640"/>
+            <a:ext cx="1280160" cy="155448"/>
+          </a:xfrm>
+          <a:prstGeom prst="rect">
+            <a:avLst/>
+          </a:prstGeom>
+          <a:noFill/>
+          <a:ln/>
+        </p:spPr>
+        <p:txBody>
+          <a:bodyPr wrap="square" lIns="0" tIns="0" rIns="0" bIns="0" rtlCol="0" anchor="ctr"/>
+          <a:lstStyle/>
+          <a:p>
+            <a:pPr algn="l" indent="0" marL="0">
+              <a:buNone/>
+            </a:pPr>
+            <a:r>
+              <a:rPr lang="en-US" sz="750" spc="260" kern="0" dirty="0">
+                <a:solidFill>
+                  <a:srgbClr val="7E8C90"/>
+                </a:solidFill>
+                <a:latin typeface="Arial" pitchFamily="34" charset="0"/>
+                <a:ea typeface="Arial" pitchFamily="34" charset="-122"/>
+                <a:cs typeface="Arial" pitchFamily="34" charset="-120"/>
+              </a:rPr>
+              <a:t>PIRÓLISE</a:t>
+            </a:r>
+            <a:endParaRPr lang="en-US" sz="750" dirty="0"/>
+          </a:p>
+        </p:txBody>
+      </p:sp>
+      <p:sp>
+        <p:nvSpPr>
+          <p:cNvPr id="22" name="Text 17"/>
+          <p:cNvSpPr txBox="1"/>
+          <p:nvPr/>
+        </p:nvSpPr>
+        <p:spPr>
+          <a:xfrm>
+            <a:off x="3749040" y="4242816"/>
+            <a:ext cx="1536192" cy="310896"/>
+          </a:xfrm>
+          <a:prstGeom prst="rect">
+            <a:avLst/>
+          </a:prstGeom>
+          <a:noFill/>
+          <a:ln/>
+        </p:spPr>
+        <p:txBody>
+          <a:bodyPr wrap="square" lIns="0" tIns="0" rIns="0" bIns="0" rtlCol="0" anchor="t"/>
+          <a:lstStyle/>
+          <a:p>
+            <a:pPr indent="0" marL="0">
+              <a:lnSpc>
+                <a:spcPts val="1163"/>
+              </a:lnSpc>
+              <a:buNone/>
+            </a:pPr>
+            <a:r>
+              <a:rPr lang="en-US" sz="750" dirty="0">
+                <a:solidFill>
+                  <a:srgbClr val="5C5B48"/>
+                </a:solidFill>
+                <a:latin typeface="Arial" pitchFamily="34" charset="0"/>
+                <a:ea typeface="Arial" pitchFamily="34" charset="-122"/>
+                <a:cs typeface="Arial" pitchFamily="34" charset="-120"/>
+              </a:rPr>
+              <a:t>400–600 °C, pouco oxigênio</a:t>
+            </a:r>
+            <a:endParaRPr lang="en-US" sz="750" dirty="0"/>
+          </a:p>
+        </p:txBody>
+      </p:sp>
+      <p:pic>
+        <p:nvPicPr>
+          <p:cNvPr id="23" name="Image 3" descr="/home/user/clipping/design-system/.preview/deck-assets/ico/gases-steel.png">    </p:cNvPr>
+          <p:cNvPicPr>
+            <a:picLocks noChangeAspect="1"/>
+          </p:cNvPicPr>
+          <p:nvPr/>
+        </p:nvPicPr>
+        <p:blipFill>
+          <a:blip r:embed="rId5"/>
+          <a:stretch>
+            <a:fillRect/>
+          </a:stretch>
+        </p:blipFill>
+        <p:spPr>
+          <a:xfrm>
+            <a:off x="5394960" y="3913632"/>
+            <a:ext cx="256032" cy="256032"/>
+          </a:xfrm>
+          <a:prstGeom prst="rect">
+            <a:avLst/>
+          </a:prstGeom>
+        </p:spPr>
+      </p:pic>
+      <p:sp>
+        <p:nvSpPr>
+          <p:cNvPr id="24" name="Text 18"/>
+          <p:cNvSpPr txBox="1"/>
+          <p:nvPr/>
+        </p:nvSpPr>
+        <p:spPr>
+          <a:xfrm>
+            <a:off x="5724144" y="3977640"/>
+            <a:ext cx="1280160" cy="155448"/>
+          </a:xfrm>
+          <a:prstGeom prst="rect">
+            <a:avLst/>
+          </a:prstGeom>
+          <a:noFill/>
+          <a:ln/>
+        </p:spPr>
+        <p:txBody>
+          <a:bodyPr wrap="square" lIns="0" tIns="0" rIns="0" bIns="0" rtlCol="0" anchor="ctr"/>
+          <a:lstStyle/>
+          <a:p>
+            <a:pPr algn="l" indent="0" marL="0">
+              <a:buNone/>
+            </a:pPr>
+            <a:r>
+              <a:rPr lang="en-US" sz="750" spc="260" kern="0" dirty="0">
+                <a:solidFill>
+                  <a:srgbClr val="7E8C90"/>
+                </a:solidFill>
+                <a:latin typeface="Arial" pitchFamily="34" charset="0"/>
+                <a:ea typeface="Arial" pitchFamily="34" charset="-122"/>
+                <a:cs typeface="Arial" pitchFamily="34" charset="-120"/>
+              </a:rPr>
+              <a:t>GASES</a:t>
+            </a:r>
+            <a:endParaRPr lang="en-US" sz="750" dirty="0"/>
+          </a:p>
+        </p:txBody>
+      </p:sp>
+      <p:sp>
+        <p:nvSpPr>
+          <p:cNvPr id="25" name="Text 19"/>
+          <p:cNvSpPr txBox="1"/>
+          <p:nvPr/>
+        </p:nvSpPr>
+        <p:spPr>
+          <a:xfrm>
+            <a:off x="5394960" y="4242816"/>
+            <a:ext cx="1536192" cy="310896"/>
+          </a:xfrm>
+          <a:prstGeom prst="rect">
+            <a:avLst/>
+          </a:prstGeom>
+          <a:noFill/>
+          <a:ln/>
+        </p:spPr>
+        <p:txBody>
+          <a:bodyPr wrap="square" lIns="0" tIns="0" rIns="0" bIns="0" rtlCol="0" anchor="t"/>
+          <a:lstStyle/>
+          <a:p>
+            <a:pPr indent="0" marL="0">
+              <a:lnSpc>
+                <a:spcPts val="1163"/>
+              </a:lnSpc>
+              <a:buNone/>
+            </a:pPr>
+            <a:r>
+              <a:rPr lang="en-US" sz="750" dirty="0">
+                <a:solidFill>
+                  <a:srgbClr val="5C5B48"/>
+                </a:solidFill>
+                <a:latin typeface="Arial" pitchFamily="34" charset="0"/>
+                <a:ea typeface="Arial" pitchFamily="34" charset="-122"/>
+                <a:cs typeface="Arial" pitchFamily="34" charset="-120"/>
+              </a:rPr>
+              <a:t>recirculam como calor</a:t>
+            </a:r>
+            <a:endParaRPr lang="en-US" sz="750" dirty="0"/>
+          </a:p>
+        </p:txBody>
+      </p:sp>
+      <p:pic>
+        <p:nvPicPr>
+          <p:cNvPr id="26" name="Image 4" descr="/home/user/clipping/design-system/.preview/deck-assets/ico/char-dark.png">    </p:cNvPr>
+          <p:cNvPicPr>
+            <a:picLocks noChangeAspect="1"/>
+          </p:cNvPicPr>
+          <p:nvPr/>
+        </p:nvPicPr>
+        <p:blipFill>
+          <a:blip r:embed="rId6"/>
+          <a:stretch>
+            <a:fillRect/>
+          </a:stretch>
+        </p:blipFill>
+        <p:spPr>
+          <a:xfrm>
+            <a:off x="7040880" y="3913632"/>
+            <a:ext cx="256032" cy="256032"/>
+          </a:xfrm>
+          <a:prstGeom prst="rect">
+            <a:avLst/>
+          </a:prstGeom>
+        </p:spPr>
+      </p:pic>
+      <p:sp>
+        <p:nvSpPr>
+          <p:cNvPr id="27" name="Text 20"/>
+          <p:cNvSpPr txBox="1"/>
+          <p:nvPr/>
+        </p:nvSpPr>
+        <p:spPr>
+          <a:xfrm>
+            <a:off x="7370064" y="3977640"/>
+            <a:ext cx="1280160" cy="155448"/>
+          </a:xfrm>
+          <a:prstGeom prst="rect">
+            <a:avLst/>
+          </a:prstGeom>
+          <a:noFill/>
+          <a:ln/>
+        </p:spPr>
+        <p:txBody>
+          <a:bodyPr wrap="square" lIns="0" tIns="0" rIns="0" bIns="0" rtlCol="0" anchor="ctr"/>
+          <a:lstStyle/>
+          <a:p>
+            <a:pPr algn="l" indent="0" marL="0">
+              <a:buNone/>
+            </a:pPr>
+            <a:r>
+              <a:rPr lang="en-US" sz="750" spc="260" kern="0" dirty="0">
                 <a:solidFill>
                   <a:srgbClr val="2F3A26"/>
                 </a:solidFill>
@@ -2330,15 +2946,57 @@
                 <a:ea typeface="Arial" pitchFamily="34" charset="-122"/>
                 <a:cs typeface="Arial" pitchFamily="34" charset="-120"/>
               </a:rPr>
-              <a:t>CERTIFICÁVEL · PURO.EARTH · EBC</a:t>
-            </a:r>
-            <a:endParaRPr lang="en-US" sz="700" dirty="0"/>
-          </a:p>
-        </p:txBody>
-      </p:sp>
-      <p:sp>
-        <p:nvSpPr>
-          <p:cNvPr id="16" name="Shape 14"/>
+              <a:t>BIOCHAR</a:t>
+            </a:r>
+            <a:endParaRPr lang="en-US" sz="750" dirty="0"/>
+          </a:p>
+        </p:txBody>
+      </p:sp>
+      <p:sp>
+        <p:nvSpPr>
+          <p:cNvPr id="28" name="Text 21"/>
+          <p:cNvSpPr txBox="1"/>
+          <p:nvPr/>
+        </p:nvSpPr>
+        <p:spPr>
+          <a:xfrm>
+            <a:off x="7040880" y="4242816"/>
+            <a:ext cx="1536192" cy="310896"/>
+          </a:xfrm>
+          <a:prstGeom prst="rect">
+            <a:avLst/>
+          </a:prstGeom>
+          <a:noFill/>
+          <a:ln/>
+        </p:spPr>
+        <p:txBody>
+          <a:bodyPr wrap="square" lIns="0" tIns="0" rIns="0" bIns="0" rtlCol="0" anchor="t"/>
+          <a:lstStyle/>
+          <a:p>
+            <a:pPr indent="0" marL="0">
+              <a:lnSpc>
+                <a:spcPts val="1163"/>
+              </a:lnSpc>
+              <a:buNone/>
+            </a:pPr>
+            <a:r>
+              <a:rPr lang="en-US" sz="750" dirty="0">
+                <a:solidFill>
+                  <a:srgbClr val="5C5B48"/>
+                </a:solidFill>
+                <a:latin typeface="Arial" pitchFamily="34" charset="0"/>
+                <a:ea typeface="Arial" pitchFamily="34" charset="-122"/>
+                <a:cs typeface="Arial" pitchFamily="34" charset="-120"/>
+              </a:rPr>
+              <a:t>carbono estável, seco</a:t>
+            </a:r>
+            <a:endParaRPr lang="en-US" sz="750" dirty="0"/>
+          </a:p>
+        </p:txBody>
+      </p:sp>
+      <p:sp>
+        <p:nvSpPr>
+          <p:cNvPr id="29" name="Shape 22"/>
           <p:cNvSpPr/>
           <p:nvPr/>
         </p:nvSpPr>
@@ -2360,7 +3018,7 @@
       </p:sp>
       <p:sp>
         <p:nvSpPr>
-          <p:cNvPr id="17" name="Text 15"/>
+          <p:cNvPr id="30" name="Text 23"/>
           <p:cNvSpPr txBox="1"/>
           <p:nvPr/>
         </p:nvSpPr>
@@ -2399,7 +3057,7 @@
       </p:sp>
       <p:sp>
         <p:nvSpPr>
-          <p:cNvPr id="18" name="Text 16"/>
+          <p:cNvPr id="31" name="Text 24"/>
           <p:cNvSpPr txBox="1"/>
           <p:nvPr/>
         </p:nvSpPr>
@@ -2666,29 +3324,53 @@
         <p:spPr>
           <a:xfrm>
             <a:off x="457200" y="2432304"/>
-            <a:ext cx="4023360" cy="7315"/>
+            <a:ext cx="4023360" cy="9144"/>
           </a:xfrm>
           <a:prstGeom prst="rect">
             <a:avLst/>
           </a:prstGeom>
           <a:solidFill>
-            <a:srgbClr val="8A7050">
-              <a:alpha val="38000"/>
+            <a:srgbClr val="7E8C90">
+              <a:alpha val="54000"/>
             </a:srgbClr>
           </a:solidFill>
           <a:ln/>
         </p:spPr>
       </p:sp>
-      <p:sp>
-        <p:nvSpPr>
-          <p:cNvPr id="7" name="Text 5"/>
-          <p:cNvSpPr txBox="1"/>
-          <p:nvPr/>
-        </p:nvSpPr>
-        <p:spPr>
-          <a:xfrm>
-            <a:off x="457200" y="2523744"/>
-            <a:ext cx="1371600" cy="495300"/>
+      <p:pic>
+        <p:nvPicPr>
+          <p:cNvPr id="7" name="Image 0" descr="/home/user/clipping/design-system/.preview/deck-assets/ico/endocarpo-husk.png">    </p:cNvPr>
+          <p:cNvPicPr>
+            <a:picLocks noChangeAspect="1"/>
+          </p:cNvPicPr>
+          <p:nvPr/>
+        </p:nvPicPr>
+        <p:blipFill>
+          <a:blip r:embed="rId2"/>
+          <a:stretch>
+            <a:fillRect/>
+          </a:stretch>
+        </p:blipFill>
+        <p:spPr>
+          <a:xfrm>
+            <a:off x="457200" y="2615184"/>
+            <a:ext cx="256032" cy="256032"/>
+          </a:xfrm>
+          <a:prstGeom prst="rect">
+            <a:avLst/>
+          </a:prstGeom>
+        </p:spPr>
+      </p:pic>
+      <p:sp>
+        <p:nvSpPr>
+          <p:cNvPr id="8" name="Text 5"/>
+          <p:cNvSpPr txBox="1"/>
+          <p:nvPr/>
+        </p:nvSpPr>
+        <p:spPr>
+          <a:xfrm>
+            <a:off x="841248" y="2523744"/>
+            <a:ext cx="1463040" cy="462280"/>
           </a:xfrm>
           <a:prstGeom prst="rect">
             <a:avLst/>
@@ -2704,7 +3386,7 @@
               <a:buNone/>
             </a:pPr>
             <a:r>
-              <a:rPr lang="en-US" sz="3000" spc="-160" kern="0" dirty="0">
+              <a:rPr lang="en-US" sz="2800" spc="-160" kern="0" dirty="0">
                 <a:solidFill>
                   <a:srgbClr val="2F3A26"/>
                 </a:solidFill>
@@ -2714,19 +3396,19 @@
               </a:rPr>
               <a:t>25–53%</a:t>
             </a:r>
-            <a:endParaRPr lang="en-US" sz="3000" dirty="0"/>
-          </a:p>
-        </p:txBody>
-      </p:sp>
-      <p:sp>
-        <p:nvSpPr>
-          <p:cNvPr id="8" name="Text 6"/>
-          <p:cNvSpPr txBox="1"/>
-          <p:nvPr/>
-        </p:nvSpPr>
-        <p:spPr>
-          <a:xfrm>
-            <a:off x="1920240" y="2578608"/>
+            <a:endParaRPr lang="en-US" sz="2800" dirty="0"/>
+          </a:p>
+        </p:txBody>
+      </p:sp>
+      <p:sp>
+        <p:nvSpPr>
+          <p:cNvPr id="9" name="Text 6"/>
+          <p:cNvSpPr txBox="1"/>
+          <p:nvPr/>
+        </p:nvSpPr>
+        <p:spPr>
+          <a:xfrm>
+            <a:off x="2359152" y="2578608"/>
             <a:ext cx="2103120" cy="155448"/>
           </a:xfrm>
           <a:prstGeom prst="rect">
@@ -2759,14 +3441,14 @@
       </p:sp>
       <p:sp>
         <p:nvSpPr>
-          <p:cNvPr id="9" name="Text 7"/>
-          <p:cNvSpPr txBox="1"/>
-          <p:nvPr/>
-        </p:nvSpPr>
-        <p:spPr>
-          <a:xfrm>
-            <a:off x="1920240" y="2761488"/>
-            <a:ext cx="2560320" cy="329184"/>
+          <p:cNvPr id="10" name="Text 7"/>
+          <p:cNvSpPr txBox="1"/>
+          <p:nvPr/>
+        </p:nvSpPr>
+        <p:spPr>
+          <a:xfrm>
+            <a:off x="2359152" y="2761488"/>
+            <a:ext cx="2121408" cy="384048"/>
           </a:xfrm>
           <a:prstGeom prst="rect">
             <a:avLst/>
@@ -2801,36 +3483,60 @@
       </p:sp>
       <p:sp>
         <p:nvSpPr>
-          <p:cNvPr id="10" name="Shape 8"/>
+          <p:cNvPr id="11" name="Shape 8"/>
           <p:cNvSpPr/>
           <p:nvPr/>
         </p:nvSpPr>
         <p:spPr>
           <a:xfrm>
             <a:off x="457200" y="3218688"/>
-            <a:ext cx="4023360" cy="7315"/>
+            <a:ext cx="4023360" cy="9144"/>
           </a:xfrm>
           <a:prstGeom prst="rect">
             <a:avLst/>
           </a:prstGeom>
           <a:solidFill>
-            <a:srgbClr val="8A7050">
-              <a:alpha val="38000"/>
+            <a:srgbClr val="7E8C90">
+              <a:alpha val="54000"/>
             </a:srgbClr>
           </a:solidFill>
           <a:ln/>
         </p:spPr>
       </p:sp>
-      <p:sp>
-        <p:nvSpPr>
-          <p:cNvPr id="11" name="Text 9"/>
-          <p:cNvSpPr txBox="1"/>
-          <p:nvPr/>
-        </p:nvSpPr>
-        <p:spPr>
-          <a:xfrm>
-            <a:off x="457200" y="3310128"/>
-            <a:ext cx="1371600" cy="429260"/>
+      <p:pic>
+        <p:nvPicPr>
+          <p:cNvPr id="12" name="Image 1" descr="/home/user/clipping/design-system/.preview/deck-assets/ico/char-dark.png">    </p:cNvPr>
+          <p:cNvPicPr>
+            <a:picLocks noChangeAspect="1"/>
+          </p:cNvPicPr>
+          <p:nvPr/>
+        </p:nvPicPr>
+        <p:blipFill>
+          <a:blip r:embed="rId3"/>
+          <a:stretch>
+            <a:fillRect/>
+          </a:stretch>
+        </p:blipFill>
+        <p:spPr>
+          <a:xfrm>
+            <a:off x="457200" y="3401568"/>
+            <a:ext cx="256032" cy="256032"/>
+          </a:xfrm>
+          <a:prstGeom prst="rect">
+            <a:avLst/>
+          </a:prstGeom>
+        </p:spPr>
+      </p:pic>
+      <p:sp>
+        <p:nvSpPr>
+          <p:cNvPr id="13" name="Text 9"/>
+          <p:cNvSpPr txBox="1"/>
+          <p:nvPr/>
+        </p:nvSpPr>
+        <p:spPr>
+          <a:xfrm>
+            <a:off x="841248" y="3310128"/>
+            <a:ext cx="1463040" cy="429260"/>
           </a:xfrm>
           <a:prstGeom prst="rect">
             <a:avLst/>
@@ -2862,13 +3568,13 @@
       </p:sp>
       <p:sp>
         <p:nvSpPr>
-          <p:cNvPr id="12" name="Text 10"/>
-          <p:cNvSpPr txBox="1"/>
-          <p:nvPr/>
-        </p:nvSpPr>
-        <p:spPr>
-          <a:xfrm>
-            <a:off x="1920240" y="3364992"/>
+          <p:cNvPr id="14" name="Text 10"/>
+          <p:cNvSpPr txBox="1"/>
+          <p:nvPr/>
+        </p:nvSpPr>
+        <p:spPr>
+          <a:xfrm>
+            <a:off x="2359152" y="3364992"/>
             <a:ext cx="2103120" cy="155448"/>
           </a:xfrm>
           <a:prstGeom prst="rect">
@@ -2901,14 +3607,14 @@
       </p:sp>
       <p:sp>
         <p:nvSpPr>
-          <p:cNvPr id="13" name="Text 11"/>
-          <p:cNvSpPr txBox="1"/>
-          <p:nvPr/>
-        </p:nvSpPr>
-        <p:spPr>
-          <a:xfrm>
-            <a:off x="1920240" y="3547872"/>
-            <a:ext cx="2560320" cy="329184"/>
+          <p:cNvPr id="15" name="Text 11"/>
+          <p:cNvSpPr txBox="1"/>
+          <p:nvPr/>
+        </p:nvSpPr>
+        <p:spPr>
+          <a:xfrm>
+            <a:off x="2359152" y="3547872"/>
+            <a:ext cx="2121408" cy="384048"/>
           </a:xfrm>
           <a:prstGeom prst="rect">
             <a:avLst/>
@@ -2943,36 +3649,60 @@
       </p:sp>
       <p:sp>
         <p:nvSpPr>
-          <p:cNvPr id="14" name="Shape 12"/>
+          <p:cNvPr id="16" name="Shape 12"/>
           <p:cNvSpPr/>
           <p:nvPr/>
         </p:nvSpPr>
         <p:spPr>
           <a:xfrm>
             <a:off x="457200" y="4005072"/>
-            <a:ext cx="4023360" cy="7315"/>
+            <a:ext cx="4023360" cy="9144"/>
           </a:xfrm>
           <a:prstGeom prst="rect">
             <a:avLst/>
           </a:prstGeom>
           <a:solidFill>
-            <a:srgbClr val="8A7050">
-              <a:alpha val="38000"/>
+            <a:srgbClr val="7E8C90">
+              <a:alpha val="54000"/>
             </a:srgbClr>
           </a:solidFill>
           <a:ln/>
         </p:spPr>
       </p:sp>
-      <p:sp>
-        <p:nvSpPr>
-          <p:cNvPr id="15" name="Text 13"/>
-          <p:cNvSpPr txBox="1"/>
-          <p:nvPr/>
-        </p:nvSpPr>
-        <p:spPr>
-          <a:xfrm>
-            <a:off x="457200" y="4096512"/>
-            <a:ext cx="1371600" cy="429260"/>
+      <p:pic>
+        <p:nvPicPr>
+          <p:cNvPr id="17" name="Image 2" descr="/home/user/clipping/design-system/.preview/deck-assets/ico/secao-husk.png">    </p:cNvPr>
+          <p:cNvPicPr>
+            <a:picLocks noChangeAspect="1"/>
+          </p:cNvPicPr>
+          <p:nvPr/>
+        </p:nvPicPr>
+        <p:blipFill>
+          <a:blip r:embed="rId4"/>
+          <a:stretch>
+            <a:fillRect/>
+          </a:stretch>
+        </p:blipFill>
+        <p:spPr>
+          <a:xfrm>
+            <a:off x="457200" y="4187952"/>
+            <a:ext cx="256032" cy="256032"/>
+          </a:xfrm>
+          <a:prstGeom prst="rect">
+            <a:avLst/>
+          </a:prstGeom>
+        </p:spPr>
+      </p:pic>
+      <p:sp>
+        <p:nvSpPr>
+          <p:cNvPr id="18" name="Text 13"/>
+          <p:cNvSpPr txBox="1"/>
+          <p:nvPr/>
+        </p:nvSpPr>
+        <p:spPr>
+          <a:xfrm>
+            <a:off x="841248" y="4096512"/>
+            <a:ext cx="1463040" cy="429260"/>
           </a:xfrm>
           <a:prstGeom prst="rect">
             <a:avLst/>
@@ -3004,13 +3734,13 @@
       </p:sp>
       <p:sp>
         <p:nvSpPr>
-          <p:cNvPr id="16" name="Text 14"/>
-          <p:cNvSpPr txBox="1"/>
-          <p:nvPr/>
-        </p:nvSpPr>
-        <p:spPr>
-          <a:xfrm>
-            <a:off x="1920240" y="4151376"/>
+          <p:cNvPr id="19" name="Text 14"/>
+          <p:cNvSpPr txBox="1"/>
+          <p:nvPr/>
+        </p:nvSpPr>
+        <p:spPr>
+          <a:xfrm>
+            <a:off x="2359152" y="4151376"/>
             <a:ext cx="2103120" cy="155448"/>
           </a:xfrm>
           <a:prstGeom prst="rect">
@@ -3043,14 +3773,14 @@
       </p:sp>
       <p:sp>
         <p:nvSpPr>
-          <p:cNvPr id="17" name="Text 15"/>
-          <p:cNvSpPr txBox="1"/>
-          <p:nvPr/>
-        </p:nvSpPr>
-        <p:spPr>
-          <a:xfrm>
-            <a:off x="1920240" y="4334256"/>
-            <a:ext cx="2560320" cy="329184"/>
+          <p:cNvPr id="20" name="Text 15"/>
+          <p:cNvSpPr txBox="1"/>
+          <p:nvPr/>
+        </p:nvSpPr>
+        <p:spPr>
+          <a:xfrm>
+            <a:off x="2359152" y="4334256"/>
+            <a:ext cx="2121408" cy="384048"/>
           </a:xfrm>
           <a:prstGeom prst="rect">
             <a:avLst/>
@@ -3085,7 +3815,7 @@
       </p:sp>
       <p:sp>
         <p:nvSpPr>
-          <p:cNvPr id="18" name="Shape 16"/>
+          <p:cNvPr id="21" name="Shape 16"/>
           <p:cNvSpPr/>
           <p:nvPr/>
         </p:nvSpPr>
@@ -3107,7 +3837,7 @@
       </p:sp>
       <p:sp>
         <p:nvSpPr>
-          <p:cNvPr id="19" name="Text 17"/>
+          <p:cNvPr id="22" name="Text 17"/>
           <p:cNvSpPr txBox="1"/>
           <p:nvPr/>
         </p:nvSpPr>
@@ -3146,7 +3876,7 @@
       </p:sp>
       <p:sp>
         <p:nvSpPr>
-          <p:cNvPr id="20" name="Text 18"/>
+          <p:cNvPr id="23" name="Text 18"/>
           <p:cNvSpPr txBox="1"/>
           <p:nvPr/>
         </p:nvSpPr>
@@ -3362,15 +4092,61 @@
           </a:p>
         </p:txBody>
       </p:sp>
-      <p:sp>
-        <p:nvSpPr>
-          <p:cNvPr id="5" name="Text 3"/>
-          <p:cNvSpPr txBox="1"/>
-          <p:nvPr/>
-        </p:nvSpPr>
-        <p:spPr>
-          <a:xfrm>
-            <a:off x="822960" y="2962656"/>
+      <p:pic>
+        <p:nvPicPr>
+          <p:cNvPr id="5" name="Image 0" descr="/home/user/clipping/design-system/.preview/deck-assets/ico/pilha-husk.png">    </p:cNvPr>
+          <p:cNvPicPr>
+            <a:picLocks noChangeAspect="1"/>
+          </p:cNvPicPr>
+          <p:nvPr/>
+        </p:nvPicPr>
+        <p:blipFill>
+          <a:blip r:embed="rId2"/>
+          <a:stretch>
+            <a:fillRect/>
+          </a:stretch>
+        </p:blipFill>
+        <p:spPr>
+          <a:xfrm>
+            <a:off x="822960" y="3072384"/>
+            <a:ext cx="256032" cy="256032"/>
+          </a:xfrm>
+          <a:prstGeom prst="rect">
+            <a:avLst/>
+          </a:prstGeom>
+        </p:spPr>
+      </p:pic>
+      <p:sp>
+        <p:nvSpPr>
+          <p:cNvPr id="6" name="Shape 3"/>
+          <p:cNvSpPr/>
+          <p:nvPr/>
+        </p:nvSpPr>
+        <p:spPr>
+          <a:xfrm>
+            <a:off x="822960" y="3346704"/>
+            <a:ext cx="2194560" cy="9144"/>
+          </a:xfrm>
+          <a:prstGeom prst="rect">
+            <a:avLst/>
+          </a:prstGeom>
+          <a:solidFill>
+            <a:srgbClr val="7E8C90">
+              <a:alpha val="54000"/>
+            </a:srgbClr>
+          </a:solidFill>
+          <a:ln/>
+        </p:spPr>
+      </p:sp>
+      <p:sp>
+        <p:nvSpPr>
+          <p:cNvPr id="7" name="Text 4"/>
+          <p:cNvSpPr txBox="1"/>
+          <p:nvPr/>
+        </p:nvSpPr>
+        <p:spPr>
+          <a:xfrm>
+            <a:off x="822960" y="3401568"/>
             <a:ext cx="2011680" cy="155448"/>
           </a:xfrm>
           <a:prstGeom prst="rect">
@@ -3403,13 +4179,13 @@
       </p:sp>
       <p:sp>
         <p:nvSpPr>
-          <p:cNvPr id="6" name="Text 4"/>
-          <p:cNvSpPr txBox="1"/>
-          <p:nvPr/>
-        </p:nvSpPr>
-        <p:spPr>
-          <a:xfrm>
-            <a:off x="822960" y="3163824"/>
+          <p:cNvPr id="8" name="Text 5"/>
+          <p:cNvSpPr txBox="1"/>
+          <p:nvPr/>
+        </p:nvSpPr>
+        <p:spPr>
+          <a:xfrm>
+            <a:off x="822960" y="3602736"/>
             <a:ext cx="2194560" cy="173736"/>
           </a:xfrm>
           <a:prstGeom prst="rect">
@@ -3442,13 +4218,13 @@
       </p:sp>
       <p:sp>
         <p:nvSpPr>
-          <p:cNvPr id="7" name="Text 5"/>
-          <p:cNvSpPr txBox="1"/>
-          <p:nvPr/>
-        </p:nvSpPr>
-        <p:spPr>
-          <a:xfrm>
-            <a:off x="822960" y="3401568"/>
+          <p:cNvPr id="9" name="Text 6"/>
+          <p:cNvSpPr txBox="1"/>
+          <p:nvPr/>
+        </p:nvSpPr>
+        <p:spPr>
+          <a:xfrm>
+            <a:off x="822960" y="3840480"/>
             <a:ext cx="2011680" cy="155448"/>
           </a:xfrm>
           <a:prstGeom prst="rect">
@@ -3481,13 +4257,13 @@
       </p:sp>
       <p:sp>
         <p:nvSpPr>
-          <p:cNvPr id="8" name="Text 6"/>
-          <p:cNvSpPr txBox="1"/>
-          <p:nvPr/>
-        </p:nvSpPr>
-        <p:spPr>
-          <a:xfrm>
-            <a:off x="822960" y="3566160"/>
+          <p:cNvPr id="10" name="Text 7"/>
+          <p:cNvSpPr txBox="1"/>
+          <p:nvPr/>
+        </p:nvSpPr>
+        <p:spPr>
+          <a:xfrm>
+            <a:off x="822960" y="4005072"/>
             <a:ext cx="2194560" cy="365760"/>
           </a:xfrm>
           <a:prstGeom prst="rect">
@@ -3521,15 +4297,61 @@
           </a:p>
         </p:txBody>
       </p:sp>
-      <p:sp>
-        <p:nvSpPr>
-          <p:cNvPr id="9" name="Text 7"/>
-          <p:cNvSpPr txBox="1"/>
-          <p:nvPr/>
-        </p:nvSpPr>
-        <p:spPr>
-          <a:xfrm>
-            <a:off x="5120640" y="2962656"/>
+      <p:pic>
+        <p:nvPicPr>
+          <p:cNvPr id="11" name="Image 1" descr="/home/user/clipping/design-system/.preview/deck-assets/ico/char-dark.png">    </p:cNvPr>
+          <p:cNvPicPr>
+            <a:picLocks noChangeAspect="1"/>
+          </p:cNvPicPr>
+          <p:nvPr/>
+        </p:nvPicPr>
+        <p:blipFill>
+          <a:blip r:embed="rId3"/>
+          <a:stretch>
+            <a:fillRect/>
+          </a:stretch>
+        </p:blipFill>
+        <p:spPr>
+          <a:xfrm>
+            <a:off x="5120640" y="3072384"/>
+            <a:ext cx="256032" cy="256032"/>
+          </a:xfrm>
+          <a:prstGeom prst="rect">
+            <a:avLst/>
+          </a:prstGeom>
+        </p:spPr>
+      </p:pic>
+      <p:sp>
+        <p:nvSpPr>
+          <p:cNvPr id="12" name="Shape 8"/>
+          <p:cNvSpPr/>
+          <p:nvPr/>
+        </p:nvSpPr>
+        <p:spPr>
+          <a:xfrm>
+            <a:off x="5120640" y="3346704"/>
+            <a:ext cx="2194560" cy="9144"/>
+          </a:xfrm>
+          <a:prstGeom prst="rect">
+            <a:avLst/>
+          </a:prstGeom>
+          <a:solidFill>
+            <a:srgbClr val="7E8C90">
+              <a:alpha val="54000"/>
+            </a:srgbClr>
+          </a:solidFill>
+          <a:ln/>
+        </p:spPr>
+      </p:sp>
+      <p:sp>
+        <p:nvSpPr>
+          <p:cNvPr id="13" name="Text 9"/>
+          <p:cNvSpPr txBox="1"/>
+          <p:nvPr/>
+        </p:nvSpPr>
+        <p:spPr>
+          <a:xfrm>
+            <a:off x="5120640" y="3401568"/>
             <a:ext cx="2011680" cy="155448"/>
           </a:xfrm>
           <a:prstGeom prst="rect">
@@ -3562,13 +4384,13 @@
       </p:sp>
       <p:sp>
         <p:nvSpPr>
-          <p:cNvPr id="10" name="Text 8"/>
-          <p:cNvSpPr txBox="1"/>
-          <p:nvPr/>
-        </p:nvSpPr>
-        <p:spPr>
-          <a:xfrm>
-            <a:off x="5120640" y="3163824"/>
+          <p:cNvPr id="14" name="Text 10"/>
+          <p:cNvSpPr txBox="1"/>
+          <p:nvPr/>
+        </p:nvSpPr>
+        <p:spPr>
+          <a:xfrm>
+            <a:off x="5120640" y="3602736"/>
             <a:ext cx="2194560" cy="173736"/>
           </a:xfrm>
           <a:prstGeom prst="rect">
@@ -3601,13 +4423,13 @@
       </p:sp>
       <p:sp>
         <p:nvSpPr>
-          <p:cNvPr id="11" name="Text 9"/>
-          <p:cNvSpPr txBox="1"/>
-          <p:nvPr/>
-        </p:nvSpPr>
-        <p:spPr>
-          <a:xfrm>
-            <a:off x="5120640" y="3401568"/>
+          <p:cNvPr id="15" name="Text 11"/>
+          <p:cNvSpPr txBox="1"/>
+          <p:nvPr/>
+        </p:nvSpPr>
+        <p:spPr>
+          <a:xfrm>
+            <a:off x="5120640" y="3840480"/>
             <a:ext cx="2011680" cy="155448"/>
           </a:xfrm>
           <a:prstGeom prst="rect">
@@ -3640,13 +4462,13 @@
       </p:sp>
       <p:sp>
         <p:nvSpPr>
-          <p:cNvPr id="12" name="Text 10"/>
-          <p:cNvSpPr txBox="1"/>
-          <p:nvPr/>
-        </p:nvSpPr>
-        <p:spPr>
-          <a:xfrm>
-            <a:off x="5120640" y="3566160"/>
+          <p:cNvPr id="16" name="Text 12"/>
+          <p:cNvSpPr txBox="1"/>
+          <p:nvPr/>
+        </p:nvSpPr>
+        <p:spPr>
+          <a:xfrm>
+            <a:off x="5120640" y="4005072"/>
             <a:ext cx="2194560" cy="365760"/>
           </a:xfrm>
           <a:prstGeom prst="rect">
@@ -3682,7 +4504,46 @@
       </p:sp>
       <p:sp>
         <p:nvSpPr>
-          <p:cNvPr id="13" name="Text 11"/>
+          <p:cNvPr id="17" name="Text 13"/>
+          <p:cNvSpPr txBox="1"/>
+          <p:nvPr/>
+        </p:nvSpPr>
+        <p:spPr>
+          <a:xfrm>
+            <a:off x="2331720" y="2395728"/>
+            <a:ext cx="2651760" cy="155448"/>
+          </a:xfrm>
+          <a:prstGeom prst="rect">
+            <a:avLst/>
+          </a:prstGeom>
+          <a:noFill/>
+          <a:ln/>
+        </p:spPr>
+        <p:txBody>
+          <a:bodyPr wrap="square" lIns="0" tIns="0" rIns="0" bIns="0" rtlCol="0" anchor="ctr"/>
+          <a:lstStyle/>
+          <a:p>
+            <a:pPr algn="ctr" indent="0" marL="0">
+              <a:buNone/>
+            </a:pPr>
+            <a:r>
+              <a:rPr lang="en-US" sz="750" spc="260" kern="0" dirty="0">
+                <a:solidFill>
+                  <a:srgbClr val="8A7050"/>
+                </a:solidFill>
+                <a:latin typeface="Arial" pitchFamily="34" charset="0"/>
+                <a:ea typeface="Arial" pitchFamily="34" charset="-122"/>
+                <a:cs typeface="Arial" pitchFamily="34" charset="-120"/>
+              </a:rPr>
+              <a:t>−70% DE MASSA</a:t>
+            </a:r>
+            <a:endParaRPr lang="en-US" sz="750" dirty="0"/>
+          </a:p>
+        </p:txBody>
+      </p:sp>
+      <p:sp>
+        <p:nvSpPr>
+          <p:cNvPr id="18" name="Text 14"/>
           <p:cNvSpPr txBox="1"/>
           <p:nvPr/>
         </p:nvSpPr>
@@ -3705,7 +4566,7 @@
               <a:buNone/>
             </a:pPr>
             <a:r>
-              <a:rPr lang="en-US" sz="750" spc="260" kern="0" dirty="0">
+              <a:rPr lang="en-US" sz="620" spc="260" kern="0" dirty="0">
                 <a:solidFill>
                   <a:srgbClr val="8A7050"/>
                 </a:solidFill>
@@ -3713,45 +4574,6 @@
                 <a:ea typeface="Arial" pitchFamily="34" charset="-122"/>
                 <a:cs typeface="Arial" pitchFamily="34" charset="-120"/>
               </a:rPr>
-              <a:t>−70% DE MASSA</a:t>
-            </a:r>
-            <a:endParaRPr lang="en-US" sz="750" dirty="0"/>
-          </a:p>
-        </p:txBody>
-      </p:sp>
-      <p:sp>
-        <p:nvSpPr>
-          <p:cNvPr id="14" name="Text 12"/>
-          <p:cNvSpPr txBox="1"/>
-          <p:nvPr/>
-        </p:nvSpPr>
-        <p:spPr>
-          <a:xfrm>
-            <a:off x="2331720" y="2724912"/>
-            <a:ext cx="2651760" cy="155448"/>
-          </a:xfrm>
-          <a:prstGeom prst="rect">
-            <a:avLst/>
-          </a:prstGeom>
-          <a:noFill/>
-          <a:ln/>
-        </p:spPr>
-        <p:txBody>
-          <a:bodyPr wrap="square" lIns="0" tIns="0" rIns="0" bIns="0" rtlCol="0" anchor="ctr"/>
-          <a:lstStyle/>
-          <a:p>
-            <a:pPr algn="ctr" indent="0" marL="0">
-              <a:buNone/>
-            </a:pPr>
-            <a:r>
-              <a:rPr lang="en-US" sz="620" spc="260" kern="0" dirty="0">
-                <a:solidFill>
-                  <a:srgbClr val="8A7050"/>
-                </a:solidFill>
-                <a:latin typeface="Arial" pitchFamily="34" charset="0"/>
-                <a:ea typeface="Arial" pitchFamily="34" charset="-122"/>
-                <a:cs typeface="Arial" pitchFamily="34" charset="-120"/>
-              </a:rPr>
               <a:t>A ÁREA DE CADA QUADRADO É A MASSA</a:t>
             </a:r>
             <a:endParaRPr lang="en-US" sz="620" dirty="0"/>
@@ -3760,7 +4582,7 @@
       </p:sp>
       <p:sp>
         <p:nvSpPr>
-          <p:cNvPr id="15" name="Shape 13"/>
+          <p:cNvPr id="19" name="Shape 15"/>
           <p:cNvSpPr/>
           <p:nvPr/>
         </p:nvSpPr>
@@ -3782,7 +4604,7 @@
       </p:sp>
       <p:sp>
         <p:nvSpPr>
-          <p:cNvPr id="16" name="Text 14"/>
+          <p:cNvPr id="20" name="Text 16"/>
           <p:cNvSpPr txBox="1"/>
           <p:nvPr/>
         </p:nvSpPr>
@@ -3821,7 +4643,7 @@
       </p:sp>
       <p:sp>
         <p:nvSpPr>
-          <p:cNvPr id="17" name="Text 15"/>
+          <p:cNvPr id="21" name="Text 17"/>
           <p:cNvSpPr txBox="1"/>
           <p:nvPr/>
         </p:nvSpPr>
@@ -3983,7 +4805,7 @@
         </p:nvSpPr>
         <p:spPr>
           <a:xfrm>
-            <a:off x="457200" y="768096"/>
+            <a:off x="457200" y="731520"/>
             <a:ext cx="4937760" cy="915416"/>
           </a:xfrm>
           <a:prstGeom prst="rect">
@@ -4045,8 +4867,8 @@
         </p:nvSpPr>
         <p:spPr>
           <a:xfrm>
-            <a:off x="457200" y="1755648"/>
-            <a:ext cx="4206240" cy="548640"/>
+            <a:off x="457200" y="1700784"/>
+            <a:ext cx="4023360" cy="420624"/>
           </a:xfrm>
           <a:prstGeom prst="rect">
             <a:avLst/>
@@ -4079,9 +4901,33 @@
           </a:p>
         </p:txBody>
       </p:sp>
-      <p:sp>
-        <p:nvSpPr>
-          <p:cNvPr id="6" name="Text 4"/>
+      <p:pic>
+        <p:nvPicPr>
+          <p:cNvPr id="6" name="Image 0" descr="/home/user/clipping/design-system/.preview/deck-assets/ico/solo-palm.png">    </p:cNvPr>
+          <p:cNvPicPr>
+            <a:picLocks noChangeAspect="1"/>
+          </p:cNvPicPr>
+          <p:nvPr/>
+        </p:nvPicPr>
+        <p:blipFill>
+          <a:blip r:embed="rId2"/>
+          <a:stretch>
+            <a:fillRect/>
+          </a:stretch>
+        </p:blipFill>
+        <p:spPr>
+          <a:xfrm>
+            <a:off x="1792224" y="2212848"/>
+            <a:ext cx="256032" cy="256032"/>
+          </a:xfrm>
+          <a:prstGeom prst="rect">
+            <a:avLst/>
+          </a:prstGeom>
+        </p:spPr>
+      </p:pic>
+      <p:sp>
+        <p:nvSpPr>
+          <p:cNvPr id="7" name="Text 4"/>
           <p:cNvSpPr txBox="1"/>
           <p:nvPr/>
         </p:nvSpPr>
@@ -4120,7 +4966,7 @@
       </p:sp>
       <p:sp>
         <p:nvSpPr>
-          <p:cNvPr id="7" name="Text 5"/>
+          <p:cNvPr id="8" name="Text 5"/>
           <p:cNvSpPr txBox="1"/>
           <p:nvPr/>
         </p:nvSpPr>
@@ -4159,7 +5005,7 @@
       </p:sp>
       <p:sp>
         <p:nvSpPr>
-          <p:cNvPr id="8" name="Text 6"/>
+          <p:cNvPr id="9" name="Text 6"/>
           <p:cNvSpPr txBox="1"/>
           <p:nvPr/>
         </p:nvSpPr>
@@ -4196,9 +5042,33 @@
           </a:p>
         </p:txBody>
       </p:sp>
-      <p:sp>
-        <p:nvSpPr>
-          <p:cNvPr id="9" name="Text 7"/>
+      <p:pic>
+        <p:nvPicPr>
+          <p:cNvPr id="10" name="Image 1" descr="/home/user/clipping/design-system/.preview/deck-assets/ico/palmeira-palm.png">    </p:cNvPr>
+          <p:cNvPicPr>
+            <a:picLocks noChangeAspect="1"/>
+          </p:cNvPicPr>
+          <p:nvPr/>
+        </p:nvPicPr>
+        <p:blipFill>
+          <a:blip r:embed="rId3"/>
+          <a:stretch>
+            <a:fillRect/>
+          </a:stretch>
+        </p:blipFill>
+        <p:spPr>
+          <a:xfrm>
+            <a:off x="3986784" y="2212848"/>
+            <a:ext cx="256032" cy="256032"/>
+          </a:xfrm>
+          <a:prstGeom prst="rect">
+            <a:avLst/>
+          </a:prstGeom>
+        </p:spPr>
+      </p:pic>
+      <p:sp>
+        <p:nvSpPr>
+          <p:cNvPr id="11" name="Text 7"/>
           <p:cNvSpPr txBox="1"/>
           <p:nvPr/>
         </p:nvSpPr>
@@ -4237,7 +5107,7 @@
       </p:sp>
       <p:sp>
         <p:nvSpPr>
-          <p:cNvPr id="10" name="Text 8"/>
+          <p:cNvPr id="12" name="Text 8"/>
           <p:cNvSpPr txBox="1"/>
           <p:nvPr/>
         </p:nvSpPr>
@@ -4276,7 +5146,7 @@
       </p:sp>
       <p:sp>
         <p:nvSpPr>
-          <p:cNvPr id="11" name="Text 9"/>
+          <p:cNvPr id="13" name="Text 9"/>
           <p:cNvSpPr txBox="1"/>
           <p:nvPr/>
         </p:nvSpPr>
@@ -4313,9 +5183,33 @@
           </a:p>
         </p:txBody>
       </p:sp>
-      <p:sp>
-        <p:nvSpPr>
-          <p:cNvPr id="12" name="Text 10"/>
+      <p:pic>
+        <p:nvPicPr>
+          <p:cNvPr id="14" name="Image 2" descr="/home/user/clipping/design-system/.preview/deck-assets/ico/unidade-steel.png">    </p:cNvPr>
+          <p:cNvPicPr>
+            <a:picLocks noChangeAspect="1"/>
+          </p:cNvPicPr>
+          <p:nvPr/>
+        </p:nvPicPr>
+        <p:blipFill>
+          <a:blip r:embed="rId4"/>
+          <a:stretch>
+            <a:fillRect/>
+          </a:stretch>
+        </p:blipFill>
+        <p:spPr>
+          <a:xfrm>
+            <a:off x="6089904" y="2212848"/>
+            <a:ext cx="256032" cy="256032"/>
+          </a:xfrm>
+          <a:prstGeom prst="rect">
+            <a:avLst/>
+          </a:prstGeom>
+        </p:spPr>
+      </p:pic>
+      <p:sp>
+        <p:nvSpPr>
+          <p:cNvPr id="15" name="Text 10"/>
           <p:cNvSpPr txBox="1"/>
           <p:nvPr/>
         </p:nvSpPr>
@@ -4354,7 +5248,7 @@
       </p:sp>
       <p:sp>
         <p:nvSpPr>
-          <p:cNvPr id="13" name="Text 11"/>
+          <p:cNvPr id="16" name="Text 11"/>
           <p:cNvSpPr txBox="1"/>
           <p:nvPr/>
         </p:nvSpPr>
@@ -4393,7 +5287,7 @@
       </p:sp>
       <p:sp>
         <p:nvSpPr>
-          <p:cNvPr id="14" name="Text 12"/>
+          <p:cNvPr id="17" name="Text 12"/>
           <p:cNvSpPr txBox="1"/>
           <p:nvPr/>
         </p:nvSpPr>
@@ -4430,9 +5324,33 @@
           </a:p>
         </p:txBody>
       </p:sp>
-      <p:sp>
-        <p:nvSpPr>
-          <p:cNvPr id="15" name="Text 13"/>
+      <p:pic>
+        <p:nvPicPr>
+          <p:cNvPr id="18" name="Image 3" descr="/home/user/clipping/design-system/.preview/deck-assets/ico/removal-dark.png">    </p:cNvPr>
+          <p:cNvPicPr>
+            <a:picLocks noChangeAspect="1"/>
+          </p:cNvPicPr>
+          <p:nvPr/>
+        </p:nvPicPr>
+        <p:blipFill>
+          <a:blip r:embed="rId5"/>
+          <a:stretch>
+            <a:fillRect/>
+          </a:stretch>
+        </p:blipFill>
+        <p:spPr>
+          <a:xfrm>
+            <a:off x="7781544" y="2212848"/>
+            <a:ext cx="256032" cy="256032"/>
+          </a:xfrm>
+          <a:prstGeom prst="rect">
+            <a:avLst/>
+          </a:prstGeom>
+        </p:spPr>
+      </p:pic>
+      <p:sp>
+        <p:nvSpPr>
+          <p:cNvPr id="19" name="Text 13"/>
           <p:cNvSpPr txBox="1"/>
           <p:nvPr/>
         </p:nvSpPr>
@@ -4471,7 +5389,7 @@
       </p:sp>
       <p:sp>
         <p:nvSpPr>
-          <p:cNvPr id="16" name="Text 14"/>
+          <p:cNvPr id="20" name="Text 14"/>
           <p:cNvSpPr txBox="1"/>
           <p:nvPr/>
         </p:nvSpPr>
@@ -4510,7 +5428,7 @@
       </p:sp>
       <p:sp>
         <p:nvSpPr>
-          <p:cNvPr id="17" name="Text 15"/>
+          <p:cNvPr id="21" name="Text 15"/>
           <p:cNvSpPr txBox="1"/>
           <p:nvPr/>
         </p:nvSpPr>
@@ -4549,36 +5467,60 @@
       </p:sp>
       <p:sp>
         <p:nvSpPr>
-          <p:cNvPr id="18" name="Shape 16"/>
+          <p:cNvPr id="22" name="Shape 16"/>
           <p:cNvSpPr/>
           <p:nvPr/>
         </p:nvSpPr>
         <p:spPr>
           <a:xfrm>
             <a:off x="457200" y="3712464"/>
-            <a:ext cx="8229600" cy="7315"/>
+            <a:ext cx="8229600" cy="9144"/>
           </a:xfrm>
           <a:prstGeom prst="rect">
             <a:avLst/>
           </a:prstGeom>
           <a:solidFill>
-            <a:srgbClr val="4D6640">
-              <a:alpha val="50000"/>
+            <a:srgbClr val="7E8C90">
+              <a:alpha val="54000"/>
             </a:srgbClr>
           </a:solidFill>
           <a:ln/>
         </p:spPr>
       </p:sp>
-      <p:sp>
-        <p:nvSpPr>
-          <p:cNvPr id="19" name="Text 17"/>
-          <p:cNvSpPr txBox="1"/>
-          <p:nvPr/>
-        </p:nvSpPr>
-        <p:spPr>
-          <a:xfrm>
-            <a:off x="457200" y="3822192"/>
-            <a:ext cx="2377440" cy="495300"/>
+      <p:pic>
+        <p:nvPicPr>
+          <p:cNvPr id="23" name="Image 4" descr="/home/user/clipping/design-system/.preview/deck-assets/ico/muda-palm.png">    </p:cNvPr>
+          <p:cNvPicPr>
+            <a:picLocks noChangeAspect="1"/>
+          </p:cNvPicPr>
+          <p:nvPr/>
+        </p:nvPicPr>
+        <p:blipFill>
+          <a:blip r:embed="rId6"/>
+          <a:stretch>
+            <a:fillRect/>
+          </a:stretch>
+        </p:blipFill>
+        <p:spPr>
+          <a:xfrm>
+            <a:off x="457200" y="3931920"/>
+            <a:ext cx="256032" cy="256032"/>
+          </a:xfrm>
+          <a:prstGeom prst="rect">
+            <a:avLst/>
+          </a:prstGeom>
+        </p:spPr>
+      </p:pic>
+      <p:sp>
+        <p:nvSpPr>
+          <p:cNvPr id="24" name="Text 17"/>
+          <p:cNvSpPr txBox="1"/>
+          <p:nvPr/>
+        </p:nvSpPr>
+        <p:spPr>
+          <a:xfrm>
+            <a:off x="841248" y="3822192"/>
+            <a:ext cx="2194560" cy="495300"/>
           </a:xfrm>
           <a:prstGeom prst="rect">
             <a:avLst/>
@@ -4610,14 +5552,14 @@
       </p:sp>
       <p:sp>
         <p:nvSpPr>
-          <p:cNvPr id="20" name="Text 18"/>
-          <p:cNvSpPr txBox="1"/>
-          <p:nvPr/>
-        </p:nvSpPr>
-        <p:spPr>
-          <a:xfrm>
-            <a:off x="2926080" y="3895344"/>
-            <a:ext cx="3291840" cy="457200"/>
+          <p:cNvPr id="25" name="Text 18"/>
+          <p:cNvSpPr txBox="1"/>
+          <p:nvPr/>
+        </p:nvSpPr>
+        <p:spPr>
+          <a:xfrm>
+            <a:off x="3108960" y="3895344"/>
+            <a:ext cx="3108960" cy="457200"/>
           </a:xfrm>
           <a:prstGeom prst="rect">
             <a:avLst/>
@@ -4652,7 +5594,7 @@
       </p:sp>
       <p:sp>
         <p:nvSpPr>
-          <p:cNvPr id="21" name="Text 19"/>
+          <p:cNvPr id="26" name="Text 19"/>
           <p:cNvSpPr txBox="1"/>
           <p:nvPr/>
         </p:nvSpPr>
@@ -4691,7 +5633,7 @@
       </p:sp>
       <p:sp>
         <p:nvSpPr>
-          <p:cNvPr id="22" name="Shape 20"/>
+          <p:cNvPr id="27" name="Shape 20"/>
           <p:cNvSpPr/>
           <p:nvPr/>
         </p:nvSpPr>
@@ -4713,7 +5655,7 @@
       </p:sp>
       <p:sp>
         <p:nvSpPr>
-          <p:cNvPr id="23" name="Text 21"/>
+          <p:cNvPr id="28" name="Text 21"/>
           <p:cNvSpPr txBox="1"/>
           <p:nvPr/>
         </p:nvSpPr>
@@ -4752,7 +5694,7 @@
       </p:sp>
       <p:sp>
         <p:nvSpPr>
-          <p:cNvPr id="24" name="Text 22"/>
+          <p:cNvPr id="29" name="Text 22"/>
           <p:cNvSpPr txBox="1"/>
           <p:nvPr/>
         </p:nvSpPr>
@@ -5069,16 +6011,40 @@
           </a:p>
         </p:txBody>
       </p:sp>
-      <p:sp>
-        <p:nvSpPr>
-          <p:cNvPr id="7" name="Text 5"/>
-          <p:cNvSpPr txBox="1"/>
-          <p:nvPr/>
-        </p:nvSpPr>
-        <p:spPr>
-          <a:xfrm>
-            <a:off x="457200" y="3712464"/>
-            <a:ext cx="2926080" cy="155448"/>
+      <p:pic>
+        <p:nvPicPr>
+          <p:cNvPr id="7" name="Image 0" descr="/home/user/clipping/design-system/.preview/deck-assets/ico/registro-husk.png">    </p:cNvPr>
+          <p:cNvPicPr>
+            <a:picLocks noChangeAspect="1"/>
+          </p:cNvPicPr>
+          <p:nvPr/>
+        </p:nvPicPr>
+        <p:blipFill>
+          <a:blip r:embed="rId2"/>
+          <a:stretch>
+            <a:fillRect/>
+          </a:stretch>
+        </p:blipFill>
+        <p:spPr>
+          <a:xfrm>
+            <a:off x="457200" y="3657600"/>
+            <a:ext cx="256032" cy="256032"/>
+          </a:xfrm>
+          <a:prstGeom prst="rect">
+            <a:avLst/>
+          </a:prstGeom>
+        </p:spPr>
+      </p:pic>
+      <p:sp>
+        <p:nvSpPr>
+          <p:cNvPr id="8" name="Text 5"/>
+          <p:cNvSpPr txBox="1"/>
+          <p:nvPr/>
+        </p:nvSpPr>
+        <p:spPr>
+          <a:xfrm>
+            <a:off x="804672" y="3721608"/>
+            <a:ext cx="2651760" cy="155448"/>
           </a:xfrm>
           <a:prstGeom prst="rect">
             <a:avLst/>
@@ -5108,15 +6074,39 @@
           </a:p>
         </p:txBody>
       </p:sp>
-      <p:sp>
-        <p:nvSpPr>
-          <p:cNvPr id="8" name="Text 6"/>
-          <p:cNvSpPr txBox="1"/>
-          <p:nvPr/>
-        </p:nvSpPr>
-        <p:spPr>
-          <a:xfrm>
-            <a:off x="4261104" y="859536"/>
+      <p:pic>
+        <p:nvPicPr>
+          <p:cNvPr id="9" name="Image 1" descr="/home/user/clipping/design-system/.preview/deck-assets/ico/pilha-husk.png">    </p:cNvPr>
+          <p:cNvPicPr>
+            <a:picLocks noChangeAspect="1"/>
+          </p:cNvPicPr>
+          <p:nvPr/>
+        </p:nvPicPr>
+        <p:blipFill>
+          <a:blip r:embed="rId3"/>
+          <a:stretch>
+            <a:fillRect/>
+          </a:stretch>
+        </p:blipFill>
+        <p:spPr>
+          <a:xfrm>
+            <a:off x="4261104" y="822960"/>
+            <a:ext cx="256032" cy="256032"/>
+          </a:xfrm>
+          <a:prstGeom prst="rect">
+            <a:avLst/>
+          </a:prstGeom>
+        </p:spPr>
+      </p:pic>
+      <p:sp>
+        <p:nvSpPr>
+          <p:cNvPr id="10" name="Text 6"/>
+          <p:cNvSpPr txBox="1"/>
+          <p:nvPr/>
+        </p:nvSpPr>
+        <p:spPr>
+          <a:xfrm>
+            <a:off x="4608576" y="859536"/>
             <a:ext cx="365760" cy="173736"/>
           </a:xfrm>
           <a:prstGeom prst="rect">
@@ -5149,13 +6139,13 @@
       </p:sp>
       <p:sp>
         <p:nvSpPr>
-          <p:cNvPr id="9" name="Text 7"/>
-          <p:cNvSpPr txBox="1"/>
-          <p:nvPr/>
-        </p:nvSpPr>
-        <p:spPr>
-          <a:xfrm>
-            <a:off x="4681728" y="868680"/>
+          <p:cNvPr id="11" name="Text 7"/>
+          <p:cNvSpPr txBox="1"/>
+          <p:nvPr/>
+        </p:nvSpPr>
+        <p:spPr>
+          <a:xfrm>
+            <a:off x="5010912" y="868680"/>
             <a:ext cx="1463040" cy="155448"/>
           </a:xfrm>
           <a:prstGeom prst="rect">
@@ -5188,13 +6178,13 @@
       </p:sp>
       <p:sp>
         <p:nvSpPr>
-          <p:cNvPr id="10" name="Text 8"/>
-          <p:cNvSpPr txBox="1"/>
-          <p:nvPr/>
-        </p:nvSpPr>
-        <p:spPr>
-          <a:xfrm>
-            <a:off x="4261104" y="1060704"/>
+          <p:cNvPr id="12" name="Text 8"/>
+          <p:cNvSpPr txBox="1"/>
+          <p:nvPr/>
+        </p:nvSpPr>
+        <p:spPr>
+          <a:xfrm>
+            <a:off x="4261104" y="1133856"/>
             <a:ext cx="2743200" cy="237744"/>
           </a:xfrm>
           <a:prstGeom prst="rect">
@@ -5227,13 +6217,13 @@
       </p:sp>
       <p:sp>
         <p:nvSpPr>
-          <p:cNvPr id="11" name="Text 9"/>
-          <p:cNvSpPr txBox="1"/>
-          <p:nvPr/>
-        </p:nvSpPr>
-        <p:spPr>
-          <a:xfrm>
-            <a:off x="4261104" y="1316736"/>
+          <p:cNvPr id="13" name="Text 9"/>
+          <p:cNvSpPr txBox="1"/>
+          <p:nvPr/>
+        </p:nvSpPr>
+        <p:spPr>
+          <a:xfrm>
+            <a:off x="4261104" y="1389888"/>
             <a:ext cx="4023360" cy="384048"/>
           </a:xfrm>
           <a:prstGeom prst="rect">
@@ -5267,15 +6257,39 @@
           </a:p>
         </p:txBody>
       </p:sp>
-      <p:sp>
-        <p:nvSpPr>
-          <p:cNvPr id="12" name="Text 10"/>
-          <p:cNvSpPr txBox="1"/>
-          <p:nvPr/>
-        </p:nvSpPr>
-        <p:spPr>
-          <a:xfrm>
-            <a:off x="3803904" y="2148840"/>
+      <p:pic>
+        <p:nvPicPr>
+          <p:cNvPr id="14" name="Image 2" descr="/home/user/clipping/design-system/.preview/deck-assets/ico/bloco-dark.png">    </p:cNvPr>
+          <p:cNvPicPr>
+            <a:picLocks noChangeAspect="1"/>
+          </p:cNvPicPr>
+          <p:nvPr/>
+        </p:nvPicPr>
+        <p:blipFill>
+          <a:blip r:embed="rId4"/>
+          <a:stretch>
+            <a:fillRect/>
+          </a:stretch>
+        </p:blipFill>
+        <p:spPr>
+          <a:xfrm>
+            <a:off x="3803904" y="2112264"/>
+            <a:ext cx="256032" cy="256032"/>
+          </a:xfrm>
+          <a:prstGeom prst="rect">
+            <a:avLst/>
+          </a:prstGeom>
+        </p:spPr>
+      </p:pic>
+      <p:sp>
+        <p:nvSpPr>
+          <p:cNvPr id="15" name="Text 10"/>
+          <p:cNvSpPr txBox="1"/>
+          <p:nvPr/>
+        </p:nvSpPr>
+        <p:spPr>
+          <a:xfrm>
+            <a:off x="4151376" y="2148840"/>
             <a:ext cx="365760" cy="173736"/>
           </a:xfrm>
           <a:prstGeom prst="rect">
@@ -5308,13 +6322,13 @@
       </p:sp>
       <p:sp>
         <p:nvSpPr>
-          <p:cNvPr id="13" name="Text 11"/>
-          <p:cNvSpPr txBox="1"/>
-          <p:nvPr/>
-        </p:nvSpPr>
-        <p:spPr>
-          <a:xfrm>
-            <a:off x="4224528" y="2157984"/>
+          <p:cNvPr id="16" name="Text 11"/>
+          <p:cNvSpPr txBox="1"/>
+          <p:nvPr/>
+        </p:nvSpPr>
+        <p:spPr>
+          <a:xfrm>
+            <a:off x="4553712" y="2157984"/>
             <a:ext cx="1463040" cy="155448"/>
           </a:xfrm>
           <a:prstGeom prst="rect">
@@ -5347,13 +6361,13 @@
       </p:sp>
       <p:sp>
         <p:nvSpPr>
-          <p:cNvPr id="14" name="Text 12"/>
-          <p:cNvSpPr txBox="1"/>
-          <p:nvPr/>
-        </p:nvSpPr>
-        <p:spPr>
-          <a:xfrm>
-            <a:off x="3803904" y="2350008"/>
+          <p:cNvPr id="17" name="Text 12"/>
+          <p:cNvSpPr txBox="1"/>
+          <p:nvPr/>
+        </p:nvSpPr>
+        <p:spPr>
+          <a:xfrm>
+            <a:off x="3803904" y="2423160"/>
             <a:ext cx="2743200" cy="237744"/>
           </a:xfrm>
           <a:prstGeom prst="rect">
@@ -5386,13 +6400,13 @@
       </p:sp>
       <p:sp>
         <p:nvSpPr>
-          <p:cNvPr id="15" name="Text 13"/>
-          <p:cNvSpPr txBox="1"/>
-          <p:nvPr/>
-        </p:nvSpPr>
-        <p:spPr>
-          <a:xfrm>
-            <a:off x="3803904" y="2606040"/>
+          <p:cNvPr id="18" name="Text 13"/>
+          <p:cNvSpPr txBox="1"/>
+          <p:nvPr/>
+        </p:nvSpPr>
+        <p:spPr>
+          <a:xfrm>
+            <a:off x="3803904" y="2679192"/>
             <a:ext cx="4023360" cy="384048"/>
           </a:xfrm>
           <a:prstGeom prst="rect">
@@ -5426,15 +6440,39 @@
           </a:p>
         </p:txBody>
       </p:sp>
-      <p:sp>
-        <p:nvSpPr>
-          <p:cNvPr id="16" name="Text 14"/>
-          <p:cNvSpPr txBox="1"/>
-          <p:nvPr/>
-        </p:nvSpPr>
-        <p:spPr>
-          <a:xfrm>
-            <a:off x="4626864" y="3438144"/>
+      <p:pic>
+        <p:nvPicPr>
+          <p:cNvPr id="19" name="Image 3" descr="/home/user/clipping/design-system/.preview/deck-assets/ico/removal-palm.png">    </p:cNvPr>
+          <p:cNvPicPr>
+            <a:picLocks noChangeAspect="1"/>
+          </p:cNvPicPr>
+          <p:nvPr/>
+        </p:nvPicPr>
+        <p:blipFill>
+          <a:blip r:embed="rId5"/>
+          <a:stretch>
+            <a:fillRect/>
+          </a:stretch>
+        </p:blipFill>
+        <p:spPr>
+          <a:xfrm>
+            <a:off x="4626864" y="3401568"/>
+            <a:ext cx="256032" cy="256032"/>
+          </a:xfrm>
+          <a:prstGeom prst="rect">
+            <a:avLst/>
+          </a:prstGeom>
+        </p:spPr>
+      </p:pic>
+      <p:sp>
+        <p:nvSpPr>
+          <p:cNvPr id="20" name="Text 14"/>
+          <p:cNvSpPr txBox="1"/>
+          <p:nvPr/>
+        </p:nvSpPr>
+        <p:spPr>
+          <a:xfrm>
+            <a:off x="4974336" y="3438144"/>
             <a:ext cx="365760" cy="173736"/>
           </a:xfrm>
           <a:prstGeom prst="rect">
@@ -5467,13 +6505,13 @@
       </p:sp>
       <p:sp>
         <p:nvSpPr>
-          <p:cNvPr id="17" name="Text 15"/>
-          <p:cNvSpPr txBox="1"/>
-          <p:nvPr/>
-        </p:nvSpPr>
-        <p:spPr>
-          <a:xfrm>
-            <a:off x="5047488" y="3447288"/>
+          <p:cNvPr id="21" name="Text 15"/>
+          <p:cNvSpPr txBox="1"/>
+          <p:nvPr/>
+        </p:nvSpPr>
+        <p:spPr>
+          <a:xfrm>
+            <a:off x="5376672" y="3447288"/>
             <a:ext cx="1463040" cy="155448"/>
           </a:xfrm>
           <a:prstGeom prst="rect">
@@ -5506,13 +6544,13 @@
       </p:sp>
       <p:sp>
         <p:nvSpPr>
-          <p:cNvPr id="18" name="Text 16"/>
-          <p:cNvSpPr txBox="1"/>
-          <p:nvPr/>
-        </p:nvSpPr>
-        <p:spPr>
-          <a:xfrm>
-            <a:off x="4626864" y="3639312"/>
+          <p:cNvPr id="22" name="Text 16"/>
+          <p:cNvSpPr txBox="1"/>
+          <p:nvPr/>
+        </p:nvSpPr>
+        <p:spPr>
+          <a:xfrm>
+            <a:off x="4626864" y="3712464"/>
             <a:ext cx="2743200" cy="237744"/>
           </a:xfrm>
           <a:prstGeom prst="rect">
@@ -5545,13 +6583,13 @@
       </p:sp>
       <p:sp>
         <p:nvSpPr>
-          <p:cNvPr id="19" name="Text 17"/>
-          <p:cNvSpPr txBox="1"/>
-          <p:nvPr/>
-        </p:nvSpPr>
-        <p:spPr>
-          <a:xfrm>
-            <a:off x="4626864" y="3895344"/>
+          <p:cNvPr id="23" name="Text 17"/>
+          <p:cNvSpPr txBox="1"/>
+          <p:nvPr/>
+        </p:nvSpPr>
+        <p:spPr>
+          <a:xfrm>
+            <a:off x="4626864" y="3968496"/>
             <a:ext cx="4023360" cy="384048"/>
           </a:xfrm>
           <a:prstGeom prst="rect">
@@ -5587,7 +6625,7 @@
       </p:sp>
       <p:sp>
         <p:nvSpPr>
-          <p:cNvPr id="20" name="Shape 18"/>
+          <p:cNvPr id="24" name="Shape 18"/>
           <p:cNvSpPr/>
           <p:nvPr/>
         </p:nvSpPr>
@@ -5609,7 +6647,7 @@
       </p:sp>
       <p:sp>
         <p:nvSpPr>
-          <p:cNvPr id="21" name="Text 19"/>
+          <p:cNvPr id="25" name="Text 19"/>
           <p:cNvSpPr txBox="1"/>
           <p:nvPr/>
         </p:nvSpPr>
@@ -5648,7 +6686,7 @@
       </p:sp>
       <p:sp>
         <p:nvSpPr>
-          <p:cNvPr id="22" name="Text 20"/>
+          <p:cNvPr id="26" name="Text 20"/>
           <p:cNvSpPr txBox="1"/>
           <p:nvPr/>
         </p:nvSpPr>
@@ -5810,7 +6848,7 @@
         </p:nvSpPr>
         <p:spPr>
           <a:xfrm>
-            <a:off x="457200" y="768096"/>
+            <a:off x="457200" y="694944"/>
             <a:ext cx="4572000" cy="1023112"/>
           </a:xfrm>
           <a:prstGeom prst="rect">
@@ -5872,7 +6910,7 @@
         </p:nvSpPr>
         <p:spPr>
           <a:xfrm>
-            <a:off x="457200" y="1975104"/>
+            <a:off x="457200" y="1755648"/>
             <a:ext cx="4572000" cy="155448"/>
           </a:xfrm>
           <a:prstGeom prst="rect">
@@ -5903,15 +6941,39 @@
           </a:p>
         </p:txBody>
       </p:sp>
-      <p:sp>
-        <p:nvSpPr>
-          <p:cNvPr id="6" name="Text 4"/>
-          <p:cNvSpPr txBox="1"/>
-          <p:nvPr/>
-        </p:nvSpPr>
-        <p:spPr>
-          <a:xfrm>
-            <a:off x="676656" y="2212848"/>
+      <p:pic>
+        <p:nvPicPr>
+          <p:cNvPr id="6" name="Image 0" descr="/home/user/clipping/design-system/.preview/deck-assets/ico/pilha-light.png">    </p:cNvPr>
+          <p:cNvPicPr>
+            <a:picLocks noChangeAspect="1"/>
+          </p:cNvPicPr>
+          <p:nvPr/>
+        </p:nvPicPr>
+        <p:blipFill>
+          <a:blip r:embed="rId2"/>
+          <a:stretch>
+            <a:fillRect/>
+          </a:stretch>
+        </p:blipFill>
+        <p:spPr>
+          <a:xfrm>
+            <a:off x="676656" y="2249424"/>
+            <a:ext cx="256032" cy="256032"/>
+          </a:xfrm>
+          <a:prstGeom prst="rect">
+            <a:avLst/>
+          </a:prstGeom>
+        </p:spPr>
+      </p:pic>
+      <p:sp>
+        <p:nvSpPr>
+          <p:cNvPr id="7" name="Text 4"/>
+          <p:cNvSpPr txBox="1"/>
+          <p:nvPr/>
+        </p:nvSpPr>
+        <p:spPr>
+          <a:xfrm>
+            <a:off x="1042416" y="2304288"/>
             <a:ext cx="457200" cy="173736"/>
           </a:xfrm>
           <a:prstGeom prst="rect">
@@ -5944,13 +7006,13 @@
       </p:sp>
       <p:sp>
         <p:nvSpPr>
-          <p:cNvPr id="7" name="Text 5"/>
-          <p:cNvSpPr txBox="1"/>
-          <p:nvPr/>
-        </p:nvSpPr>
-        <p:spPr>
-          <a:xfrm>
-            <a:off x="676656" y="2414016"/>
+          <p:cNvPr id="8" name="Text 5"/>
+          <p:cNvSpPr txBox="1"/>
+          <p:nvPr/>
+        </p:nvSpPr>
+        <p:spPr>
+          <a:xfrm>
+            <a:off x="676656" y="2487168"/>
             <a:ext cx="2212848" cy="256032"/>
           </a:xfrm>
           <a:prstGeom prst="rect">
@@ -5983,14 +7045,14 @@
       </p:sp>
       <p:sp>
         <p:nvSpPr>
-          <p:cNvPr id="8" name="Text 6"/>
-          <p:cNvSpPr txBox="1"/>
-          <p:nvPr/>
-        </p:nvSpPr>
-        <p:spPr>
-          <a:xfrm>
-            <a:off x="676656" y="2724912"/>
-            <a:ext cx="2212848" cy="548640"/>
+          <p:cNvPr id="9" name="Text 6"/>
+          <p:cNvSpPr txBox="1"/>
+          <p:nvPr/>
+        </p:nvSpPr>
+        <p:spPr>
+          <a:xfrm>
+            <a:off x="676656" y="2779776"/>
+            <a:ext cx="2212848" cy="512064"/>
           </a:xfrm>
           <a:prstGeom prst="rect">
             <a:avLst/>
@@ -6025,21 +7087,21 @@
       </p:sp>
       <p:sp>
         <p:nvSpPr>
-          <p:cNvPr id="9" name="Shape 7"/>
+          <p:cNvPr id="10" name="Shape 7"/>
           <p:cNvSpPr/>
           <p:nvPr/>
         </p:nvSpPr>
         <p:spPr>
           <a:xfrm>
-            <a:off x="676656" y="3401568"/>
-            <a:ext cx="2212848" cy="7315"/>
+            <a:off x="676656" y="3438144"/>
+            <a:ext cx="2212848" cy="9144"/>
           </a:xfrm>
           <a:prstGeom prst="rect">
             <a:avLst/>
           </a:prstGeom>
           <a:solidFill>
-            <a:srgbClr val="A9C48F">
-              <a:alpha val="40000"/>
+            <a:srgbClr val="7E8C90">
+              <a:alpha val="70000"/>
             </a:srgbClr>
           </a:solidFill>
           <a:ln/>
@@ -6047,13 +7109,13 @@
       </p:sp>
       <p:sp>
         <p:nvSpPr>
-          <p:cNvPr id="10" name="Text 8"/>
-          <p:cNvSpPr txBox="1"/>
-          <p:nvPr/>
-        </p:nvSpPr>
-        <p:spPr>
-          <a:xfrm>
-            <a:off x="676656" y="3474720"/>
+          <p:cNvPr id="11" name="Text 8"/>
+          <p:cNvSpPr txBox="1"/>
+          <p:nvPr/>
+        </p:nvSpPr>
+        <p:spPr>
+          <a:xfrm>
+            <a:off x="676656" y="3511296"/>
             <a:ext cx="2212848" cy="155448"/>
           </a:xfrm>
           <a:prstGeom prst="rect">
@@ -6086,14 +7148,14 @@
       </p:sp>
       <p:sp>
         <p:nvSpPr>
-          <p:cNvPr id="11" name="Text 9"/>
-          <p:cNvSpPr txBox="1"/>
-          <p:nvPr/>
-        </p:nvSpPr>
-        <p:spPr>
-          <a:xfrm>
-            <a:off x="676656" y="3639312"/>
-            <a:ext cx="2212848" cy="457200"/>
+          <p:cNvPr id="12" name="Text 9"/>
+          <p:cNvSpPr txBox="1"/>
+          <p:nvPr/>
+        </p:nvSpPr>
+        <p:spPr>
+          <a:xfrm>
+            <a:off x="676656" y="3675888"/>
+            <a:ext cx="2212848" cy="438912"/>
           </a:xfrm>
           <a:prstGeom prst="rect">
             <a:avLst/>
@@ -6126,15 +7188,39 @@
           </a:p>
         </p:txBody>
       </p:sp>
-      <p:sp>
-        <p:nvSpPr>
-          <p:cNvPr id="12" name="Text 10"/>
-          <p:cNvSpPr txBox="1"/>
-          <p:nvPr/>
-        </p:nvSpPr>
-        <p:spPr>
-          <a:xfrm>
-            <a:off x="3419856" y="2212848"/>
+      <p:pic>
+        <p:nvPicPr>
+          <p:cNvPr id="13" name="Image 1" descr="/home/user/clipping/design-system/.preview/deck-assets/ico/reator-light.png">    </p:cNvPr>
+          <p:cNvPicPr>
+            <a:picLocks noChangeAspect="1"/>
+          </p:cNvPicPr>
+          <p:nvPr/>
+        </p:nvPicPr>
+        <p:blipFill>
+          <a:blip r:embed="rId3"/>
+          <a:stretch>
+            <a:fillRect/>
+          </a:stretch>
+        </p:blipFill>
+        <p:spPr>
+          <a:xfrm>
+            <a:off x="3419856" y="2249424"/>
+            <a:ext cx="256032" cy="256032"/>
+          </a:xfrm>
+          <a:prstGeom prst="rect">
+            <a:avLst/>
+          </a:prstGeom>
+        </p:spPr>
+      </p:pic>
+      <p:sp>
+        <p:nvSpPr>
+          <p:cNvPr id="14" name="Text 10"/>
+          <p:cNvSpPr txBox="1"/>
+          <p:nvPr/>
+        </p:nvSpPr>
+        <p:spPr>
+          <a:xfrm>
+            <a:off x="3785616" y="2304288"/>
             <a:ext cx="457200" cy="173736"/>
           </a:xfrm>
           <a:prstGeom prst="rect">
@@ -6167,13 +7253,13 @@
       </p:sp>
       <p:sp>
         <p:nvSpPr>
-          <p:cNvPr id="13" name="Text 11"/>
-          <p:cNvSpPr txBox="1"/>
-          <p:nvPr/>
-        </p:nvSpPr>
-        <p:spPr>
-          <a:xfrm>
-            <a:off x="3419856" y="2414016"/>
+          <p:cNvPr id="15" name="Text 11"/>
+          <p:cNvSpPr txBox="1"/>
+          <p:nvPr/>
+        </p:nvSpPr>
+        <p:spPr>
+          <a:xfrm>
+            <a:off x="3419856" y="2487168"/>
             <a:ext cx="2212848" cy="256032"/>
           </a:xfrm>
           <a:prstGeom prst="rect">
@@ -6206,14 +7292,14 @@
       </p:sp>
       <p:sp>
         <p:nvSpPr>
-          <p:cNvPr id="14" name="Text 12"/>
-          <p:cNvSpPr txBox="1"/>
-          <p:nvPr/>
-        </p:nvSpPr>
-        <p:spPr>
-          <a:xfrm>
-            <a:off x="3419856" y="2724912"/>
-            <a:ext cx="2212848" cy="548640"/>
+          <p:cNvPr id="16" name="Text 12"/>
+          <p:cNvSpPr txBox="1"/>
+          <p:nvPr/>
+        </p:nvSpPr>
+        <p:spPr>
+          <a:xfrm>
+            <a:off x="3419856" y="2779776"/>
+            <a:ext cx="2212848" cy="512064"/>
           </a:xfrm>
           <a:prstGeom prst="rect">
             <a:avLst/>
@@ -6248,21 +7334,21 @@
       </p:sp>
       <p:sp>
         <p:nvSpPr>
-          <p:cNvPr id="15" name="Shape 13"/>
+          <p:cNvPr id="17" name="Shape 13"/>
           <p:cNvSpPr/>
           <p:nvPr/>
         </p:nvSpPr>
         <p:spPr>
           <a:xfrm>
-            <a:off x="3419856" y="3401568"/>
-            <a:ext cx="2212848" cy="7315"/>
+            <a:off x="3419856" y="3438144"/>
+            <a:ext cx="2212848" cy="9144"/>
           </a:xfrm>
           <a:prstGeom prst="rect">
             <a:avLst/>
           </a:prstGeom>
           <a:solidFill>
-            <a:srgbClr val="A9C48F">
-              <a:alpha val="40000"/>
+            <a:srgbClr val="7E8C90">
+              <a:alpha val="70000"/>
             </a:srgbClr>
           </a:solidFill>
           <a:ln/>
@@ -6270,13 +7356,13 @@
       </p:sp>
       <p:sp>
         <p:nvSpPr>
-          <p:cNvPr id="16" name="Text 14"/>
-          <p:cNvSpPr txBox="1"/>
-          <p:nvPr/>
-        </p:nvSpPr>
-        <p:spPr>
-          <a:xfrm>
-            <a:off x="3419856" y="3474720"/>
+          <p:cNvPr id="18" name="Text 14"/>
+          <p:cNvSpPr txBox="1"/>
+          <p:nvPr/>
+        </p:nvSpPr>
+        <p:spPr>
+          <a:xfrm>
+            <a:off x="3419856" y="3511296"/>
             <a:ext cx="2212848" cy="155448"/>
           </a:xfrm>
           <a:prstGeom prst="rect">
@@ -6309,14 +7395,14 @@
       </p:sp>
       <p:sp>
         <p:nvSpPr>
-          <p:cNvPr id="17" name="Text 15"/>
-          <p:cNvSpPr txBox="1"/>
-          <p:nvPr/>
-        </p:nvSpPr>
-        <p:spPr>
-          <a:xfrm>
-            <a:off x="3419856" y="3639312"/>
-            <a:ext cx="2212848" cy="457200"/>
+          <p:cNvPr id="19" name="Text 15"/>
+          <p:cNvSpPr txBox="1"/>
+          <p:nvPr/>
+        </p:nvSpPr>
+        <p:spPr>
+          <a:xfrm>
+            <a:off x="3419856" y="3675888"/>
+            <a:ext cx="2212848" cy="438912"/>
           </a:xfrm>
           <a:prstGeom prst="rect">
             <a:avLst/>
@@ -6349,15 +7435,39 @@
           </a:p>
         </p:txBody>
       </p:sp>
-      <p:sp>
-        <p:nvSpPr>
-          <p:cNvPr id="18" name="Text 16"/>
-          <p:cNvSpPr txBox="1"/>
-          <p:nvPr/>
-        </p:nvSpPr>
-        <p:spPr>
-          <a:xfrm>
-            <a:off x="6163056" y="2212848"/>
+      <p:pic>
+        <p:nvPicPr>
+          <p:cNvPr id="20" name="Image 2" descr="/home/user/clipping/design-system/.preview/deck-assets/ico/solo-light.png">    </p:cNvPr>
+          <p:cNvPicPr>
+            <a:picLocks noChangeAspect="1"/>
+          </p:cNvPicPr>
+          <p:nvPr/>
+        </p:nvPicPr>
+        <p:blipFill>
+          <a:blip r:embed="rId4"/>
+          <a:stretch>
+            <a:fillRect/>
+          </a:stretch>
+        </p:blipFill>
+        <p:spPr>
+          <a:xfrm>
+            <a:off x="6163056" y="2249424"/>
+            <a:ext cx="256032" cy="256032"/>
+          </a:xfrm>
+          <a:prstGeom prst="rect">
+            <a:avLst/>
+          </a:prstGeom>
+        </p:spPr>
+      </p:pic>
+      <p:sp>
+        <p:nvSpPr>
+          <p:cNvPr id="21" name="Text 16"/>
+          <p:cNvSpPr txBox="1"/>
+          <p:nvPr/>
+        </p:nvSpPr>
+        <p:spPr>
+          <a:xfrm>
+            <a:off x="6528816" y="2304288"/>
             <a:ext cx="457200" cy="173736"/>
           </a:xfrm>
           <a:prstGeom prst="rect">
@@ -6390,13 +7500,13 @@
       </p:sp>
       <p:sp>
         <p:nvSpPr>
-          <p:cNvPr id="19" name="Text 17"/>
-          <p:cNvSpPr txBox="1"/>
-          <p:nvPr/>
-        </p:nvSpPr>
-        <p:spPr>
-          <a:xfrm>
-            <a:off x="6163056" y="2414016"/>
+          <p:cNvPr id="22" name="Text 17"/>
+          <p:cNvSpPr txBox="1"/>
+          <p:nvPr/>
+        </p:nvSpPr>
+        <p:spPr>
+          <a:xfrm>
+            <a:off x="6163056" y="2487168"/>
             <a:ext cx="2212848" cy="256032"/>
           </a:xfrm>
           <a:prstGeom prst="rect">
@@ -6429,14 +7539,14 @@
       </p:sp>
       <p:sp>
         <p:nvSpPr>
-          <p:cNvPr id="20" name="Text 18"/>
-          <p:cNvSpPr txBox="1"/>
-          <p:nvPr/>
-        </p:nvSpPr>
-        <p:spPr>
-          <a:xfrm>
-            <a:off x="6163056" y="2724912"/>
-            <a:ext cx="2212848" cy="548640"/>
+          <p:cNvPr id="23" name="Text 18"/>
+          <p:cNvSpPr txBox="1"/>
+          <p:nvPr/>
+        </p:nvSpPr>
+        <p:spPr>
+          <a:xfrm>
+            <a:off x="6163056" y="2779776"/>
+            <a:ext cx="2212848" cy="512064"/>
           </a:xfrm>
           <a:prstGeom prst="rect">
             <a:avLst/>
@@ -6471,21 +7581,21 @@
       </p:sp>
       <p:sp>
         <p:nvSpPr>
-          <p:cNvPr id="21" name="Shape 19"/>
+          <p:cNvPr id="24" name="Shape 19"/>
           <p:cNvSpPr/>
           <p:nvPr/>
         </p:nvSpPr>
         <p:spPr>
           <a:xfrm>
-            <a:off x="6163056" y="3401568"/>
-            <a:ext cx="2212848" cy="7315"/>
+            <a:off x="6163056" y="3438144"/>
+            <a:ext cx="2212848" cy="9144"/>
           </a:xfrm>
           <a:prstGeom prst="rect">
             <a:avLst/>
           </a:prstGeom>
           <a:solidFill>
-            <a:srgbClr val="A9C48F">
-              <a:alpha val="40000"/>
+            <a:srgbClr val="7E8C90">
+              <a:alpha val="70000"/>
             </a:srgbClr>
           </a:solidFill>
           <a:ln/>
@@ -6493,13 +7603,13 @@
       </p:sp>
       <p:sp>
         <p:nvSpPr>
-          <p:cNvPr id="22" name="Text 20"/>
-          <p:cNvSpPr txBox="1"/>
-          <p:nvPr/>
-        </p:nvSpPr>
-        <p:spPr>
-          <a:xfrm>
-            <a:off x="6163056" y="3474720"/>
+          <p:cNvPr id="25" name="Text 20"/>
+          <p:cNvSpPr txBox="1"/>
+          <p:nvPr/>
+        </p:nvSpPr>
+        <p:spPr>
+          <a:xfrm>
+            <a:off x="6163056" y="3511296"/>
             <a:ext cx="2212848" cy="155448"/>
           </a:xfrm>
           <a:prstGeom prst="rect">
@@ -6532,14 +7642,14 @@
       </p:sp>
       <p:sp>
         <p:nvSpPr>
-          <p:cNvPr id="23" name="Text 21"/>
-          <p:cNvSpPr txBox="1"/>
-          <p:nvPr/>
-        </p:nvSpPr>
-        <p:spPr>
-          <a:xfrm>
-            <a:off x="6163056" y="3639312"/>
-            <a:ext cx="2212848" cy="457200"/>
+          <p:cNvPr id="26" name="Text 21"/>
+          <p:cNvSpPr txBox="1"/>
+          <p:nvPr/>
+        </p:nvSpPr>
+        <p:spPr>
+          <a:xfrm>
+            <a:off x="6163056" y="3675888"/>
+            <a:ext cx="2212848" cy="438912"/>
           </a:xfrm>
           <a:prstGeom prst="rect">
             <a:avLst/>
@@ -6574,13 +7684,13 @@
       </p:sp>
       <p:sp>
         <p:nvSpPr>
-          <p:cNvPr id="24" name="Text 22"/>
-          <p:cNvSpPr txBox="1"/>
-          <p:nvPr/>
-        </p:nvSpPr>
-        <p:spPr>
-          <a:xfrm>
-            <a:off x="457200" y="4261104"/>
+          <p:cNvPr id="27" name="Text 22"/>
+          <p:cNvSpPr txBox="1"/>
+          <p:nvPr/>
+        </p:nvSpPr>
+        <p:spPr>
+          <a:xfrm>
+            <a:off x="457200" y="4242816"/>
             <a:ext cx="7680960" cy="310896"/>
           </a:xfrm>
           <a:prstGeom prst="rect">
@@ -6613,7 +7723,7 @@
       </p:sp>
       <p:sp>
         <p:nvSpPr>
-          <p:cNvPr id="25" name="Shape 23"/>
+          <p:cNvPr id="28" name="Shape 23"/>
           <p:cNvSpPr/>
           <p:nvPr/>
         </p:nvSpPr>
@@ -6635,7 +7745,7 @@
       </p:sp>
       <p:sp>
         <p:nvSpPr>
-          <p:cNvPr id="26" name="Text 24"/>
+          <p:cNvPr id="29" name="Text 24"/>
           <p:cNvSpPr txBox="1"/>
           <p:nvPr/>
         </p:nvSpPr>

--- a/deck/pepsico-petrolina-porque.pptx
+++ b/deck/pepsico-petrolina-porque.pptx
@@ -508,7 +508,7 @@
           <a:p>
             <a:r>
               <a:rPr lang="en-US" dirty="0"/>
-              <a:t>Tese em uma frase: a casca de coco é uma biomassa naturalmente boa para pirólise, e o biochar conversa com o que a PepsiCo já decidiu. Não pedir nada.</a:t>
+              <a:t>Tese em uma frase: a casca de coco é boa biomassa para pirólise, e o biochar conversa com metas que a PepsiCo já publicou. O deck termina num próximo passo objetivo — amostra, volume e destinação.</a:t>
             </a:r>
             <a:endParaRPr lang="en-US" dirty="0"/>
           </a:p>
@@ -596,7 +596,7 @@
           <a:p>
             <a:r>
               <a:rPr lang="en-US" dirty="0"/>
-              <a:t>80–85% da massa do fruto é casca. A biomassa já está no pátio, hoje, nesta quantidade. A umidade as-received de 30–70% é o desafio conhecido — secagem integrada com calor do próprio processo.</a:t>
+              <a:t>80–85% da massa do fruto é casca. A biomassa já está no pátio, hoje, nesta quantidade. A umidade de 30–70% as-received é o desafio conhecido — secagem integrada com calor do próprio processo.</a:t>
             </a:r>
             <a:endParaRPr lang="en-US" dirty="0"/>
           </a:p>
@@ -684,7 +684,7 @@
           <a:p>
             <a:r>
               <a:rPr lang="en-US" dirty="0"/>
-              <a:t>Lignina alta e cinzas baixas favorecem rendimento e chars aromáticos estáveis. A secção ao lado é o argumento: o fruto é quase todo casca.</a:t>
+              <a:t>Lignina alta e cinzas baixas favorecem rendimento e chars aromáticos estáveis. A secção ao lado mostra o argumento: o fruto é quase todo casca.</a:t>
             </a:r>
             <a:endParaRPr lang="en-US" dirty="0"/>
           </a:p>
@@ -860,7 +860,7 @@
           <a:p>
             <a:r>
               <a:rPr lang="en-US" dirty="0"/>
-              <a:t>Casca úmida é volumosa e perecível; biochar é seco, ~30% da massa, inerte e estável por séculos — não vira passivo.</a:t>
+              <a:t>Casca úmida é volumosa e perecível; biochar é seco, cerca de 30% da massa, inerte e estável por séculos — não vira passivo.</a:t>
             </a:r>
             <a:endParaRPr lang="en-US" dirty="0"/>
           </a:p>
@@ -1036,7 +1036,7 @@
           <a:p>
             <a:r>
               <a:rPr lang="en-US" dirty="0"/>
-              <a:t>Sem pedido. As três condições são a aderência dita de forma indireta — deixar o gerente reagir a cada uma. Se ele puxar o próximo passo: dados, amostra, teste, tecnologia, business case.</a:t>
+              <a:t>As três condições são a aderência dita de forma indireta — deixar o gerente reagir a cada uma. O pedido é único e objetivo: amostra, volume mensal e destinação atual. Nada disso exige trabalho novo do lado deles.</a:t>
             </a:r>
             <a:endParaRPr lang="en-US" dirty="0"/>
           </a:p>
@@ -1433,11 +1433,11 @@
             </a:avLst>
           </a:prstGeom>
           <a:solidFill>
-            <a:srgbClr val="16331F"/>
+            <a:srgbClr val="8FB04E"/>
           </a:solidFill>
           <a:ln w="12700">
             <a:solidFill>
-              <a:srgbClr val="16331F"/>
+              <a:srgbClr val="8FB04E"/>
             </a:solidFill>
             <a:prstDash val="solid"/>
           </a:ln>
@@ -1470,7 +1470,7 @@
             <a:r>
               <a:rPr lang="en-US" sz="900" b="1" spc="140" kern="0" dirty="0">
                 <a:solidFill>
-                  <a:srgbClr val="C8E85C"/>
+                  <a:srgbClr val="0C0C0B"/>
                 </a:solidFill>
                 <a:latin typeface="Arial" pitchFamily="34" charset="0"/>
                 <a:ea typeface="Arial" pitchFamily="34" charset="-122"/>
@@ -1482,40 +1482,16 @@
           </a:p>
         </p:txBody>
       </p:sp>
-      <p:pic>
-        <p:nvPicPr>
-          <p:cNvPr id="4" name="Image 0" descr="/home/user/clipping/design-system/.preview/deck-assets/ico/estrela-dark.png">    </p:cNvPr>
-          <p:cNvPicPr>
-            <a:picLocks noChangeAspect="1"/>
-          </p:cNvPicPr>
-          <p:nvPr/>
-        </p:nvPicPr>
-        <p:blipFill>
-          <a:blip r:embed="rId2"/>
-          <a:stretch>
-            <a:fillRect/>
-          </a:stretch>
-        </p:blipFill>
-        <p:spPr>
-          <a:xfrm>
-            <a:off x="2267712" y="438912"/>
-            <a:ext cx="310896" cy="310896"/>
-          </a:xfrm>
-          <a:prstGeom prst="rect">
-            <a:avLst/>
-          </a:prstGeom>
-        </p:spPr>
-      </p:pic>
-      <p:sp>
-        <p:nvSpPr>
-          <p:cNvPr id="5" name="Text 2"/>
-          <p:cNvSpPr txBox="1"/>
-          <p:nvPr/>
-        </p:nvSpPr>
-        <p:spPr>
-          <a:xfrm>
-            <a:off x="502920" y="1188720"/>
-            <a:ext cx="4572000" cy="2456688"/>
+      <p:sp>
+        <p:nvSpPr>
+          <p:cNvPr id="4" name="Text 2"/>
+          <p:cNvSpPr txBox="1"/>
+          <p:nvPr/>
+        </p:nvSpPr>
+        <p:spPr>
+          <a:xfrm>
+            <a:off x="502920" y="1097280"/>
+            <a:ext cx="4754880" cy="2139696"/>
           </a:xfrm>
           <a:prstGeom prst="rect">
             <a:avLst/>
@@ -1529,14 +1505,14 @@
           <a:p>
             <a:pPr indent="0" marL="0">
               <a:lnSpc>
-                <a:spcPts val="6448"/>
+                <a:spcPts val="5616"/>
               </a:lnSpc>
               <a:buNone/>
             </a:pPr>
             <a:r>
-              <a:rPr lang="en-US" sz="6200" b="1" spc="-140" kern="0" dirty="0">
-                <a:solidFill>
-                  <a:srgbClr val="16331F"/>
+              <a:rPr lang="en-US" sz="5400" b="1" spc="-140" kern="0" dirty="0">
+                <a:solidFill>
+                  <a:srgbClr val="FFFFFF"/>
                 </a:solidFill>
                 <a:latin typeface="Arial" pitchFamily="34" charset="0"/>
                 <a:ea typeface="Arial" pitchFamily="34" charset="-122"/>
@@ -1544,19 +1520,19 @@
               </a:rPr>
               <a:t>Casca</a:t>
             </a:r>
-            <a:endParaRPr lang="en-US" sz="6200" dirty="0"/>
+            <a:endParaRPr lang="en-US" sz="5400" dirty="0"/>
           </a:p>
           <a:p>
             <a:pPr indent="0" marL="0">
               <a:lnSpc>
-                <a:spcPts val="6448"/>
+                <a:spcPts val="5616"/>
               </a:lnSpc>
               <a:buNone/>
             </a:pPr>
             <a:r>
-              <a:rPr lang="en-US" sz="6200" b="1" spc="-140" kern="0" dirty="0">
-                <a:solidFill>
-                  <a:srgbClr val="16331F"/>
+              <a:rPr lang="en-US" sz="5400" b="1" spc="-140" kern="0" dirty="0">
+                <a:solidFill>
+                  <a:srgbClr val="FFFFFF"/>
                 </a:solidFill>
                 <a:latin typeface="Arial" pitchFamily="34" charset="0"/>
                 <a:ea typeface="Arial" pitchFamily="34" charset="-122"/>
@@ -1564,19 +1540,19 @@
               </a:rPr>
               <a:t>vira</a:t>
             </a:r>
-            <a:endParaRPr lang="en-US" sz="6200" dirty="0"/>
+            <a:endParaRPr lang="en-US" sz="5400" dirty="0"/>
           </a:p>
           <a:p>
             <a:pPr indent="0" marL="0">
               <a:lnSpc>
-                <a:spcPts val="6448"/>
+                <a:spcPts val="5616"/>
               </a:lnSpc>
               <a:buNone/>
             </a:pPr>
             <a:r>
-              <a:rPr lang="en-US" sz="6200" b="1" spc="-140" kern="0" dirty="0">
-                <a:solidFill>
-                  <a:srgbClr val="16331F"/>
+              <a:rPr lang="en-US" sz="5400" b="1" spc="-140" kern="0" dirty="0">
+                <a:solidFill>
+                  <a:srgbClr val="FFFFFF"/>
                 </a:solidFill>
                 <a:latin typeface="Arial" pitchFamily="34" charset="0"/>
                 <a:ea typeface="Arial" pitchFamily="34" charset="-122"/>
@@ -1584,71 +1560,20 @@
               </a:rPr>
               <a:t>carbono.</a:t>
             </a:r>
-            <a:endParaRPr lang="en-US" sz="6200" dirty="0"/>
-          </a:p>
-        </p:txBody>
-      </p:sp>
-      <p:sp>
-        <p:nvSpPr>
-          <p:cNvPr id="6" name="Shape 3"/>
-          <p:cNvSpPr/>
-          <p:nvPr/>
-        </p:nvSpPr>
-        <p:spPr>
-          <a:xfrm>
-            <a:off x="502920" y="3913632"/>
-            <a:ext cx="3931920" cy="457200"/>
-          </a:xfrm>
-          <a:prstGeom prst="roundRect">
-            <a:avLst>
-              <a:gd name="adj" fmla="val 28000"/>
-            </a:avLst>
-          </a:prstGeom>
-          <a:solidFill>
-            <a:srgbClr val="16331F"/>
-          </a:solidFill>
-          <a:ln w="12700">
-            <a:solidFill>
-              <a:srgbClr val="16331F"/>
-            </a:solidFill>
-            <a:prstDash val="solid"/>
-          </a:ln>
-        </p:spPr>
-      </p:sp>
-      <p:pic>
-        <p:nvPicPr>
-          <p:cNvPr id="7" name="Image 1" descr="/home/user/clipping/design-system/.preview/deck-assets/ico/coco-acid.png">    </p:cNvPr>
-          <p:cNvPicPr>
-            <a:picLocks noChangeAspect="1"/>
-          </p:cNvPicPr>
-          <p:nvPr/>
-        </p:nvPicPr>
-        <p:blipFill>
-          <a:blip r:embed="rId3"/>
-          <a:stretch>
-            <a:fillRect/>
-          </a:stretch>
-        </p:blipFill>
-        <p:spPr>
-          <a:xfrm>
-            <a:off x="685800" y="3986784"/>
-            <a:ext cx="310896" cy="310896"/>
-          </a:xfrm>
-          <a:prstGeom prst="rect">
-            <a:avLst/>
-          </a:prstGeom>
-        </p:spPr>
-      </p:pic>
-      <p:sp>
-        <p:nvSpPr>
-          <p:cNvPr id="8" name="Text 4"/>
-          <p:cNvSpPr txBox="1"/>
-          <p:nvPr/>
-        </p:nvSpPr>
-        <p:spPr>
-          <a:xfrm>
-            <a:off x="1115568" y="4005072"/>
-            <a:ext cx="3200400" cy="182880"/>
+            <a:endParaRPr lang="en-US" sz="5400" dirty="0"/>
+          </a:p>
+        </p:txBody>
+      </p:sp>
+      <p:sp>
+        <p:nvSpPr>
+          <p:cNvPr id="5" name="Text 3"/>
+          <p:cNvSpPr txBox="1"/>
+          <p:nvPr/>
+        </p:nvSpPr>
+        <p:spPr>
+          <a:xfrm>
+            <a:off x="502920" y="3529584"/>
+            <a:ext cx="4206240" cy="182880"/>
           </a:xfrm>
           <a:prstGeom prst="rect">
             <a:avLst/>
@@ -1664,30 +1589,30 @@
               <a:buNone/>
             </a:pPr>
             <a:r>
-              <a:rPr lang="en-US" sz="900" dirty="0">
-                <a:solidFill>
-                  <a:srgbClr val="C8E85C"/>
-                </a:solidFill>
-                <a:latin typeface="Arial" pitchFamily="34" charset="0"/>
-                <a:ea typeface="Arial" pitchFamily="34" charset="-122"/>
-                <a:cs typeface="Arial" pitchFamily="34" charset="-120"/>
-              </a:rPr>
-              <a:t>por que a pirólise faz sentido para a casca de coco</a:t>
-            </a:r>
-            <a:endParaRPr lang="en-US" sz="900" dirty="0"/>
-          </a:p>
-        </p:txBody>
-      </p:sp>
-      <p:sp>
-        <p:nvSpPr>
-          <p:cNvPr id="9" name="Text 5"/>
-          <p:cNvSpPr txBox="1"/>
-          <p:nvPr/>
-        </p:nvSpPr>
-        <p:spPr>
-          <a:xfrm>
-            <a:off x="502920" y="4663440"/>
-            <a:ext cx="8138160" cy="201168"/>
+              <a:rPr lang="en-US" sz="1200" dirty="0">
+                <a:solidFill>
+                  <a:srgbClr val="F2EEE3"/>
+                </a:solidFill>
+                <a:latin typeface="Arial" pitchFamily="34" charset="0"/>
+                <a:ea typeface="Arial" pitchFamily="34" charset="-122"/>
+                <a:cs typeface="Arial" pitchFamily="34" charset="-120"/>
+              </a:rPr>
+              <a:t>Pirólise de casca de coco na unidade de Petrolina</a:t>
+            </a:r>
+            <a:endParaRPr lang="en-US" sz="1200" dirty="0"/>
+          </a:p>
+        </p:txBody>
+      </p:sp>
+      <p:sp>
+        <p:nvSpPr>
+          <p:cNvPr id="6" name="Text 4"/>
+          <p:cNvSpPr txBox="1"/>
+          <p:nvPr/>
+        </p:nvSpPr>
+        <p:spPr>
+          <a:xfrm>
+            <a:off x="502920" y="4389120"/>
+            <a:ext cx="2743200" cy="182880"/>
           </a:xfrm>
           <a:prstGeom prst="rect">
             <a:avLst/>
@@ -1699,21 +1624,21 @@
           <a:bodyPr wrap="square" lIns="0" tIns="0" rIns="0" bIns="0" rtlCol="0" anchor="ctr"/>
           <a:lstStyle/>
           <a:p>
-            <a:pPr indent="0" marL="0">
-              <a:buNone/>
-            </a:pPr>
-            <a:r>
-              <a:rPr lang="en-US" sz="750" dirty="0">
-                <a:solidFill>
-                  <a:srgbClr val="16331F"/>
-                </a:solidFill>
-                <a:latin typeface="Arial" pitchFamily="34" charset="0"/>
-                <a:ea typeface="Arial" pitchFamily="34" charset="-122"/>
-                <a:cs typeface="Arial" pitchFamily="34" charset="-120"/>
-              </a:rPr>
-              <a:t>documento técnico e estratégico · não é proposta comercial</a:t>
-            </a:r>
-            <a:endParaRPr lang="en-US" sz="750" dirty="0"/>
+            <a:pPr algn="l" indent="0" marL="0">
+              <a:buNone/>
+            </a:pPr>
+            <a:r>
+              <a:rPr lang="en-US" sz="850" dirty="0">
+                <a:solidFill>
+                  <a:srgbClr val="AEB7B9"/>
+                </a:solidFill>
+                <a:latin typeface="Arial" pitchFamily="34" charset="0"/>
+                <a:ea typeface="Arial" pitchFamily="34" charset="-122"/>
+                <a:cs typeface="Arial" pitchFamily="34" charset="-120"/>
+              </a:rPr>
+              <a:t>RECICLAR · EPA</a:t>
+            </a:r>
+            <a:endParaRPr lang="en-US" sz="850" dirty="0"/>
           </a:p>
         </p:txBody>
       </p:sp>
@@ -1765,7 +1690,7 @@
         <p:spPr>
           <a:xfrm>
             <a:off x="502920" y="457200"/>
-            <a:ext cx="914400" cy="274320"/>
+            <a:ext cx="1371600" cy="274320"/>
           </a:xfrm>
           <a:prstGeom prst="roundRect">
             <a:avLst>
@@ -1773,11 +1698,11 @@
             </a:avLst>
           </a:prstGeom>
           <a:solidFill>
-            <a:srgbClr val="16331F"/>
+            <a:srgbClr val="8FB04E"/>
           </a:solidFill>
           <a:ln w="12700">
             <a:solidFill>
-              <a:srgbClr val="16331F"/>
+              <a:srgbClr val="8FB04E"/>
             </a:solidFill>
             <a:prstDash val="solid"/>
           </a:ln>
@@ -1792,7 +1717,7 @@
         <p:spPr>
           <a:xfrm>
             <a:off x="502920" y="457200"/>
-            <a:ext cx="914400" cy="274320"/>
+            <a:ext cx="1371600" cy="274320"/>
           </a:xfrm>
           <a:prstGeom prst="rect">
             <a:avLst/>
@@ -1810,13 +1735,13 @@
             <a:r>
               <a:rPr lang="en-US" sz="900" b="1" spc="140" kern="0" dirty="0">
                 <a:solidFill>
-                  <a:srgbClr val="C8E85C"/>
-                </a:solidFill>
-                <a:latin typeface="Arial" pitchFamily="34" charset="0"/>
-                <a:ea typeface="Arial" pitchFamily="34" charset="-122"/>
-                <a:cs typeface="Arial" pitchFamily="34" charset="-120"/>
-              </a:rPr>
-              <a:t>HOJE</a:t>
+                  <a:srgbClr val="0C0C0B"/>
+                </a:solidFill>
+                <a:latin typeface="Arial" pitchFamily="34" charset="0"/>
+                <a:ea typeface="Arial" pitchFamily="34" charset="-122"/>
+                <a:cs typeface="Arial" pitchFamily="34" charset="-120"/>
+              </a:rPr>
+              <a:t>A BIOMASSA</a:t>
             </a:r>
             <a:endParaRPr lang="en-US" sz="900" dirty="0"/>
           </a:p>
@@ -1831,7 +1756,7 @@
         <p:spPr>
           <a:xfrm>
             <a:off x="502920" y="932688"/>
-            <a:ext cx="3840480" cy="1056640"/>
+            <a:ext cx="3840480" cy="1003808"/>
           </a:xfrm>
           <a:prstGeom prst="rect">
             <a:avLst/>
@@ -1845,42 +1770,42 @@
           <a:p>
             <a:pPr indent="0" marL="0">
               <a:lnSpc>
-                <a:spcPts val="4160"/>
+                <a:spcPts val="3952"/>
               </a:lnSpc>
               <a:buNone/>
             </a:pPr>
             <a:r>
-              <a:rPr lang="en-US" sz="4000" b="1" spc="-140" kern="0" dirty="0">
-                <a:solidFill>
-                  <a:srgbClr val="16331F"/>
-                </a:solidFill>
-                <a:latin typeface="Arial" pitchFamily="34" charset="0"/>
-                <a:ea typeface="Arial" pitchFamily="34" charset="-122"/>
-                <a:cs typeface="Arial" pitchFamily="34" charset="-120"/>
-              </a:rPr>
-              <a:t>A pilha</a:t>
-            </a:r>
-            <a:endParaRPr lang="en-US" sz="4000" dirty="0"/>
+              <a:rPr lang="en-US" sz="3800" b="1" spc="-140" kern="0" dirty="0">
+                <a:solidFill>
+                  <a:srgbClr val="FFFFFF"/>
+                </a:solidFill>
+                <a:latin typeface="Arial" pitchFamily="34" charset="0"/>
+                <a:ea typeface="Arial" pitchFamily="34" charset="-122"/>
+                <a:cs typeface="Arial" pitchFamily="34" charset="-120"/>
+              </a:rPr>
+              <a:t>A casca já</a:t>
+            </a:r>
+            <a:endParaRPr lang="en-US" sz="3800" dirty="0"/>
           </a:p>
           <a:p>
             <a:pPr indent="0" marL="0">
               <a:lnSpc>
-                <a:spcPts val="4160"/>
+                <a:spcPts val="3952"/>
               </a:lnSpc>
               <a:buNone/>
             </a:pPr>
             <a:r>
-              <a:rPr lang="en-US" sz="4000" b="1" spc="-140" kern="0" dirty="0">
-                <a:solidFill>
-                  <a:srgbClr val="16331F"/>
-                </a:solidFill>
-                <a:latin typeface="Arial" pitchFamily="34" charset="0"/>
-                <a:ea typeface="Arial" pitchFamily="34" charset="-122"/>
-                <a:cs typeface="Arial" pitchFamily="34" charset="-120"/>
-              </a:rPr>
-              <a:t>já existe.</a:t>
-            </a:r>
-            <a:endParaRPr lang="en-US" sz="4000" dirty="0"/>
+              <a:rPr lang="en-US" sz="3800" b="1" spc="-140" kern="0" dirty="0">
+                <a:solidFill>
+                  <a:srgbClr val="FFFFFF"/>
+                </a:solidFill>
+                <a:latin typeface="Arial" pitchFamily="34" charset="0"/>
+                <a:ea typeface="Arial" pitchFamily="34" charset="-122"/>
+                <a:cs typeface="Arial" pitchFamily="34" charset="-120"/>
+              </a:rPr>
+              <a:t>está no pátio.</a:t>
+            </a:r>
+            <a:endParaRPr lang="en-US" sz="3800" dirty="0"/>
           </a:p>
         </p:txBody>
       </p:sp>
@@ -1892,20 +1817,20 @@
         </p:nvSpPr>
         <p:spPr>
           <a:xfrm>
-            <a:off x="502920" y="2084832"/>
-            <a:ext cx="3703320" cy="1481328"/>
+            <a:off x="502920" y="2121408"/>
+            <a:ext cx="3703320" cy="1371600"/>
           </a:xfrm>
           <a:prstGeom prst="roundRect">
             <a:avLst>
-              <a:gd name="adj" fmla="val 6173"/>
+              <a:gd name="adj" fmla="val 6667"/>
             </a:avLst>
           </a:prstGeom>
           <a:solidFill>
-            <a:srgbClr val="16331F"/>
+            <a:srgbClr val="1B1C1A"/>
           </a:solidFill>
           <a:ln w="12700">
             <a:solidFill>
-              <a:srgbClr val="16331F"/>
+              <a:srgbClr val="1B1C1A"/>
             </a:solidFill>
             <a:prstDash val="solid"/>
           </a:ln>
@@ -1919,8 +1844,8 @@
         </p:nvSpPr>
         <p:spPr>
           <a:xfrm>
-            <a:off x="777240" y="2249424"/>
-            <a:ext cx="3200400" cy="913384"/>
+            <a:off x="777240" y="2286000"/>
+            <a:ext cx="3200400" cy="854456"/>
           </a:xfrm>
           <a:prstGeom prst="rect">
             <a:avLst/>
@@ -1936,9 +1861,9 @@
               <a:buNone/>
             </a:pPr>
             <a:r>
-              <a:rPr lang="en-US" sz="6200" b="1" spc="-340" kern="0" dirty="0">
-                <a:solidFill>
-                  <a:srgbClr val="C8E85C"/>
+              <a:rPr lang="en-US" sz="5800" b="1" spc="-180" kern="0" dirty="0">
+                <a:solidFill>
+                  <a:srgbClr val="8FB04E"/>
                 </a:solidFill>
                 <a:latin typeface="Arial" pitchFamily="34" charset="0"/>
                 <a:ea typeface="Arial" pitchFamily="34" charset="-122"/>
@@ -1946,13 +1871,13 @@
               </a:rPr>
               <a:t>80–85%</a:t>
             </a:r>
-            <a:endParaRPr lang="en-US" sz="6200" dirty="0"/>
+            <a:endParaRPr lang="en-US" sz="5800" dirty="0"/>
           </a:p>
         </p:txBody>
       </p:sp>
       <p:pic>
         <p:nvPicPr>
-          <p:cNvPr id="7" name="Image 0" descr="/home/user/clipping/design-system/.preview/deck-assets/ico/secao-cream.png">    </p:cNvPr>
+          <p:cNvPr id="7" name="Image 0" descr="/home/user/clipping/design-system/.preview/deck-assets/ico/secao-steel.png">    </p:cNvPr>
           <p:cNvPicPr>
             <a:picLocks noChangeAspect="1"/>
           </p:cNvPicPr>
@@ -1966,8 +1891,8 @@
         </p:blipFill>
         <p:spPr>
           <a:xfrm>
-            <a:off x="777240" y="3108960"/>
-            <a:ext cx="274320" cy="274320"/>
+            <a:off x="777240" y="3054096"/>
+            <a:ext cx="256032" cy="256032"/>
           </a:xfrm>
           <a:prstGeom prst="rect">
             <a:avLst/>
@@ -1982,7 +1907,7 @@
         </p:nvSpPr>
         <p:spPr>
           <a:xfrm>
-            <a:off x="1170432" y="3145536"/>
+            <a:off x="1133856" y="3090672"/>
             <a:ext cx="2743200" cy="182880"/>
           </a:xfrm>
           <a:prstGeom prst="rect">
@@ -2001,7 +1926,7 @@
             <a:r>
               <a:rPr lang="en-US" sz="1100" dirty="0">
                 <a:solidFill>
-                  <a:srgbClr val="F5F1E6"/>
+                  <a:srgbClr val="F2EEE3"/>
                 </a:solidFill>
                 <a:latin typeface="Arial" pitchFamily="34" charset="0"/>
                 <a:ea typeface="Arial" pitchFamily="34" charset="-122"/>
@@ -2021,7 +1946,7 @@
         </p:nvSpPr>
         <p:spPr>
           <a:xfrm>
-            <a:off x="502920" y="3712464"/>
+            <a:off x="502920" y="3639312"/>
             <a:ext cx="1783080" cy="658368"/>
           </a:xfrm>
           <a:prstGeom prst="roundRect">
@@ -2030,11 +1955,11 @@
             </a:avLst>
           </a:prstGeom>
           <a:solidFill>
-            <a:srgbClr val="C8E85C"/>
+            <a:srgbClr val="4A3320"/>
           </a:solidFill>
           <a:ln w="12700">
             <a:solidFill>
-              <a:srgbClr val="C8E85C"/>
+              <a:srgbClr val="4A3320"/>
             </a:solidFill>
             <a:prstDash val="solid"/>
           </a:ln>
@@ -2048,8 +1973,8 @@
         </p:nvSpPr>
         <p:spPr>
           <a:xfrm>
-            <a:off x="685800" y="3785616"/>
-            <a:ext cx="1463040" cy="383032"/>
+            <a:off x="685800" y="3712464"/>
+            <a:ext cx="1463040" cy="353568"/>
           </a:xfrm>
           <a:prstGeom prst="rect">
             <a:avLst/>
@@ -2065,9 +1990,9 @@
               <a:buNone/>
             </a:pPr>
             <a:r>
-              <a:rPr lang="en-US" sz="2600" b="1" spc="-180" kern="0" dirty="0">
-                <a:solidFill>
-                  <a:srgbClr val="16331F"/>
+              <a:rPr lang="en-US" sz="2400" b="1" spc="-180" kern="0" dirty="0">
+                <a:solidFill>
+                  <a:srgbClr val="F2EEE3"/>
                 </a:solidFill>
                 <a:latin typeface="Arial" pitchFamily="34" charset="0"/>
                 <a:ea typeface="Arial" pitchFamily="34" charset="-122"/>
@@ -2075,7 +2000,7 @@
               </a:rPr>
               <a:t>30–70%</a:t>
             </a:r>
-            <a:endParaRPr lang="en-US" sz="2600" dirty="0"/>
+            <a:endParaRPr lang="en-US" sz="2400" dirty="0"/>
           </a:p>
         </p:txBody>
       </p:sp>
@@ -2087,7 +2012,7 @@
         </p:nvSpPr>
         <p:spPr>
           <a:xfrm>
-            <a:off x="685800" y="4169664"/>
+            <a:off x="685800" y="4096512"/>
             <a:ext cx="1463040" cy="182880"/>
           </a:xfrm>
           <a:prstGeom prst="rect">
@@ -2106,7 +2031,7 @@
             <a:r>
               <a:rPr lang="en-US" sz="800" dirty="0">
                 <a:solidFill>
-                  <a:srgbClr val="16331F"/>
+                  <a:srgbClr val="AEB7B9"/>
                 </a:solidFill>
                 <a:latin typeface="Arial" pitchFamily="34" charset="0"/>
                 <a:ea typeface="Arial" pitchFamily="34" charset="-122"/>
@@ -2126,7 +2051,7 @@
         </p:nvSpPr>
         <p:spPr>
           <a:xfrm>
-            <a:off x="2423160" y="3712464"/>
+            <a:off x="2423160" y="3639312"/>
             <a:ext cx="1783080" cy="658368"/>
           </a:xfrm>
           <a:prstGeom prst="roundRect">
@@ -2135,11 +2060,11 @@
             </a:avLst>
           </a:prstGeom>
           <a:solidFill>
-            <a:srgbClr val="8A5A34"/>
+            <a:srgbClr val="1B1C1A"/>
           </a:solidFill>
           <a:ln w="12700">
             <a:solidFill>
-              <a:srgbClr val="8A5A34"/>
+              <a:srgbClr val="1B1C1A"/>
             </a:solidFill>
             <a:prstDash val="solid"/>
           </a:ln>
@@ -2147,7 +2072,7 @@
       </p:sp>
       <p:pic>
         <p:nvPicPr>
-          <p:cNvPr id="13" name="Image 1" descr="/home/user/clipping/design-system/.preview/deck-assets/ico/pilha-cream.png">    </p:cNvPr>
+          <p:cNvPr id="13" name="Image 1" descr="/home/user/clipping/design-system/.preview/deck-assets/ico/pilha-steel.png">    </p:cNvPr>
           <p:cNvPicPr>
             <a:picLocks noChangeAspect="1"/>
           </p:cNvPicPr>
@@ -2161,8 +2086,8 @@
         </p:blipFill>
         <p:spPr>
           <a:xfrm>
-            <a:off x="2606040" y="3803904"/>
-            <a:ext cx="274320" cy="274320"/>
+            <a:off x="2606040" y="3730752"/>
+            <a:ext cx="256032" cy="256032"/>
           </a:xfrm>
           <a:prstGeom prst="rect">
             <a:avLst/>
@@ -2177,8 +2102,8 @@
         </p:nvSpPr>
         <p:spPr>
           <a:xfrm>
-            <a:off x="2606040" y="4169664"/>
-            <a:ext cx="1463040" cy="182880"/>
+            <a:off x="2606040" y="4096512"/>
+            <a:ext cx="1554480" cy="182880"/>
           </a:xfrm>
           <a:prstGeom prst="rect">
             <a:avLst/>
@@ -2196,13 +2121,13 @@
             <a:r>
               <a:rPr lang="en-US" sz="800" dirty="0">
                 <a:solidFill>
-                  <a:srgbClr val="F5F1E6"/>
-                </a:solidFill>
-                <a:latin typeface="Arial" pitchFamily="34" charset="0"/>
-                <a:ea typeface="Arial" pitchFamily="34" charset="-122"/>
-                <a:cs typeface="Arial" pitchFamily="34" charset="-120"/>
-              </a:rPr>
-              <a:t>perecível</a:t>
+                  <a:srgbClr val="AEB7B9"/>
+                </a:solidFill>
+                <a:latin typeface="Arial" pitchFamily="34" charset="0"/>
+                <a:ea typeface="Arial" pitchFamily="34" charset="-122"/>
+                <a:cs typeface="Arial" pitchFamily="34" charset="-120"/>
+              </a:rPr>
+              <a:t>perecível em pilha</a:t>
             </a:r>
             <a:endParaRPr lang="en-US" sz="800" dirty="0"/>
           </a:p>
@@ -2235,7 +2160,7 @@
             <a:r>
               <a:rPr lang="en-US" sz="750" dirty="0">
                 <a:solidFill>
-                  <a:srgbClr val="6E7A62"/>
+                  <a:srgbClr val="8B928C"/>
                 </a:solidFill>
                 <a:latin typeface="Arial" pitchFamily="34" charset="0"/>
                 <a:ea typeface="Arial" pitchFamily="34" charset="-122"/>
@@ -2303,11 +2228,11 @@
             </a:avLst>
           </a:prstGeom>
           <a:solidFill>
-            <a:srgbClr val="C8E85C"/>
+            <a:srgbClr val="8FB04E"/>
           </a:solidFill>
           <a:ln w="12700">
             <a:solidFill>
-              <a:srgbClr val="C8E85C"/>
+              <a:srgbClr val="8FB04E"/>
             </a:solidFill>
             <a:prstDash val="solid"/>
           </a:ln>
@@ -2340,7 +2265,7 @@
             <a:r>
               <a:rPr lang="en-US" sz="900" b="1" spc="140" kern="0" dirty="0">
                 <a:solidFill>
-                  <a:srgbClr val="16331F"/>
+                  <a:srgbClr val="0C0C0B"/>
                 </a:solidFill>
                 <a:latin typeface="Arial" pitchFamily="34" charset="0"/>
                 <a:ea typeface="Arial" pitchFamily="34" charset="-122"/>
@@ -2361,7 +2286,7 @@
         <p:spPr>
           <a:xfrm>
             <a:off x="502920" y="932688"/>
-            <a:ext cx="4206240" cy="1347216"/>
+            <a:ext cx="4206240" cy="1003808"/>
           </a:xfrm>
           <a:prstGeom prst="rect">
             <a:avLst/>
@@ -2375,62 +2300,42 @@
           <a:p>
             <a:pPr indent="0" marL="0">
               <a:lnSpc>
-                <a:spcPts val="3536"/>
+                <a:spcPts val="3952"/>
               </a:lnSpc>
               <a:buNone/>
             </a:pPr>
             <a:r>
-              <a:rPr lang="en-US" sz="3400" b="1" spc="-140" kern="0" dirty="0">
-                <a:solidFill>
-                  <a:srgbClr val="F5F1E6"/>
-                </a:solidFill>
-                <a:latin typeface="Arial" pitchFamily="34" charset="0"/>
-                <a:ea typeface="Arial" pitchFamily="34" charset="-122"/>
-                <a:cs typeface="Arial" pitchFamily="34" charset="-120"/>
-              </a:rPr>
-              <a:t>Nasce pronta</a:t>
-            </a:r>
-            <a:endParaRPr lang="en-US" sz="3400" dirty="0"/>
+              <a:rPr lang="en-US" sz="3800" b="1" spc="-140" kern="0" dirty="0">
+                <a:solidFill>
+                  <a:srgbClr val="FFFFFF"/>
+                </a:solidFill>
+                <a:latin typeface="Arial" pitchFamily="34" charset="0"/>
+                <a:ea typeface="Arial" pitchFamily="34" charset="-122"/>
+                <a:cs typeface="Arial" pitchFamily="34" charset="-120"/>
+              </a:rPr>
+              <a:t>Alta lignina.</a:t>
+            </a:r>
+            <a:endParaRPr lang="en-US" sz="3800" dirty="0"/>
           </a:p>
           <a:p>
             <a:pPr indent="0" marL="0">
               <a:lnSpc>
-                <a:spcPts val="3536"/>
+                <a:spcPts val="3952"/>
               </a:lnSpc>
               <a:buNone/>
             </a:pPr>
             <a:r>
-              <a:rPr lang="en-US" sz="3400" b="1" spc="-140" kern="0" dirty="0">
-                <a:solidFill>
-                  <a:srgbClr val="F5F1E6"/>
-                </a:solidFill>
-                <a:latin typeface="Arial" pitchFamily="34" charset="0"/>
-                <a:ea typeface="Arial" pitchFamily="34" charset="-122"/>
-                <a:cs typeface="Arial" pitchFamily="34" charset="-120"/>
-              </a:rPr>
-              <a:t>para queimar</a:t>
-            </a:r>
-            <a:endParaRPr lang="en-US" sz="3400" dirty="0"/>
-          </a:p>
-          <a:p>
-            <a:pPr indent="0" marL="0">
-              <a:lnSpc>
-                <a:spcPts val="3536"/>
-              </a:lnSpc>
-              <a:buNone/>
-            </a:pPr>
-            <a:r>
-              <a:rPr lang="en-US" sz="3400" b="1" spc="-140" kern="0" dirty="0">
-                <a:solidFill>
-                  <a:srgbClr val="F5F1E6"/>
-                </a:solidFill>
-                <a:latin typeface="Arial" pitchFamily="34" charset="0"/>
-                <a:ea typeface="Arial" pitchFamily="34" charset="-122"/>
-                <a:cs typeface="Arial" pitchFamily="34" charset="-120"/>
-              </a:rPr>
-              <a:t>sem oxigênio.</a:t>
-            </a:r>
-            <a:endParaRPr lang="en-US" sz="3400" dirty="0"/>
+              <a:rPr lang="en-US" sz="3800" b="1" spc="-140" kern="0" dirty="0">
+                <a:solidFill>
+                  <a:srgbClr val="FFFFFF"/>
+                </a:solidFill>
+                <a:latin typeface="Arial" pitchFamily="34" charset="0"/>
+                <a:ea typeface="Arial" pitchFamily="34" charset="-122"/>
+                <a:cs typeface="Arial" pitchFamily="34" charset="-120"/>
+              </a:rPr>
+              <a:t>Pouca cinza.</a:t>
+            </a:r>
+            <a:endParaRPr lang="en-US" sz="3800" dirty="0"/>
           </a:p>
         </p:txBody>
       </p:sp>
@@ -2442,7 +2347,7 @@
         </p:nvSpPr>
         <p:spPr>
           <a:xfrm>
-            <a:off x="502920" y="2487168"/>
+            <a:off x="502920" y="2212848"/>
             <a:ext cx="1828800" cy="1371600"/>
           </a:xfrm>
           <a:prstGeom prst="roundRect">
@@ -2451,11 +2356,11 @@
             </a:avLst>
           </a:prstGeom>
           <a:solidFill>
-            <a:srgbClr val="C8E85C"/>
+            <a:srgbClr val="1B1C1A"/>
           </a:solidFill>
           <a:ln w="12700">
             <a:solidFill>
-              <a:srgbClr val="C8E85C"/>
+              <a:srgbClr val="1B1C1A"/>
             </a:solidFill>
             <a:prstDash val="solid"/>
           </a:ln>
@@ -2463,7 +2368,7 @@
       </p:sp>
       <p:pic>
         <p:nvPicPr>
-          <p:cNvPr id="6" name="Image 0" descr="/home/user/clipping/design-system/.preview/deck-assets/ico/endocarpo-dark.png">    </p:cNvPr>
+          <p:cNvPr id="6" name="Image 0" descr="/home/user/clipping/design-system/.preview/deck-assets/ico/endocarpo-steel.png">    </p:cNvPr>
           <p:cNvPicPr>
             <a:picLocks noChangeAspect="1"/>
           </p:cNvPicPr>
@@ -2477,8 +2382,8 @@
         </p:blipFill>
         <p:spPr>
           <a:xfrm>
-            <a:off x="685800" y="2633472"/>
-            <a:ext cx="274320" cy="274320"/>
+            <a:off x="685800" y="2359152"/>
+            <a:ext cx="256032" cy="256032"/>
           </a:xfrm>
           <a:prstGeom prst="rect">
             <a:avLst/>
@@ -2493,8 +2398,8 @@
         </p:nvSpPr>
         <p:spPr>
           <a:xfrm>
-            <a:off x="685800" y="2962656"/>
-            <a:ext cx="1554480" cy="500888"/>
+            <a:off x="685800" y="2688336"/>
+            <a:ext cx="1554480" cy="471424"/>
           </a:xfrm>
           <a:prstGeom prst="rect">
             <a:avLst/>
@@ -2510,9 +2415,9 @@
               <a:buNone/>
             </a:pPr>
             <a:r>
-              <a:rPr lang="en-US" sz="3400" b="1" spc="-180" kern="0" dirty="0">
-                <a:solidFill>
-                  <a:srgbClr val="16331F"/>
+              <a:rPr lang="en-US" sz="3200" b="1" spc="-180" kern="0" dirty="0">
+                <a:solidFill>
+                  <a:srgbClr val="8FB04E"/>
                 </a:solidFill>
                 <a:latin typeface="Arial" pitchFamily="34" charset="0"/>
                 <a:ea typeface="Arial" pitchFamily="34" charset="-122"/>
@@ -2520,7 +2425,7 @@
               </a:rPr>
               <a:t>25–53%</a:t>
             </a:r>
-            <a:endParaRPr lang="en-US" sz="3400" dirty="0"/>
+            <a:endParaRPr lang="en-US" sz="3200" dirty="0"/>
           </a:p>
         </p:txBody>
       </p:sp>
@@ -2532,7 +2437,7 @@
         </p:nvSpPr>
         <p:spPr>
           <a:xfrm>
-            <a:off x="685800" y="3529584"/>
+            <a:off x="685800" y="3236976"/>
             <a:ext cx="1463040" cy="182880"/>
           </a:xfrm>
           <a:prstGeom prst="rect">
@@ -2551,7 +2456,7 @@
             <a:r>
               <a:rPr lang="en-US" sz="900" dirty="0">
                 <a:solidFill>
-                  <a:srgbClr val="16331F"/>
+                  <a:srgbClr val="AEB7B9"/>
                 </a:solidFill>
                 <a:latin typeface="Arial" pitchFamily="34" charset="0"/>
                 <a:ea typeface="Arial" pitchFamily="34" charset="-122"/>
@@ -2571,7 +2476,7 @@
         </p:nvSpPr>
         <p:spPr>
           <a:xfrm>
-            <a:off x="2450592" y="2487168"/>
+            <a:off x="2450592" y="2212848"/>
             <a:ext cx="1828800" cy="1371600"/>
           </a:xfrm>
           <a:prstGeom prst="roundRect">
@@ -2580,11 +2485,11 @@
             </a:avLst>
           </a:prstGeom>
           <a:solidFill>
-            <a:srgbClr val="F5F1E6"/>
+            <a:srgbClr val="1B1C1A"/>
           </a:solidFill>
           <a:ln w="12700">
             <a:solidFill>
-              <a:srgbClr val="F5F1E6"/>
+              <a:srgbClr val="1B1C1A"/>
             </a:solidFill>
             <a:prstDash val="solid"/>
           </a:ln>
@@ -2592,7 +2497,7 @@
       </p:sp>
       <p:pic>
         <p:nvPicPr>
-          <p:cNvPr id="10" name="Image 1" descr="/home/user/clipping/design-system/.preview/deck-assets/ico/char-dark.png">    </p:cNvPr>
+          <p:cNvPr id="10" name="Image 1" descr="/home/user/clipping/design-system/.preview/deck-assets/ico/char-steel.png">    </p:cNvPr>
           <p:cNvPicPr>
             <a:picLocks noChangeAspect="1"/>
           </p:cNvPicPr>
@@ -2606,8 +2511,8 @@
         </p:blipFill>
         <p:spPr>
           <a:xfrm>
-            <a:off x="2633472" y="2633472"/>
-            <a:ext cx="274320" cy="274320"/>
+            <a:off x="2633472" y="2359152"/>
+            <a:ext cx="256032" cy="256032"/>
           </a:xfrm>
           <a:prstGeom prst="rect">
             <a:avLst/>
@@ -2622,8 +2527,8 @@
         </p:nvSpPr>
         <p:spPr>
           <a:xfrm>
-            <a:off x="2633472" y="2962656"/>
-            <a:ext cx="1554480" cy="500888"/>
+            <a:off x="2633472" y="2688336"/>
+            <a:ext cx="1554480" cy="471424"/>
           </a:xfrm>
           <a:prstGeom prst="rect">
             <a:avLst/>
@@ -2639,9 +2544,9 @@
               <a:buNone/>
             </a:pPr>
             <a:r>
-              <a:rPr lang="en-US" sz="3400" b="1" spc="-180" kern="0" dirty="0">
-                <a:solidFill>
-                  <a:srgbClr val="16331F"/>
+              <a:rPr lang="en-US" sz="3200" b="1" spc="-180" kern="0" dirty="0">
+                <a:solidFill>
+                  <a:srgbClr val="8FB04E"/>
                 </a:solidFill>
                 <a:latin typeface="Arial" pitchFamily="34" charset="0"/>
                 <a:ea typeface="Arial" pitchFamily="34" charset="-122"/>
@@ -2649,7 +2554,7 @@
               </a:rPr>
               <a:t>&lt; 4%</a:t>
             </a:r>
-            <a:endParaRPr lang="en-US" sz="3400" dirty="0"/>
+            <a:endParaRPr lang="en-US" sz="3200" dirty="0"/>
           </a:p>
         </p:txBody>
       </p:sp>
@@ -2661,7 +2566,7 @@
         </p:nvSpPr>
         <p:spPr>
           <a:xfrm>
-            <a:off x="2633472" y="3529584"/>
+            <a:off x="2633472" y="3236976"/>
             <a:ext cx="1463040" cy="182880"/>
           </a:xfrm>
           <a:prstGeom prst="rect">
@@ -2680,7 +2585,7 @@
             <a:r>
               <a:rPr lang="en-US" sz="900" dirty="0">
                 <a:solidFill>
-                  <a:srgbClr val="16331F"/>
+                  <a:srgbClr val="AEB7B9"/>
                 </a:solidFill>
                 <a:latin typeface="Arial" pitchFamily="34" charset="0"/>
                 <a:ea typeface="Arial" pitchFamily="34" charset="-122"/>
@@ -2694,14 +2599,36 @@
       </p:sp>
       <p:sp>
         <p:nvSpPr>
-          <p:cNvPr id="13" name="Text 9"/>
-          <p:cNvSpPr txBox="1"/>
-          <p:nvPr/>
-        </p:nvSpPr>
-        <p:spPr>
-          <a:xfrm>
-            <a:off x="502920" y="4041648"/>
-            <a:ext cx="4206240" cy="182880"/>
+          <p:cNvPr id="13" name="Shape 9"/>
+          <p:cNvSpPr/>
+          <p:nvPr/>
+        </p:nvSpPr>
+        <p:spPr>
+          <a:xfrm>
+            <a:off x="502920" y="3840480"/>
+            <a:ext cx="3776472" cy="9144"/>
+          </a:xfrm>
+          <a:prstGeom prst="rect">
+            <a:avLst/>
+          </a:prstGeom>
+          <a:solidFill>
+            <a:srgbClr val="AEB7B9">
+              <a:alpha val="60000"/>
+            </a:srgbClr>
+          </a:solidFill>
+          <a:ln/>
+        </p:spPr>
+      </p:sp>
+      <p:sp>
+        <p:nvSpPr>
+          <p:cNvPr id="14" name="Text 10"/>
+          <p:cNvSpPr txBox="1"/>
+          <p:nvPr/>
+        </p:nvSpPr>
+        <p:spPr>
+          <a:xfrm>
+            <a:off x="502920" y="4005072"/>
+            <a:ext cx="3840480" cy="182880"/>
           </a:xfrm>
           <a:prstGeom prst="rect">
             <a:avLst/>
@@ -2717,23 +2644,23 @@
               <a:buNone/>
             </a:pPr>
             <a:r>
-              <a:rPr lang="en-US" sz="900" dirty="0">
-                <a:solidFill>
-                  <a:srgbClr val="C8E85C"/>
-                </a:solidFill>
-                <a:latin typeface="Arial" pitchFamily="34" charset="0"/>
-                <a:ea typeface="Arial" pitchFamily="34" charset="-122"/>
-                <a:cs typeface="Arial" pitchFamily="34" charset="-120"/>
-              </a:rPr>
-              <a:t>mais lignina, mais carbono fixo   ·   menos cinza, char mais limpo</a:t>
-            </a:r>
-            <a:endParaRPr lang="en-US" sz="900" dirty="0"/>
-          </a:p>
-        </p:txBody>
-      </p:sp>
-      <p:sp>
-        <p:nvSpPr>
-          <p:cNvPr id="14" name="Text 10"/>
+              <a:rPr lang="en-US" sz="1100" dirty="0">
+                <a:solidFill>
+                  <a:srgbClr val="F2EEE3"/>
+                </a:solidFill>
+                <a:latin typeface="Arial" pitchFamily="34" charset="0"/>
+                <a:ea typeface="Arial" pitchFamily="34" charset="-122"/>
+                <a:cs typeface="Arial" pitchFamily="34" charset="-120"/>
+              </a:rPr>
+              <a:t>Mais carbono fixo, e um char mais limpo.</a:t>
+            </a:r>
+            <a:endParaRPr lang="en-US" sz="1100" dirty="0"/>
+          </a:p>
+        </p:txBody>
+      </p:sp>
+      <p:sp>
+        <p:nvSpPr>
+          <p:cNvPr id="15" name="Text 11"/>
           <p:cNvSpPr txBox="1"/>
           <p:nvPr/>
         </p:nvSpPr>
@@ -2758,7 +2685,7 @@
             <a:r>
               <a:rPr lang="en-US" sz="750" dirty="0">
                 <a:solidFill>
-                  <a:srgbClr val="6E7A62"/>
+                  <a:srgbClr val="8B928C"/>
                 </a:solidFill>
                 <a:latin typeface="Arial" pitchFamily="34" charset="0"/>
                 <a:ea typeface="Arial" pitchFamily="34" charset="-122"/>
@@ -2826,11 +2753,11 @@
             </a:avLst>
           </a:prstGeom>
           <a:solidFill>
-            <a:srgbClr val="16331F"/>
+            <a:srgbClr val="8FB04E"/>
           </a:solidFill>
           <a:ln w="12700">
             <a:solidFill>
-              <a:srgbClr val="16331F"/>
+              <a:srgbClr val="8FB04E"/>
             </a:solidFill>
             <a:prstDash val="solid"/>
           </a:ln>
@@ -2863,7 +2790,7 @@
             <a:r>
               <a:rPr lang="en-US" sz="900" b="1" spc="140" kern="0" dirty="0">
                 <a:solidFill>
-                  <a:srgbClr val="C8E85C"/>
+                  <a:srgbClr val="0C0C0B"/>
                 </a:solidFill>
                 <a:latin typeface="Arial" pitchFamily="34" charset="0"/>
                 <a:ea typeface="Arial" pitchFamily="34" charset="-122"/>
@@ -2884,7 +2811,7 @@
         <p:spPr>
           <a:xfrm>
             <a:off x="502920" y="932688"/>
-            <a:ext cx="4023360" cy="898144"/>
+            <a:ext cx="4023360" cy="1003808"/>
           </a:xfrm>
           <a:prstGeom prst="rect">
             <a:avLst/>
@@ -2898,42 +2825,42 @@
           <a:p>
             <a:pPr indent="0" marL="0">
               <a:lnSpc>
-                <a:spcPts val="3536"/>
+                <a:spcPts val="3952"/>
               </a:lnSpc>
               <a:buNone/>
             </a:pPr>
             <a:r>
-              <a:rPr lang="en-US" sz="3400" b="1" spc="-140" kern="0" dirty="0">
-                <a:solidFill>
-                  <a:srgbClr val="16331F"/>
-                </a:solidFill>
-                <a:latin typeface="Arial" pitchFamily="34" charset="0"/>
-                <a:ea typeface="Arial" pitchFamily="34" charset="-122"/>
-                <a:cs typeface="Arial" pitchFamily="34" charset="-120"/>
-              </a:rPr>
-              <a:t>Calor.</a:t>
-            </a:r>
-            <a:endParaRPr lang="en-US" sz="3400" dirty="0"/>
+              <a:rPr lang="en-US" sz="3800" b="1" spc="-140" kern="0" dirty="0">
+                <a:solidFill>
+                  <a:srgbClr val="FFFFFF"/>
+                </a:solidFill>
+                <a:latin typeface="Arial" pitchFamily="34" charset="0"/>
+                <a:ea typeface="Arial" pitchFamily="34" charset="-122"/>
+                <a:cs typeface="Arial" pitchFamily="34" charset="-120"/>
+              </a:rPr>
+              <a:t>Calor,</a:t>
+            </a:r>
+            <a:endParaRPr lang="en-US" sz="3800" dirty="0"/>
           </a:p>
           <a:p>
             <a:pPr indent="0" marL="0">
               <a:lnSpc>
-                <a:spcPts val="3536"/>
+                <a:spcPts val="3952"/>
               </a:lnSpc>
               <a:buNone/>
             </a:pPr>
             <a:r>
-              <a:rPr lang="en-US" sz="3400" b="1" spc="-140" kern="0" dirty="0">
-                <a:solidFill>
-                  <a:srgbClr val="16331F"/>
-                </a:solidFill>
-                <a:latin typeface="Arial" pitchFamily="34" charset="0"/>
-                <a:ea typeface="Arial" pitchFamily="34" charset="-122"/>
-                <a:cs typeface="Arial" pitchFamily="34" charset="-120"/>
-              </a:rPr>
-              <a:t>Pouco oxigênio.</a:t>
-            </a:r>
-            <a:endParaRPr lang="en-US" sz="3400" dirty="0"/>
+              <a:rPr lang="en-US" sz="3800" b="1" spc="-140" kern="0" dirty="0">
+                <a:solidFill>
+                  <a:srgbClr val="FFFFFF"/>
+                </a:solidFill>
+                <a:latin typeface="Arial" pitchFamily="34" charset="0"/>
+                <a:ea typeface="Arial" pitchFamily="34" charset="-122"/>
+                <a:cs typeface="Arial" pitchFamily="34" charset="-120"/>
+              </a:rPr>
+              <a:t>sem oxigênio.</a:t>
+            </a:r>
+            <a:endParaRPr lang="en-US" sz="3800" dirty="0"/>
           </a:p>
         </p:txBody>
       </p:sp>
@@ -2945,8 +2872,8 @@
         </p:nvSpPr>
         <p:spPr>
           <a:xfrm>
-            <a:off x="4617720" y="822960"/>
-            <a:ext cx="4023360" cy="854456"/>
+            <a:off x="4617720" y="859536"/>
+            <a:ext cx="4023360" cy="824992"/>
           </a:xfrm>
           <a:prstGeom prst="rect">
             <a:avLst/>
@@ -2962,9 +2889,9 @@
               <a:buNone/>
             </a:pPr>
             <a:r>
-              <a:rPr lang="en-US" sz="5800" b="1" spc="-180" kern="0" dirty="0">
-                <a:solidFill>
-                  <a:srgbClr val="16331F"/>
+              <a:rPr lang="en-US" sz="5600" b="1" spc="-180" kern="0" dirty="0">
+                <a:solidFill>
+                  <a:srgbClr val="8FB04E"/>
                 </a:solidFill>
                 <a:latin typeface="Arial" pitchFamily="34" charset="0"/>
                 <a:ea typeface="Arial" pitchFamily="34" charset="-122"/>
@@ -2972,7 +2899,7 @@
               </a:rPr>
               <a:t>400–600</a:t>
             </a:r>
-            <a:endParaRPr lang="en-US" sz="5800" dirty="0"/>
+            <a:endParaRPr lang="en-US" sz="5600" dirty="0"/>
           </a:p>
         </p:txBody>
       </p:sp>
@@ -2984,7 +2911,7 @@
         </p:nvSpPr>
         <p:spPr>
           <a:xfrm>
-            <a:off x="4617720" y="1737360"/>
+            <a:off x="4617720" y="1755648"/>
             <a:ext cx="4023360" cy="182880"/>
           </a:xfrm>
           <a:prstGeom prst="rect">
@@ -3001,17 +2928,17 @@
               <a:buNone/>
             </a:pPr>
             <a:r>
-              <a:rPr lang="en-US" sz="1000" dirty="0">
-                <a:solidFill>
-                  <a:srgbClr val="8A5A34"/>
-                </a:solidFill>
-                <a:latin typeface="Arial" pitchFamily="34" charset="0"/>
-                <a:ea typeface="Arial" pitchFamily="34" charset="-122"/>
-                <a:cs typeface="Arial" pitchFamily="34" charset="-120"/>
-              </a:rPr>
-              <a:t>graus celsius, sem oxigênio</a:t>
-            </a:r>
-            <a:endParaRPr lang="en-US" sz="1000" dirty="0"/>
+              <a:rPr lang="en-US" sz="1100" dirty="0">
+                <a:solidFill>
+                  <a:srgbClr val="AEB7B9"/>
+                </a:solidFill>
+                <a:latin typeface="Arial" pitchFamily="34" charset="0"/>
+                <a:ea typeface="Arial" pitchFamily="34" charset="-122"/>
+                <a:cs typeface="Arial" pitchFamily="34" charset="-120"/>
+              </a:rPr>
+              <a:t>graus celsius</a:t>
+            </a:r>
+            <a:endParaRPr lang="en-US" sz="1100" dirty="0"/>
           </a:p>
         </p:txBody>
       </p:sp>
@@ -3023,40 +2950,18 @@
         </p:nvSpPr>
         <p:spPr>
           <a:xfrm>
-            <a:off x="960120" y="2615184"/>
-            <a:ext cx="6126480" cy="12802"/>
-          </a:xfrm>
-          <a:prstGeom prst="rect">
+            <a:off x="676656" y="2313432"/>
+            <a:ext cx="566928" cy="566928"/>
+          </a:xfrm>
+          <a:prstGeom prst="ellipse">
             <a:avLst/>
           </a:prstGeom>
           <a:solidFill>
-            <a:srgbClr val="16331F">
-              <a:alpha val="28000"/>
-            </a:srgbClr>
-          </a:solidFill>
-          <a:ln/>
-        </p:spPr>
-      </p:sp>
-      <p:sp>
-        <p:nvSpPr>
-          <p:cNvPr id="8" name="Shape 6"/>
-          <p:cNvSpPr/>
-          <p:nvPr/>
-        </p:nvSpPr>
-        <p:spPr>
-          <a:xfrm>
-            <a:off x="676656" y="2331720"/>
-            <a:ext cx="566928" cy="566928"/>
-          </a:xfrm>
-          <a:prstGeom prst="ellipse">
-            <a:avLst/>
-          </a:prstGeom>
-          <a:solidFill>
-            <a:srgbClr val="C8E85C"/>
+            <a:srgbClr val="1B1C1A"/>
           </a:solidFill>
           <a:ln w="12700">
             <a:solidFill>
-              <a:srgbClr val="C8E85C"/>
+              <a:srgbClr val="1B1C1A"/>
             </a:solidFill>
             <a:prstDash val="solid"/>
           </a:ln>
@@ -3064,7 +2969,7 @@
       </p:sp>
       <p:pic>
         <p:nvPicPr>
-          <p:cNvPr id="9" name="Image 0" descr="/home/user/clipping/design-system/.preview/deck-assets/ico/pilha-dark.png">    </p:cNvPr>
+          <p:cNvPr id="8" name="Image 0" descr="/home/user/clipping/design-system/.preview/deck-assets/ico/pilha-steel.png">    </p:cNvPr>
           <p:cNvPicPr>
             <a:picLocks noChangeAspect="1"/>
           </p:cNvPicPr>
@@ -3078,7 +2983,7 @@
         </p:blipFill>
         <p:spPr>
           <a:xfrm>
-            <a:off x="801380" y="2456444"/>
+            <a:off x="801380" y="2438156"/>
             <a:ext cx="317480" cy="317480"/>
           </a:xfrm>
           <a:prstGeom prst="rect">
@@ -3088,13 +2993,13 @@
       </p:pic>
       <p:sp>
         <p:nvSpPr>
-          <p:cNvPr id="10" name="Text 7"/>
-          <p:cNvSpPr txBox="1"/>
-          <p:nvPr/>
-        </p:nvSpPr>
-        <p:spPr>
-          <a:xfrm>
-            <a:off x="320040" y="3035808"/>
+          <p:cNvPr id="9" name="Text 6"/>
+          <p:cNvSpPr txBox="1"/>
+          <p:nvPr/>
+        </p:nvSpPr>
+        <p:spPr>
+          <a:xfrm>
+            <a:off x="320040" y="3017520"/>
             <a:ext cx="1280160" cy="182880"/>
           </a:xfrm>
           <a:prstGeom prst="rect">
@@ -3113,7 +3018,7 @@
             <a:r>
               <a:rPr lang="en-US" sz="900" dirty="0">
                 <a:solidFill>
-                  <a:srgbClr val="16331F"/>
+                  <a:srgbClr val="AEB7B9"/>
                 </a:solidFill>
                 <a:latin typeface="Arial" pitchFamily="34" charset="0"/>
                 <a:ea typeface="Arial" pitchFamily="34" charset="-122"/>
@@ -3127,24 +3032,24 @@
       </p:sp>
       <p:sp>
         <p:nvSpPr>
-          <p:cNvPr id="11" name="Shape 8"/>
+          <p:cNvPr id="10" name="Shape 7"/>
           <p:cNvSpPr/>
           <p:nvPr/>
         </p:nvSpPr>
         <p:spPr>
           <a:xfrm>
-            <a:off x="2208276" y="2331720"/>
+            <a:off x="2208276" y="2313432"/>
             <a:ext cx="566928" cy="566928"/>
           </a:xfrm>
           <a:prstGeom prst="ellipse">
             <a:avLst/>
           </a:prstGeom>
           <a:solidFill>
-            <a:srgbClr val="C8E85C"/>
+            <a:srgbClr val="1B1C1A"/>
           </a:solidFill>
           <a:ln w="12700">
             <a:solidFill>
-              <a:srgbClr val="C8E85C"/>
+              <a:srgbClr val="1B1C1A"/>
             </a:solidFill>
             <a:prstDash val="solid"/>
           </a:ln>
@@ -3152,7 +3057,7 @@
       </p:sp>
       <p:pic>
         <p:nvPicPr>
-          <p:cNvPr id="12" name="Image 1" descr="/home/user/clipping/design-system/.preview/deck-assets/ico/calor-dark.png">    </p:cNvPr>
+          <p:cNvPr id="11" name="Image 1" descr="/home/user/clipping/design-system/.preview/deck-assets/ico/calor-steel.png">    </p:cNvPr>
           <p:cNvPicPr>
             <a:picLocks noChangeAspect="1"/>
           </p:cNvPicPr>
@@ -3166,7 +3071,7 @@
         </p:blipFill>
         <p:spPr>
           <a:xfrm>
-            <a:off x="2333000" y="2456444"/>
+            <a:off x="2333000" y="2438156"/>
             <a:ext cx="317480" cy="317480"/>
           </a:xfrm>
           <a:prstGeom prst="rect">
@@ -3176,13 +3081,13 @@
       </p:pic>
       <p:sp>
         <p:nvSpPr>
-          <p:cNvPr id="13" name="Text 9"/>
-          <p:cNvSpPr txBox="1"/>
-          <p:nvPr/>
-        </p:nvSpPr>
-        <p:spPr>
-          <a:xfrm>
-            <a:off x="1851660" y="3035808"/>
+          <p:cNvPr id="12" name="Text 8"/>
+          <p:cNvSpPr txBox="1"/>
+          <p:nvPr/>
+        </p:nvSpPr>
+        <p:spPr>
+          <a:xfrm>
+            <a:off x="1851660" y="3017520"/>
             <a:ext cx="1280160" cy="182880"/>
           </a:xfrm>
           <a:prstGeom prst="rect">
@@ -3201,7 +3106,7 @@
             <a:r>
               <a:rPr lang="en-US" sz="900" dirty="0">
                 <a:solidFill>
-                  <a:srgbClr val="16331F"/>
+                  <a:srgbClr val="AEB7B9"/>
                 </a:solidFill>
                 <a:latin typeface="Arial" pitchFamily="34" charset="0"/>
                 <a:ea typeface="Arial" pitchFamily="34" charset="-122"/>
@@ -3215,24 +3120,24 @@
       </p:sp>
       <p:sp>
         <p:nvSpPr>
-          <p:cNvPr id="14" name="Shape 10"/>
+          <p:cNvPr id="13" name="Shape 9"/>
           <p:cNvSpPr/>
           <p:nvPr/>
         </p:nvSpPr>
         <p:spPr>
           <a:xfrm>
-            <a:off x="3739896" y="2331720"/>
+            <a:off x="3739896" y="2313432"/>
             <a:ext cx="566928" cy="566928"/>
           </a:xfrm>
           <a:prstGeom prst="ellipse">
             <a:avLst/>
           </a:prstGeom>
           <a:solidFill>
-            <a:srgbClr val="C8E85C"/>
+            <a:srgbClr val="1B1C1A"/>
           </a:solidFill>
           <a:ln w="12700">
             <a:solidFill>
-              <a:srgbClr val="C8E85C"/>
+              <a:srgbClr val="1B1C1A"/>
             </a:solidFill>
             <a:prstDash val="solid"/>
           </a:ln>
@@ -3240,7 +3145,7 @@
       </p:sp>
       <p:pic>
         <p:nvPicPr>
-          <p:cNvPr id="15" name="Image 2" descr="/home/user/clipping/design-system/.preview/deck-assets/ico/reator-dark.png">    </p:cNvPr>
+          <p:cNvPr id="14" name="Image 2" descr="/home/user/clipping/design-system/.preview/deck-assets/ico/reator-steel.png">    </p:cNvPr>
           <p:cNvPicPr>
             <a:picLocks noChangeAspect="1"/>
           </p:cNvPicPr>
@@ -3254,7 +3159,7 @@
         </p:blipFill>
         <p:spPr>
           <a:xfrm>
-            <a:off x="3864620" y="2456444"/>
+            <a:off x="3864620" y="2438156"/>
             <a:ext cx="317480" cy="317480"/>
           </a:xfrm>
           <a:prstGeom prst="rect">
@@ -3264,13 +3169,13 @@
       </p:pic>
       <p:sp>
         <p:nvSpPr>
-          <p:cNvPr id="16" name="Text 11"/>
-          <p:cNvSpPr txBox="1"/>
-          <p:nvPr/>
-        </p:nvSpPr>
-        <p:spPr>
-          <a:xfrm>
-            <a:off x="3383280" y="3035808"/>
+          <p:cNvPr id="15" name="Text 10"/>
+          <p:cNvSpPr txBox="1"/>
+          <p:nvPr/>
+        </p:nvSpPr>
+        <p:spPr>
+          <a:xfrm>
+            <a:off x="3383280" y="3017520"/>
             <a:ext cx="1280160" cy="182880"/>
           </a:xfrm>
           <a:prstGeom prst="rect">
@@ -3289,7 +3194,7 @@
             <a:r>
               <a:rPr lang="en-US" sz="900" dirty="0">
                 <a:solidFill>
-                  <a:srgbClr val="16331F"/>
+                  <a:srgbClr val="AEB7B9"/>
                 </a:solidFill>
                 <a:latin typeface="Arial" pitchFamily="34" charset="0"/>
                 <a:ea typeface="Arial" pitchFamily="34" charset="-122"/>
@@ -3303,24 +3208,24 @@
       </p:sp>
       <p:sp>
         <p:nvSpPr>
-          <p:cNvPr id="17" name="Shape 12"/>
+          <p:cNvPr id="16" name="Shape 11"/>
           <p:cNvSpPr/>
           <p:nvPr/>
         </p:nvSpPr>
         <p:spPr>
           <a:xfrm>
-            <a:off x="5271516" y="2331720"/>
+            <a:off x="5271516" y="2313432"/>
             <a:ext cx="566928" cy="566928"/>
           </a:xfrm>
           <a:prstGeom prst="ellipse">
             <a:avLst/>
           </a:prstGeom>
           <a:solidFill>
-            <a:srgbClr val="C8E85C"/>
+            <a:srgbClr val="1B1C1A"/>
           </a:solidFill>
           <a:ln w="12700">
             <a:solidFill>
-              <a:srgbClr val="C8E85C"/>
+              <a:srgbClr val="1B1C1A"/>
             </a:solidFill>
             <a:prstDash val="solid"/>
           </a:ln>
@@ -3328,7 +3233,7 @@
       </p:sp>
       <p:pic>
         <p:nvPicPr>
-          <p:cNvPr id="18" name="Image 3" descr="/home/user/clipping/design-system/.preview/deck-assets/ico/gases-dark.png">    </p:cNvPr>
+          <p:cNvPr id="17" name="Image 3" descr="/home/user/clipping/design-system/.preview/deck-assets/ico/gases-steel.png">    </p:cNvPr>
           <p:cNvPicPr>
             <a:picLocks noChangeAspect="1"/>
           </p:cNvPicPr>
@@ -3342,7 +3247,7 @@
         </p:blipFill>
         <p:spPr>
           <a:xfrm>
-            <a:off x="5396240" y="2456444"/>
+            <a:off x="5396240" y="2438156"/>
             <a:ext cx="317480" cy="317480"/>
           </a:xfrm>
           <a:prstGeom prst="rect">
@@ -3352,13 +3257,13 @@
       </p:pic>
       <p:sp>
         <p:nvSpPr>
-          <p:cNvPr id="19" name="Text 13"/>
-          <p:cNvSpPr txBox="1"/>
-          <p:nvPr/>
-        </p:nvSpPr>
-        <p:spPr>
-          <a:xfrm>
-            <a:off x="4914900" y="3035808"/>
+          <p:cNvPr id="18" name="Text 12"/>
+          <p:cNvSpPr txBox="1"/>
+          <p:nvPr/>
+        </p:nvSpPr>
+        <p:spPr>
+          <a:xfrm>
+            <a:off x="4914900" y="3017520"/>
             <a:ext cx="1280160" cy="182880"/>
           </a:xfrm>
           <a:prstGeom prst="rect">
@@ -3377,7 +3282,7 @@
             <a:r>
               <a:rPr lang="en-US" sz="900" dirty="0">
                 <a:solidFill>
-                  <a:srgbClr val="16331F"/>
+                  <a:srgbClr val="AEB7B9"/>
                 </a:solidFill>
                 <a:latin typeface="Arial" pitchFamily="34" charset="0"/>
                 <a:ea typeface="Arial" pitchFamily="34" charset="-122"/>
@@ -3391,24 +3296,24 @@
       </p:sp>
       <p:sp>
         <p:nvSpPr>
-          <p:cNvPr id="20" name="Shape 14"/>
+          <p:cNvPr id="19" name="Shape 13"/>
           <p:cNvSpPr/>
           <p:nvPr/>
         </p:nvSpPr>
         <p:spPr>
           <a:xfrm>
-            <a:off x="6803136" y="2331720"/>
+            <a:off x="6803136" y="2313432"/>
             <a:ext cx="566928" cy="566928"/>
           </a:xfrm>
           <a:prstGeom prst="ellipse">
             <a:avLst/>
           </a:prstGeom>
           <a:solidFill>
-            <a:srgbClr val="16331F"/>
+            <a:srgbClr val="8FB04E"/>
           </a:solidFill>
           <a:ln w="12700">
             <a:solidFill>
-              <a:srgbClr val="16331F"/>
+              <a:srgbClr val="8FB04E"/>
             </a:solidFill>
             <a:prstDash val="solid"/>
           </a:ln>
@@ -3416,7 +3321,7 @@
       </p:sp>
       <p:pic>
         <p:nvPicPr>
-          <p:cNvPr id="21" name="Image 4" descr="/home/user/clipping/design-system/.preview/deck-assets/ico/char-acid.png">    </p:cNvPr>
+          <p:cNvPr id="20" name="Image 4" descr="/home/user/clipping/design-system/.preview/deck-assets/ico/char-dark.png">    </p:cNvPr>
           <p:cNvPicPr>
             <a:picLocks noChangeAspect="1"/>
           </p:cNvPicPr>
@@ -3430,7 +3335,7 @@
         </p:blipFill>
         <p:spPr>
           <a:xfrm>
-            <a:off x="6927860" y="2456444"/>
+            <a:off x="6927860" y="2438156"/>
             <a:ext cx="317480" cy="317480"/>
           </a:xfrm>
           <a:prstGeom prst="rect">
@@ -3440,14 +3345,92 @@
       </p:pic>
       <p:sp>
         <p:nvSpPr>
+          <p:cNvPr id="21" name="Text 14"/>
+          <p:cNvSpPr txBox="1"/>
+          <p:nvPr/>
+        </p:nvSpPr>
+        <p:spPr>
+          <a:xfrm>
+            <a:off x="6446520" y="3017520"/>
+            <a:ext cx="1280160" cy="182880"/>
+          </a:xfrm>
+          <a:prstGeom prst="rect">
+            <a:avLst/>
+          </a:prstGeom>
+          <a:noFill/>
+          <a:ln/>
+        </p:spPr>
+        <p:txBody>
+          <a:bodyPr wrap="square" lIns="0" tIns="0" rIns="0" bIns="0" rtlCol="0" anchor="ctr"/>
+          <a:lstStyle/>
+          <a:p>
+            <a:pPr algn="ctr" indent="0" marL="0">
+              <a:buNone/>
+            </a:pPr>
+            <a:r>
+              <a:rPr lang="en-US" sz="900" dirty="0">
+                <a:solidFill>
+                  <a:srgbClr val="8FB04E"/>
+                </a:solidFill>
+                <a:latin typeface="Arial" pitchFamily="34" charset="0"/>
+                <a:ea typeface="Arial" pitchFamily="34" charset="-122"/>
+                <a:cs typeface="Arial" pitchFamily="34" charset="-120"/>
+              </a:rPr>
+              <a:t>biochar</a:t>
+            </a:r>
+            <a:endParaRPr lang="en-US" sz="900" dirty="0"/>
+          </a:p>
+        </p:txBody>
+      </p:sp>
+      <p:sp>
+        <p:nvSpPr>
           <p:cNvPr id="22" name="Text 15"/>
           <p:cNvSpPr txBox="1"/>
           <p:nvPr/>
         </p:nvSpPr>
         <p:spPr>
           <a:xfrm>
-            <a:off x="6446520" y="3035808"/>
-            <a:ext cx="1280160" cy="182880"/>
+            <a:off x="777240" y="3602736"/>
+            <a:ext cx="1463040" cy="441960"/>
+          </a:xfrm>
+          <a:prstGeom prst="rect">
+            <a:avLst/>
+          </a:prstGeom>
+          <a:noFill/>
+          <a:ln/>
+        </p:spPr>
+        <p:txBody>
+          <a:bodyPr wrap="square" lIns="0" tIns="0" rIns="0" bIns="0" rtlCol="0" anchor="t"/>
+          <a:lstStyle/>
+          <a:p>
+            <a:pPr algn="l" indent="0" marL="0">
+              <a:buNone/>
+            </a:pPr>
+            <a:r>
+              <a:rPr lang="en-US" sz="3000" b="1" spc="-180" kern="0" dirty="0">
+                <a:solidFill>
+                  <a:srgbClr val="F2EEE3"/>
+                </a:solidFill>
+                <a:latin typeface="Arial" pitchFamily="34" charset="0"/>
+                <a:ea typeface="Arial" pitchFamily="34" charset="-122"/>
+                <a:cs typeface="Arial" pitchFamily="34" charset="-120"/>
+              </a:rPr>
+              <a:t>1 t</a:t>
+            </a:r>
+            <a:endParaRPr lang="en-US" sz="3000" dirty="0"/>
+          </a:p>
+        </p:txBody>
+      </p:sp>
+      <p:sp>
+        <p:nvSpPr>
+          <p:cNvPr id="23" name="Text 16"/>
+          <p:cNvSpPr txBox="1"/>
+          <p:nvPr/>
+        </p:nvSpPr>
+        <p:spPr>
+          <a:xfrm>
+            <a:off x="777240" y="4114800"/>
+            <a:ext cx="2011680" cy="182880"/>
           </a:xfrm>
           <a:prstGeom prst="rect">
             <a:avLst/>
@@ -3459,19 +3442,19 @@
           <a:bodyPr wrap="square" lIns="0" tIns="0" rIns="0" bIns="0" rtlCol="0" anchor="ctr"/>
           <a:lstStyle/>
           <a:p>
-            <a:pPr algn="ctr" indent="0" marL="0">
+            <a:pPr algn="l" indent="0" marL="0">
               <a:buNone/>
             </a:pPr>
             <a:r>
               <a:rPr lang="en-US" sz="900" dirty="0">
                 <a:solidFill>
-                  <a:srgbClr val="16331F"/>
-                </a:solidFill>
-                <a:latin typeface="Arial" pitchFamily="34" charset="0"/>
-                <a:ea typeface="Arial" pitchFamily="34" charset="-122"/>
-                <a:cs typeface="Arial" pitchFamily="34" charset="-120"/>
-              </a:rPr>
-              <a:t>biochar</a:t>
+                  <a:srgbClr val="F2EEE3"/>
+                </a:solidFill>
+                <a:latin typeface="Arial" pitchFamily="34" charset="0"/>
+                <a:ea typeface="Arial" pitchFamily="34" charset="-122"/>
+                <a:cs typeface="Arial" pitchFamily="34" charset="-120"/>
+              </a:rPr>
+              <a:t>casca seca entra</a:t>
             </a:r>
             <a:endParaRPr lang="en-US" sz="900" dirty="0"/>
           </a:p>
@@ -3479,14 +3462,14 @@
       </p:sp>
       <p:sp>
         <p:nvSpPr>
-          <p:cNvPr id="23" name="Text 16"/>
-          <p:cNvSpPr txBox="1"/>
-          <p:nvPr/>
-        </p:nvSpPr>
-        <p:spPr>
-          <a:xfrm>
-            <a:off x="777240" y="3639312"/>
-            <a:ext cx="1463040" cy="471424"/>
+          <p:cNvPr id="24" name="Text 17"/>
+          <p:cNvSpPr txBox="1"/>
+          <p:nvPr/>
+        </p:nvSpPr>
+        <p:spPr>
+          <a:xfrm>
+            <a:off x="5120640" y="3602736"/>
+            <a:ext cx="2377440" cy="441960"/>
           </a:xfrm>
           <a:prstGeom prst="rect">
             <a:avLst/>
@@ -3502,29 +3485,29 @@
               <a:buNone/>
             </a:pPr>
             <a:r>
-              <a:rPr lang="en-US" sz="3200" b="1" spc="-180" kern="0" dirty="0">
-                <a:solidFill>
-                  <a:srgbClr val="16331F"/>
-                </a:solidFill>
-                <a:latin typeface="Arial" pitchFamily="34" charset="0"/>
-                <a:ea typeface="Arial" pitchFamily="34" charset="-122"/>
-                <a:cs typeface="Arial" pitchFamily="34" charset="-120"/>
-              </a:rPr>
-              <a:t>1 t</a:t>
-            </a:r>
-            <a:endParaRPr lang="en-US" sz="3200" dirty="0"/>
-          </a:p>
-        </p:txBody>
-      </p:sp>
-      <p:sp>
-        <p:nvSpPr>
-          <p:cNvPr id="24" name="Text 17"/>
-          <p:cNvSpPr txBox="1"/>
-          <p:nvPr/>
-        </p:nvSpPr>
-        <p:spPr>
-          <a:xfrm>
-            <a:off x="777240" y="4169664"/>
+              <a:rPr lang="en-US" sz="3000" b="1" spc="-180" kern="0" dirty="0">
+                <a:solidFill>
+                  <a:srgbClr val="8FB04E"/>
+                </a:solidFill>
+                <a:latin typeface="Arial" pitchFamily="34" charset="0"/>
+                <a:ea typeface="Arial" pitchFamily="34" charset="-122"/>
+                <a:cs typeface="Arial" pitchFamily="34" charset="-120"/>
+              </a:rPr>
+              <a:t>~300 kg</a:t>
+            </a:r>
+            <a:endParaRPr lang="en-US" sz="3000" dirty="0"/>
+          </a:p>
+        </p:txBody>
+      </p:sp>
+      <p:sp>
+        <p:nvSpPr>
+          <p:cNvPr id="25" name="Text 18"/>
+          <p:cNvSpPr txBox="1"/>
+          <p:nvPr/>
+        </p:nvSpPr>
+        <p:spPr>
+          <a:xfrm>
+            <a:off x="5120640" y="4114800"/>
             <a:ext cx="2011680" cy="182880"/>
           </a:xfrm>
           <a:prstGeom prst="rect">
@@ -3543,13 +3526,13 @@
             <a:r>
               <a:rPr lang="en-US" sz="900" dirty="0">
                 <a:solidFill>
-                  <a:srgbClr val="16331F"/>
-                </a:solidFill>
-                <a:latin typeface="Arial" pitchFamily="34" charset="0"/>
-                <a:ea typeface="Arial" pitchFamily="34" charset="-122"/>
-                <a:cs typeface="Arial" pitchFamily="34" charset="-120"/>
-              </a:rPr>
-              <a:t>casca seca entra</a:t>
+                  <a:srgbClr val="8FB04E"/>
+                </a:solidFill>
+                <a:latin typeface="Arial" pitchFamily="34" charset="0"/>
+                <a:ea typeface="Arial" pitchFamily="34" charset="-122"/>
+                <a:cs typeface="Arial" pitchFamily="34" charset="-120"/>
+              </a:rPr>
+              <a:t>biochar sai</a:t>
             </a:r>
             <a:endParaRPr lang="en-US" sz="900" dirty="0"/>
           </a:p>
@@ -3557,85 +3540,7 @@
       </p:sp>
       <p:sp>
         <p:nvSpPr>
-          <p:cNvPr id="25" name="Text 18"/>
-          <p:cNvSpPr txBox="1"/>
-          <p:nvPr/>
-        </p:nvSpPr>
-        <p:spPr>
-          <a:xfrm>
-            <a:off x="5120640" y="3639312"/>
-            <a:ext cx="2377440" cy="471424"/>
-          </a:xfrm>
-          <a:prstGeom prst="rect">
-            <a:avLst/>
-          </a:prstGeom>
-          <a:noFill/>
-          <a:ln/>
-        </p:spPr>
-        <p:txBody>
-          <a:bodyPr wrap="square" lIns="0" tIns="0" rIns="0" bIns="0" rtlCol="0" anchor="t"/>
-          <a:lstStyle/>
-          <a:p>
-            <a:pPr algn="l" indent="0" marL="0">
-              <a:buNone/>
-            </a:pPr>
-            <a:r>
-              <a:rPr lang="en-US" sz="3200" b="1" spc="-180" kern="0" dirty="0">
-                <a:solidFill>
-                  <a:srgbClr val="C8E85C"/>
-                </a:solidFill>
-                <a:latin typeface="Arial" pitchFamily="34" charset="0"/>
-                <a:ea typeface="Arial" pitchFamily="34" charset="-122"/>
-                <a:cs typeface="Arial" pitchFamily="34" charset="-120"/>
-              </a:rPr>
-              <a:t>~300 kg</a:t>
-            </a:r>
-            <a:endParaRPr lang="en-US" sz="3200" dirty="0"/>
-          </a:p>
-        </p:txBody>
-      </p:sp>
-      <p:sp>
-        <p:nvSpPr>
           <p:cNvPr id="26" name="Text 19"/>
-          <p:cNvSpPr txBox="1"/>
-          <p:nvPr/>
-        </p:nvSpPr>
-        <p:spPr>
-          <a:xfrm>
-            <a:off x="5120640" y="4169664"/>
-            <a:ext cx="2011680" cy="182880"/>
-          </a:xfrm>
-          <a:prstGeom prst="rect">
-            <a:avLst/>
-          </a:prstGeom>
-          <a:noFill/>
-          <a:ln/>
-        </p:spPr>
-        <p:txBody>
-          <a:bodyPr wrap="square" lIns="0" tIns="0" rIns="0" bIns="0" rtlCol="0" anchor="ctr"/>
-          <a:lstStyle/>
-          <a:p>
-            <a:pPr algn="l" indent="0" marL="0">
-              <a:buNone/>
-            </a:pPr>
-            <a:r>
-              <a:rPr lang="en-US" sz="900" dirty="0">
-                <a:solidFill>
-                  <a:srgbClr val="C8E85C"/>
-                </a:solidFill>
-                <a:latin typeface="Arial" pitchFamily="34" charset="0"/>
-                <a:ea typeface="Arial" pitchFamily="34" charset="-122"/>
-                <a:cs typeface="Arial" pitchFamily="34" charset="-120"/>
-              </a:rPr>
-              <a:t>biochar sai</a:t>
-            </a:r>
-            <a:endParaRPr lang="en-US" sz="900" dirty="0"/>
-          </a:p>
-        </p:txBody>
-      </p:sp>
-      <p:sp>
-        <p:nvSpPr>
-          <p:cNvPr id="27" name="Text 20"/>
           <p:cNvSpPr txBox="1"/>
           <p:nvPr/>
         </p:nvSpPr>
@@ -3660,7 +3565,7 @@
             <a:r>
               <a:rPr lang="en-US" sz="750" dirty="0">
                 <a:solidFill>
-                  <a:srgbClr val="6E7A62"/>
+                  <a:srgbClr val="8B928C"/>
                 </a:solidFill>
                 <a:latin typeface="Arial" pitchFamily="34" charset="0"/>
                 <a:ea typeface="Arial" pitchFamily="34" charset="-122"/>
@@ -3728,11 +3633,11 @@
             </a:avLst>
           </a:prstGeom>
           <a:solidFill>
-            <a:srgbClr val="16331F"/>
+            <a:srgbClr val="1E3320"/>
           </a:solidFill>
           <a:ln w="12700">
             <a:solidFill>
-              <a:srgbClr val="16331F"/>
+              <a:srgbClr val="1E3320"/>
             </a:solidFill>
             <a:prstDash val="solid"/>
           </a:ln>
@@ -3765,7 +3670,7 @@
             <a:r>
               <a:rPr lang="en-US" sz="900" b="1" spc="140" kern="0" dirty="0">
                 <a:solidFill>
-                  <a:srgbClr val="C8E85C"/>
+                  <a:srgbClr val="8FB04E"/>
                 </a:solidFill>
                 <a:latin typeface="Arial" pitchFamily="34" charset="0"/>
                 <a:ea typeface="Arial" pitchFamily="34" charset="-122"/>
@@ -3786,7 +3691,7 @@
         <p:spPr>
           <a:xfrm>
             <a:off x="502920" y="932688"/>
-            <a:ext cx="3291840" cy="1347216"/>
+            <a:ext cx="3291840" cy="1426464"/>
           </a:xfrm>
           <a:prstGeom prst="rect">
             <a:avLst/>
@@ -3800,62 +3705,62 @@
           <a:p>
             <a:pPr indent="0" marL="0">
               <a:lnSpc>
-                <a:spcPts val="3536"/>
+                <a:spcPts val="3744"/>
               </a:lnSpc>
               <a:buNone/>
             </a:pPr>
             <a:r>
-              <a:rPr lang="en-US" sz="3400" b="1" spc="-140" kern="0" dirty="0">
-                <a:solidFill>
-                  <a:srgbClr val="16331F"/>
-                </a:solidFill>
-                <a:latin typeface="Arial" pitchFamily="34" charset="0"/>
-                <a:ea typeface="Arial" pitchFamily="34" charset="-122"/>
-                <a:cs typeface="Arial" pitchFamily="34" charset="-120"/>
-              </a:rPr>
-              <a:t>Sai um</a:t>
-            </a:r>
-            <a:endParaRPr lang="en-US" sz="3400" dirty="0"/>
+              <a:rPr lang="en-US" sz="3600" b="1" spc="-140" kern="0" dirty="0">
+                <a:solidFill>
+                  <a:srgbClr val="1E3320"/>
+                </a:solidFill>
+                <a:latin typeface="Arial" pitchFamily="34" charset="0"/>
+                <a:ea typeface="Arial" pitchFamily="34" charset="-122"/>
+                <a:cs typeface="Arial" pitchFamily="34" charset="-120"/>
+              </a:rPr>
+              <a:t>Sólido,</a:t>
+            </a:r>
+            <a:endParaRPr lang="en-US" sz="3600" dirty="0"/>
           </a:p>
           <a:p>
             <a:pPr indent="0" marL="0">
               <a:lnSpc>
-                <a:spcPts val="3536"/>
+                <a:spcPts val="3744"/>
               </a:lnSpc>
               <a:buNone/>
             </a:pPr>
             <a:r>
-              <a:rPr lang="en-US" sz="3400" b="1" spc="-140" kern="0" dirty="0">
-                <a:solidFill>
-                  <a:srgbClr val="16331F"/>
-                </a:solidFill>
-                <a:latin typeface="Arial" pitchFamily="34" charset="0"/>
-                <a:ea typeface="Arial" pitchFamily="34" charset="-122"/>
-                <a:cs typeface="Arial" pitchFamily="34" charset="-120"/>
-              </a:rPr>
-              <a:t>sólido preto</a:t>
-            </a:r>
-            <a:endParaRPr lang="en-US" sz="3400" dirty="0"/>
+              <a:rPr lang="en-US" sz="3600" b="1" spc="-140" kern="0" dirty="0">
+                <a:solidFill>
+                  <a:srgbClr val="1E3320"/>
+                </a:solidFill>
+                <a:latin typeface="Arial" pitchFamily="34" charset="0"/>
+                <a:ea typeface="Arial" pitchFamily="34" charset="-122"/>
+                <a:cs typeface="Arial" pitchFamily="34" charset="-120"/>
+              </a:rPr>
+              <a:t>seco,</a:t>
+            </a:r>
+            <a:endParaRPr lang="en-US" sz="3600" dirty="0"/>
           </a:p>
           <a:p>
             <a:pPr indent="0" marL="0">
               <a:lnSpc>
-                <a:spcPts val="3536"/>
+                <a:spcPts val="3744"/>
               </a:lnSpc>
               <a:buNone/>
             </a:pPr>
             <a:r>
-              <a:rPr lang="en-US" sz="3400" b="1" spc="-140" kern="0" dirty="0">
-                <a:solidFill>
-                  <a:srgbClr val="16331F"/>
-                </a:solidFill>
-                <a:latin typeface="Arial" pitchFamily="34" charset="0"/>
-                <a:ea typeface="Arial" pitchFamily="34" charset="-122"/>
-                <a:cs typeface="Arial" pitchFamily="34" charset="-120"/>
-              </a:rPr>
-              <a:t>e estável.</a:t>
-            </a:r>
-            <a:endParaRPr lang="en-US" sz="3400" dirty="0"/>
+              <a:rPr lang="en-US" sz="3600" b="1" spc="-140" kern="0" dirty="0">
+                <a:solidFill>
+                  <a:srgbClr val="1E3320"/>
+                </a:solidFill>
+                <a:latin typeface="Arial" pitchFamily="34" charset="0"/>
+                <a:ea typeface="Arial" pitchFamily="34" charset="-122"/>
+                <a:cs typeface="Arial" pitchFamily="34" charset="-120"/>
+              </a:rPr>
+              <a:t>estável.</a:t>
+            </a:r>
+            <a:endParaRPr lang="en-US" sz="3600" dirty="0"/>
           </a:p>
         </p:txBody>
       </p:sp>
@@ -3867,8 +3772,8 @@
         </p:nvSpPr>
         <p:spPr>
           <a:xfrm>
-            <a:off x="502920" y="2157984"/>
-            <a:ext cx="3291840" cy="1355344"/>
+            <a:off x="502920" y="2395728"/>
+            <a:ext cx="3291840" cy="1266952"/>
           </a:xfrm>
           <a:prstGeom prst="rect">
             <a:avLst/>
@@ -3884,9 +3789,9 @@
               <a:buNone/>
             </a:pPr>
             <a:r>
-              <a:rPr lang="en-US" sz="9200" b="1" spc="-340" kern="0" dirty="0">
-                <a:solidFill>
-                  <a:srgbClr val="16331F"/>
+              <a:rPr lang="en-US" sz="8600" b="1" spc="-340" kern="0" dirty="0">
+                <a:solidFill>
+                  <a:srgbClr val="1E3320"/>
                 </a:solidFill>
                 <a:latin typeface="Arial" pitchFamily="34" charset="0"/>
                 <a:ea typeface="Arial" pitchFamily="34" charset="-122"/>
@@ -3894,7 +3799,7 @@
               </a:rPr>
               <a:t>−70%</a:t>
             </a:r>
-            <a:endParaRPr lang="en-US" sz="9200" dirty="0"/>
+            <a:endParaRPr lang="en-US" sz="8600" dirty="0"/>
           </a:p>
         </p:txBody>
       </p:sp>
@@ -3906,7 +3811,7 @@
         </p:nvSpPr>
         <p:spPr>
           <a:xfrm>
-            <a:off x="502920" y="3529584"/>
+            <a:off x="502920" y="3675888"/>
             <a:ext cx="3474720" cy="182880"/>
           </a:xfrm>
           <a:prstGeom prst="rect">
@@ -3923,17 +3828,17 @@
               <a:buNone/>
             </a:pPr>
             <a:r>
-              <a:rPr lang="en-US" sz="1000" dirty="0">
-                <a:solidFill>
-                  <a:srgbClr val="8A5A34"/>
-                </a:solidFill>
-                <a:latin typeface="Arial" pitchFamily="34" charset="0"/>
-                <a:ea typeface="Arial" pitchFamily="34" charset="-122"/>
-                <a:cs typeface="Arial" pitchFamily="34" charset="-120"/>
-              </a:rPr>
-              <a:t>de massa, em relação à casca úmida</a:t>
-            </a:r>
-            <a:endParaRPr lang="en-US" sz="1000" dirty="0"/>
+              <a:rPr lang="en-US" sz="1100" dirty="0">
+                <a:solidFill>
+                  <a:srgbClr val="4A3320"/>
+                </a:solidFill>
+                <a:latin typeface="Arial" pitchFamily="34" charset="0"/>
+                <a:ea typeface="Arial" pitchFamily="34" charset="-122"/>
+                <a:cs typeface="Arial" pitchFamily="34" charset="-120"/>
+              </a:rPr>
+              <a:t>de massa em relação à casca úmida</a:t>
+            </a:r>
+            <a:endParaRPr lang="en-US" sz="1100" dirty="0"/>
           </a:p>
         </p:txBody>
       </p:sp>
@@ -3945,20 +3850,20 @@
         </p:nvSpPr>
         <p:spPr>
           <a:xfrm>
-            <a:off x="502920" y="3913632"/>
-            <a:ext cx="1024128" cy="603504"/>
+            <a:off x="502920" y="3986784"/>
+            <a:ext cx="1024128" cy="566928"/>
           </a:xfrm>
           <a:prstGeom prst="roundRect">
             <a:avLst>
-              <a:gd name="adj" fmla="val 18182"/>
+              <a:gd name="adj" fmla="val 19355"/>
             </a:avLst>
           </a:prstGeom>
           <a:solidFill>
-            <a:srgbClr val="16331F"/>
+            <a:srgbClr val="1E3320"/>
           </a:solidFill>
           <a:ln w="12700">
             <a:solidFill>
-              <a:srgbClr val="16331F"/>
+              <a:srgbClr val="1E3320"/>
             </a:solidFill>
             <a:prstDash val="solid"/>
           </a:ln>
@@ -3980,8 +3885,8 @@
         </p:blipFill>
         <p:spPr>
           <a:xfrm>
-            <a:off x="630936" y="4005072"/>
-            <a:ext cx="256032" cy="256032"/>
+            <a:off x="630936" y="4059936"/>
+            <a:ext cx="237744" cy="237744"/>
           </a:xfrm>
           <a:prstGeom prst="rect">
             <a:avLst/>
@@ -3996,7 +3901,7 @@
         </p:nvSpPr>
         <p:spPr>
           <a:xfrm>
-            <a:off x="630936" y="4334256"/>
+            <a:off x="630936" y="4352544"/>
             <a:ext cx="822960" cy="182880"/>
           </a:xfrm>
           <a:prstGeom prst="rect">
@@ -4015,7 +3920,7 @@
             <a:r>
               <a:rPr lang="en-US" sz="850" dirty="0">
                 <a:solidFill>
-                  <a:srgbClr val="F5F1E6"/>
+                  <a:srgbClr val="F2EEE3"/>
                 </a:solidFill>
                 <a:latin typeface="Arial" pitchFamily="34" charset="0"/>
                 <a:ea typeface="Arial" pitchFamily="34" charset="-122"/>
@@ -4035,20 +3940,20 @@
         </p:nvSpPr>
         <p:spPr>
           <a:xfrm>
-            <a:off x="1636776" y="3913632"/>
-            <a:ext cx="1024128" cy="603504"/>
+            <a:off x="1636776" y="3986784"/>
+            <a:ext cx="1024128" cy="566928"/>
           </a:xfrm>
           <a:prstGeom prst="roundRect">
             <a:avLst>
-              <a:gd name="adj" fmla="val 18182"/>
+              <a:gd name="adj" fmla="val 19355"/>
             </a:avLst>
           </a:prstGeom>
           <a:solidFill>
-            <a:srgbClr val="C8E85C"/>
+            <a:srgbClr val="1E3320"/>
           </a:solidFill>
           <a:ln w="12700">
             <a:solidFill>
-              <a:srgbClr val="C8E85C"/>
+              <a:srgbClr val="1E3320"/>
             </a:solidFill>
             <a:prstDash val="solid"/>
           </a:ln>
@@ -4056,7 +3961,7 @@
       </p:sp>
       <p:pic>
         <p:nvPicPr>
-          <p:cNvPr id="11" name="Image 1" descr="/home/user/clipping/design-system/.preview/deck-assets/ico/registro-dark.png">    </p:cNvPr>
+          <p:cNvPr id="11" name="Image 1" descr="/home/user/clipping/design-system/.preview/deck-assets/ico/registro-acid.png">    </p:cNvPr>
           <p:cNvPicPr>
             <a:picLocks noChangeAspect="1"/>
           </p:cNvPicPr>
@@ -4070,8 +3975,8 @@
         </p:blipFill>
         <p:spPr>
           <a:xfrm>
-            <a:off x="1764792" y="4005072"/>
-            <a:ext cx="256032" cy="256032"/>
+            <a:off x="1764792" y="4059936"/>
+            <a:ext cx="237744" cy="237744"/>
           </a:xfrm>
           <a:prstGeom prst="rect">
             <a:avLst/>
@@ -4086,7 +3991,7 @@
         </p:nvSpPr>
         <p:spPr>
           <a:xfrm>
-            <a:off x="1764792" y="4334256"/>
+            <a:off x="1764792" y="4352544"/>
             <a:ext cx="822960" cy="182880"/>
           </a:xfrm>
           <a:prstGeom prst="rect">
@@ -4105,7 +4010,7 @@
             <a:r>
               <a:rPr lang="en-US" sz="850" dirty="0">
                 <a:solidFill>
-                  <a:srgbClr val="16331F"/>
+                  <a:srgbClr val="F2EEE3"/>
                 </a:solidFill>
                 <a:latin typeface="Arial" pitchFamily="34" charset="0"/>
                 <a:ea typeface="Arial" pitchFamily="34" charset="-122"/>
@@ -4125,20 +4030,20 @@
         </p:nvSpPr>
         <p:spPr>
           <a:xfrm>
-            <a:off x="2770632" y="3913632"/>
-            <a:ext cx="1024128" cy="603504"/>
+            <a:off x="2770632" y="3986784"/>
+            <a:ext cx="1024128" cy="566928"/>
           </a:xfrm>
           <a:prstGeom prst="roundRect">
             <a:avLst>
-              <a:gd name="adj" fmla="val 18182"/>
+              <a:gd name="adj" fmla="val 19355"/>
             </a:avLst>
           </a:prstGeom>
           <a:solidFill>
-            <a:srgbClr val="16331F"/>
+            <a:srgbClr val="1E3320"/>
           </a:solidFill>
           <a:ln w="12700">
             <a:solidFill>
-              <a:srgbClr val="16331F"/>
+              <a:srgbClr val="1E3320"/>
             </a:solidFill>
             <a:prstDash val="solid"/>
           </a:ln>
@@ -4160,8 +4065,8 @@
         </p:blipFill>
         <p:spPr>
           <a:xfrm>
-            <a:off x="2898648" y="4005072"/>
-            <a:ext cx="256032" cy="256032"/>
+            <a:off x="2898648" y="4059936"/>
+            <a:ext cx="237744" cy="237744"/>
           </a:xfrm>
           <a:prstGeom prst="rect">
             <a:avLst/>
@@ -4176,7 +4081,7 @@
         </p:nvSpPr>
         <p:spPr>
           <a:xfrm>
-            <a:off x="2898648" y="4334256"/>
+            <a:off x="2898648" y="4352544"/>
             <a:ext cx="822960" cy="182880"/>
           </a:xfrm>
           <a:prstGeom prst="rect">
@@ -4195,7 +4100,7 @@
             <a:r>
               <a:rPr lang="en-US" sz="850" dirty="0">
                 <a:solidFill>
-                  <a:srgbClr val="F5F1E6"/>
+                  <a:srgbClr val="F2EEE3"/>
                 </a:solidFill>
                 <a:latin typeface="Arial" pitchFamily="34" charset="0"/>
                 <a:ea typeface="Arial" pitchFamily="34" charset="-122"/>
@@ -4215,17 +4120,17 @@
         </p:nvSpPr>
         <p:spPr>
           <a:xfrm>
-            <a:off x="502920" y="4663440"/>
-            <a:ext cx="8138160" cy="201168"/>
-          </a:xfrm>
-          <a:prstGeom prst="rect">
-            <a:avLst/>
-          </a:prstGeom>
-          <a:noFill/>
-          <a:ln/>
-        </p:spPr>
-        <p:txBody>
-          <a:bodyPr wrap="square" lIns="0" tIns="0" rIns="0" bIns="0" rtlCol="0" anchor="ctr"/>
+            <a:off x="502920" y="4626864"/>
+            <a:ext cx="3200400" cy="310896"/>
+          </a:xfrm>
+          <a:prstGeom prst="rect">
+            <a:avLst/>
+          </a:prstGeom>
+          <a:noFill/>
+          <a:ln/>
+        </p:spPr>
+        <p:txBody>
+          <a:bodyPr wrap="square" lIns="0" tIns="0" rIns="0" bIns="0" rtlCol="0" anchor="t"/>
           <a:lstStyle/>
           <a:p>
             <a:pPr indent="0" marL="0">
@@ -4234,13 +4139,13 @@
             <a:r>
               <a:rPr lang="en-US" sz="750" dirty="0">
                 <a:solidFill>
-                  <a:srgbClr val="6E7A62"/>
-                </a:solidFill>
-                <a:latin typeface="Arial" pitchFamily="34" charset="0"/>
-                <a:ea typeface="Arial" pitchFamily="34" charset="-122"/>
-                <a:cs typeface="Arial" pitchFamily="34" charset="-120"/>
-              </a:rPr>
-              <a:t>carbono estável · Puro.earth · EBC · metano evitado em pilhas úmidas: metodologia Puro.earth (2025)</a:t>
+                  <a:srgbClr val="4A3320"/>
+                </a:solidFill>
+                <a:latin typeface="Arial" pitchFamily="34" charset="0"/>
+                <a:ea typeface="Arial" pitchFamily="34" charset="-122"/>
+                <a:cs typeface="Arial" pitchFamily="34" charset="-120"/>
+              </a:rPr>
+              <a:t>certificável em Puro.earth · EBC · metano evitado em pilhas úmidas: metodologia Puro.earth (2025)</a:t>
             </a:r>
             <a:endParaRPr lang="en-US" sz="750" dirty="0"/>
           </a:p>
@@ -4302,11 +4207,11 @@
             </a:avLst>
           </a:prstGeom>
           <a:solidFill>
-            <a:srgbClr val="16331F"/>
+            <a:srgbClr val="1E3320"/>
           </a:solidFill>
           <a:ln w="12700">
             <a:solidFill>
-              <a:srgbClr val="16331F"/>
+              <a:srgbClr val="1E3320"/>
             </a:solidFill>
             <a:prstDash val="solid"/>
           </a:ln>
@@ -4339,7 +4244,7 @@
             <a:r>
               <a:rPr lang="en-US" sz="900" b="1" spc="140" kern="0" dirty="0">
                 <a:solidFill>
-                  <a:srgbClr val="C8E85C"/>
+                  <a:srgbClr val="8FB04E"/>
                 </a:solidFill>
                 <a:latin typeface="Arial" pitchFamily="34" charset="0"/>
                 <a:ea typeface="Arial" pitchFamily="34" charset="-122"/>
@@ -4360,7 +4265,7 @@
         <p:spPr>
           <a:xfrm>
             <a:off x="502920" y="914400"/>
-            <a:ext cx="5120640" cy="396240"/>
+            <a:ext cx="5852160" cy="396240"/>
           </a:xfrm>
           <a:prstGeom prst="rect">
             <a:avLst/>
@@ -4381,13 +4286,13 @@
             <a:r>
               <a:rPr lang="en-US" sz="3000" b="1" spc="-140" kern="0" dirty="0">
                 <a:solidFill>
-                  <a:srgbClr val="16331F"/>
-                </a:solidFill>
-                <a:latin typeface="Arial" pitchFamily="34" charset="0"/>
-                <a:ea typeface="Arial" pitchFamily="34" charset="-122"/>
-                <a:cs typeface="Arial" pitchFamily="34" charset="-120"/>
-              </a:rPr>
-              <a:t>Conversa com o que já foi decidido.</a:t>
+                  <a:srgbClr val="1E3320"/>
+                </a:solidFill>
+                <a:latin typeface="Arial" pitchFamily="34" charset="0"/>
+                <a:ea typeface="Arial" pitchFamily="34" charset="-122"/>
+                <a:cs typeface="Arial" pitchFamily="34" charset="-120"/>
+              </a:rPr>
+              <a:t>As metas já estão publicadas.</a:t>
             </a:r>
             <a:endParaRPr lang="en-US" sz="3000" dirty="0"/>
           </a:p>
@@ -4401,20 +4306,20 @@
         </p:nvSpPr>
         <p:spPr>
           <a:xfrm>
-            <a:off x="502920" y="1627632"/>
-            <a:ext cx="1874520" cy="1170432"/>
+            <a:off x="502920" y="1700784"/>
+            <a:ext cx="1874520" cy="1133856"/>
           </a:xfrm>
           <a:prstGeom prst="roundRect">
             <a:avLst>
-              <a:gd name="adj" fmla="val 7813"/>
+              <a:gd name="adj" fmla="val 8065"/>
             </a:avLst>
           </a:prstGeom>
           <a:solidFill>
-            <a:srgbClr val="16331F"/>
+            <a:srgbClr val="1E3320"/>
           </a:solidFill>
           <a:ln w="12700">
             <a:solidFill>
-              <a:srgbClr val="16331F"/>
+              <a:srgbClr val="1E3320"/>
             </a:solidFill>
             <a:prstDash val="solid"/>
           </a:ln>
@@ -4436,8 +4341,8 @@
         </p:blipFill>
         <p:spPr>
           <a:xfrm>
-            <a:off x="667512" y="1755648"/>
-            <a:ext cx="256032" cy="256032"/>
+            <a:off x="667512" y="1828800"/>
+            <a:ext cx="237744" cy="237744"/>
           </a:xfrm>
           <a:prstGeom prst="rect">
             <a:avLst/>
@@ -4452,8 +4357,8 @@
         </p:nvSpPr>
         <p:spPr>
           <a:xfrm>
-            <a:off x="667512" y="2048256"/>
-            <a:ext cx="1645920" cy="441960"/>
+            <a:off x="667512" y="2103120"/>
+            <a:ext cx="1645920" cy="412496"/>
           </a:xfrm>
           <a:prstGeom prst="rect">
             <a:avLst/>
@@ -4469,9 +4374,9 @@
               <a:buNone/>
             </a:pPr>
             <a:r>
-              <a:rPr lang="en-US" sz="3000" b="1" spc="-180" kern="0" dirty="0">
-                <a:solidFill>
-                  <a:srgbClr val="C8E85C"/>
+              <a:rPr lang="en-US" sz="2800" b="1" spc="-180" kern="0" dirty="0">
+                <a:solidFill>
+                  <a:srgbClr val="8FB04E"/>
                 </a:solidFill>
                 <a:latin typeface="Arial" pitchFamily="34" charset="0"/>
                 <a:ea typeface="Arial" pitchFamily="34" charset="-122"/>
@@ -4479,7 +4384,7 @@
               </a:rPr>
               <a:t>−30%</a:t>
             </a:r>
-            <a:endParaRPr lang="en-US" sz="3000" dirty="0"/>
+            <a:endParaRPr lang="en-US" sz="2800" dirty="0"/>
           </a:p>
         </p:txBody>
       </p:sp>
@@ -4491,7 +4396,7 @@
         </p:nvSpPr>
         <p:spPr>
           <a:xfrm>
-            <a:off x="667512" y="2523744"/>
+            <a:off x="667512" y="2560320"/>
             <a:ext cx="1645920" cy="182880"/>
           </a:xfrm>
           <a:prstGeom prst="rect">
@@ -4510,7 +4415,7 @@
             <a:r>
               <a:rPr lang="en-US" sz="800" dirty="0">
                 <a:solidFill>
-                  <a:srgbClr val="F5F1E6"/>
+                  <a:srgbClr val="F2EEE3"/>
                 </a:solidFill>
                 <a:latin typeface="Arial" pitchFamily="34" charset="0"/>
                 <a:ea typeface="Arial" pitchFamily="34" charset="-122"/>
@@ -4530,20 +4435,20 @@
         </p:nvSpPr>
         <p:spPr>
           <a:xfrm>
-            <a:off x="2578608" y="1627632"/>
-            <a:ext cx="1874520" cy="1170432"/>
+            <a:off x="2578608" y="1700784"/>
+            <a:ext cx="1874520" cy="1133856"/>
           </a:xfrm>
           <a:prstGeom prst="roundRect">
             <a:avLst>
-              <a:gd name="adj" fmla="val 7813"/>
+              <a:gd name="adj" fmla="val 8065"/>
             </a:avLst>
           </a:prstGeom>
           <a:solidFill>
-            <a:srgbClr val="F5F1E6"/>
+            <a:srgbClr val="F4F2EC"/>
           </a:solidFill>
           <a:ln w="12700">
             <a:solidFill>
-              <a:srgbClr val="F5F1E6"/>
+              <a:srgbClr val="F4F2EC"/>
             </a:solidFill>
             <a:prstDash val="solid"/>
           </a:ln>
@@ -4565,8 +4470,8 @@
         </p:blipFill>
         <p:spPr>
           <a:xfrm>
-            <a:off x="2743200" y="1755648"/>
-            <a:ext cx="256032" cy="256032"/>
+            <a:off x="2743200" y="1828800"/>
+            <a:ext cx="237744" cy="237744"/>
           </a:xfrm>
           <a:prstGeom prst="rect">
             <a:avLst/>
@@ -4581,8 +4486,8 @@
         </p:nvSpPr>
         <p:spPr>
           <a:xfrm>
-            <a:off x="2743200" y="2048256"/>
-            <a:ext cx="1645920" cy="441960"/>
+            <a:off x="2743200" y="2103120"/>
+            <a:ext cx="1645920" cy="412496"/>
           </a:xfrm>
           <a:prstGeom prst="rect">
             <a:avLst/>
@@ -4598,9 +4503,9 @@
               <a:buNone/>
             </a:pPr>
             <a:r>
-              <a:rPr lang="en-US" sz="3000" b="1" spc="-180" kern="0" dirty="0">
-                <a:solidFill>
-                  <a:srgbClr val="16331F"/>
+              <a:rPr lang="en-US" sz="2800" b="1" spc="-180" kern="0" dirty="0">
+                <a:solidFill>
+                  <a:srgbClr val="1E3320"/>
                 </a:solidFill>
                 <a:latin typeface="Arial" pitchFamily="34" charset="0"/>
                 <a:ea typeface="Arial" pitchFamily="34" charset="-122"/>
@@ -4608,7 +4513,7 @@
               </a:rPr>
               <a:t>10 mi</a:t>
             </a:r>
-            <a:endParaRPr lang="en-US" sz="3000" dirty="0"/>
+            <a:endParaRPr lang="en-US" sz="2800" dirty="0"/>
           </a:p>
         </p:txBody>
       </p:sp>
@@ -4620,7 +4525,7 @@
         </p:nvSpPr>
         <p:spPr>
           <a:xfrm>
-            <a:off x="2743200" y="2523744"/>
+            <a:off x="2743200" y="2560320"/>
             <a:ext cx="1645920" cy="182880"/>
           </a:xfrm>
           <a:prstGeom prst="rect">
@@ -4639,7 +4544,7 @@
             <a:r>
               <a:rPr lang="en-US" sz="800" dirty="0">
                 <a:solidFill>
-                  <a:srgbClr val="8A5A34"/>
+                  <a:srgbClr val="4A3320"/>
                 </a:solidFill>
                 <a:latin typeface="Arial" pitchFamily="34" charset="0"/>
                 <a:ea typeface="Arial" pitchFamily="34" charset="-122"/>
@@ -4659,20 +4564,20 @@
         </p:nvSpPr>
         <p:spPr>
           <a:xfrm>
-            <a:off x="4654296" y="1627632"/>
-            <a:ext cx="1874520" cy="1170432"/>
+            <a:off x="4654296" y="1700784"/>
+            <a:ext cx="1874520" cy="1133856"/>
           </a:xfrm>
           <a:prstGeom prst="roundRect">
             <a:avLst>
-              <a:gd name="adj" fmla="val 7813"/>
+              <a:gd name="adj" fmla="val 8065"/>
             </a:avLst>
           </a:prstGeom>
           <a:solidFill>
-            <a:srgbClr val="F5F1E6"/>
+            <a:srgbClr val="F4F2EC"/>
           </a:solidFill>
           <a:ln w="12700">
             <a:solidFill>
-              <a:srgbClr val="F5F1E6"/>
+              <a:srgbClr val="F4F2EC"/>
             </a:solidFill>
             <a:prstDash val="solid"/>
           </a:ln>
@@ -4694,8 +4599,8 @@
         </p:blipFill>
         <p:spPr>
           <a:xfrm>
-            <a:off x="4818888" y="1755648"/>
-            <a:ext cx="256032" cy="256032"/>
+            <a:off x="4818888" y="1828800"/>
+            <a:ext cx="237744" cy="237744"/>
           </a:xfrm>
           <a:prstGeom prst="rect">
             <a:avLst/>
@@ -4710,8 +4615,8 @@
         </p:nvSpPr>
         <p:spPr>
           <a:xfrm>
-            <a:off x="4818888" y="2048256"/>
-            <a:ext cx="1645920" cy="441960"/>
+            <a:off x="4818888" y="2103120"/>
+            <a:ext cx="1645920" cy="412496"/>
           </a:xfrm>
           <a:prstGeom prst="rect">
             <a:avLst/>
@@ -4727,9 +4632,9 @@
               <a:buNone/>
             </a:pPr>
             <a:r>
-              <a:rPr lang="en-US" sz="3000" b="1" spc="-180" kern="0" dirty="0">
-                <a:solidFill>
-                  <a:srgbClr val="16331F"/>
+              <a:rPr lang="en-US" sz="2800" b="1" spc="-180" kern="0" dirty="0">
+                <a:solidFill>
+                  <a:srgbClr val="1E3320"/>
                 </a:solidFill>
                 <a:latin typeface="Arial" pitchFamily="34" charset="0"/>
                 <a:ea typeface="Arial" pitchFamily="34" charset="-122"/>
@@ -4737,7 +4642,7 @@
               </a:rPr>
               <a:t>−42%</a:t>
             </a:r>
-            <a:endParaRPr lang="en-US" sz="3000" dirty="0"/>
+            <a:endParaRPr lang="en-US" sz="2800" dirty="0"/>
           </a:p>
         </p:txBody>
       </p:sp>
@@ -4749,7 +4654,7 @@
         </p:nvSpPr>
         <p:spPr>
           <a:xfrm>
-            <a:off x="4818888" y="2523744"/>
+            <a:off x="4818888" y="2560320"/>
             <a:ext cx="1645920" cy="182880"/>
           </a:xfrm>
           <a:prstGeom prst="rect">
@@ -4768,7 +4673,7 @@
             <a:r>
               <a:rPr lang="en-US" sz="800" dirty="0">
                 <a:solidFill>
-                  <a:srgbClr val="8A5A34"/>
+                  <a:srgbClr val="4A3320"/>
                 </a:solidFill>
                 <a:latin typeface="Arial" pitchFamily="34" charset="0"/>
                 <a:ea typeface="Arial" pitchFamily="34" charset="-122"/>
@@ -4788,20 +4693,20 @@
         </p:nvSpPr>
         <p:spPr>
           <a:xfrm>
-            <a:off x="6729984" y="1627632"/>
-            <a:ext cx="1874520" cy="1170432"/>
+            <a:off x="6729984" y="1700784"/>
+            <a:ext cx="1874520" cy="1133856"/>
           </a:xfrm>
           <a:prstGeom prst="roundRect">
             <a:avLst>
-              <a:gd name="adj" fmla="val 7813"/>
+              <a:gd name="adj" fmla="val 8065"/>
             </a:avLst>
           </a:prstGeom>
           <a:solidFill>
-            <a:srgbClr val="F5F1E6"/>
+            <a:srgbClr val="F4F2EC"/>
           </a:solidFill>
           <a:ln w="12700">
             <a:solidFill>
-              <a:srgbClr val="F5F1E6"/>
+              <a:srgbClr val="F4F2EC"/>
             </a:solidFill>
             <a:prstDash val="solid"/>
           </a:ln>
@@ -4823,8 +4728,8 @@
         </p:blipFill>
         <p:spPr>
           <a:xfrm>
-            <a:off x="6894576" y="1755648"/>
-            <a:ext cx="256032" cy="256032"/>
+            <a:off x="6894576" y="1828800"/>
+            <a:ext cx="237744" cy="237744"/>
           </a:xfrm>
           <a:prstGeom prst="rect">
             <a:avLst/>
@@ -4839,8 +4744,8 @@
         </p:nvSpPr>
         <p:spPr>
           <a:xfrm>
-            <a:off x="6894576" y="2048256"/>
-            <a:ext cx="1645920" cy="441960"/>
+            <a:off x="6894576" y="2103120"/>
+            <a:ext cx="1645920" cy="412496"/>
           </a:xfrm>
           <a:prstGeom prst="rect">
             <a:avLst/>
@@ -4856,9 +4761,9 @@
               <a:buNone/>
             </a:pPr>
             <a:r>
-              <a:rPr lang="en-US" sz="3000" b="1" spc="-180" kern="0" dirty="0">
-                <a:solidFill>
-                  <a:srgbClr val="16331F"/>
+              <a:rPr lang="en-US" sz="2800" b="1" spc="-180" kern="0" dirty="0">
+                <a:solidFill>
+                  <a:srgbClr val="1E3320"/>
                 </a:solidFill>
                 <a:latin typeface="Arial" pitchFamily="34" charset="0"/>
                 <a:ea typeface="Arial" pitchFamily="34" charset="-122"/>
@@ -4866,7 +4771,7 @@
               </a:rPr>
               <a:t>2050</a:t>
             </a:r>
-            <a:endParaRPr lang="en-US" sz="3000" dirty="0"/>
+            <a:endParaRPr lang="en-US" sz="2800" dirty="0"/>
           </a:p>
         </p:txBody>
       </p:sp>
@@ -4878,7 +4783,7 @@
         </p:nvSpPr>
         <p:spPr>
           <a:xfrm>
-            <a:off x="6894576" y="2523744"/>
+            <a:off x="6894576" y="2560320"/>
             <a:ext cx="1645920" cy="182880"/>
           </a:xfrm>
           <a:prstGeom prst="rect">
@@ -4897,7 +4802,7 @@
             <a:r>
               <a:rPr lang="en-US" sz="800" dirty="0">
                 <a:solidFill>
-                  <a:srgbClr val="8A5A34"/>
+                  <a:srgbClr val="4A3320"/>
                 </a:solidFill>
                 <a:latin typeface="Arial" pitchFamily="34" charset="0"/>
                 <a:ea typeface="Arial" pitchFamily="34" charset="-122"/>
@@ -4917,20 +4822,20 @@
         </p:nvSpPr>
         <p:spPr>
           <a:xfrm>
-            <a:off x="502920" y="3072384"/>
-            <a:ext cx="8138160" cy="841248"/>
+            <a:off x="502920" y="2980944"/>
+            <a:ext cx="8138160" cy="822960"/>
           </a:xfrm>
           <a:prstGeom prst="roundRect">
             <a:avLst>
-              <a:gd name="adj" fmla="val 10870"/>
+              <a:gd name="adj" fmla="val 11111"/>
             </a:avLst>
           </a:prstGeom>
           <a:solidFill>
-            <a:srgbClr val="C8E85C"/>
+            <a:srgbClr val="1E3320"/>
           </a:solidFill>
           <a:ln w="12700">
             <a:solidFill>
-              <a:srgbClr val="C8E85C"/>
+              <a:srgbClr val="1E3320"/>
             </a:solidFill>
             <a:prstDash val="solid"/>
           </a:ln>
@@ -4938,7 +4843,7 @@
       </p:sp>
       <p:pic>
         <p:nvPicPr>
-          <p:cNvPr id="22" name="Image 4" descr="/home/user/clipping/design-system/.preview/deck-assets/ico/muda-dark.png">    </p:cNvPr>
+          <p:cNvPr id="22" name="Image 4" descr="/home/user/clipping/design-system/.preview/deck-assets/ico/muda-acid.png">    </p:cNvPr>
           <p:cNvPicPr>
             <a:picLocks noChangeAspect="1"/>
           </p:cNvPicPr>
@@ -4952,8 +4857,8 @@
         </p:blipFill>
         <p:spPr>
           <a:xfrm>
-            <a:off x="731520" y="3291840"/>
-            <a:ext cx="402336" cy="402336"/>
+            <a:off x="731520" y="3182112"/>
+            <a:ext cx="384048" cy="384048"/>
           </a:xfrm>
           <a:prstGeom prst="rect">
             <a:avLst/>
@@ -4968,8 +4873,8 @@
         </p:nvSpPr>
         <p:spPr>
           <a:xfrm>
-            <a:off x="1298448" y="3182112"/>
-            <a:ext cx="2103120" cy="500888"/>
+            <a:off x="1298448" y="3090672"/>
+            <a:ext cx="2103120" cy="471424"/>
           </a:xfrm>
           <a:prstGeom prst="rect">
             <a:avLst/>
@@ -4985,9 +4890,9 @@
               <a:buNone/>
             </a:pPr>
             <a:r>
-              <a:rPr lang="en-US" sz="3400" b="1" spc="-180" kern="0" dirty="0">
-                <a:solidFill>
-                  <a:srgbClr val="16331F"/>
+              <a:rPr lang="en-US" sz="3200" b="1" spc="-180" kern="0" dirty="0">
+                <a:solidFill>
+                  <a:srgbClr val="8FB04E"/>
                 </a:solidFill>
                 <a:latin typeface="Arial" pitchFamily="34" charset="0"/>
                 <a:ea typeface="Arial" pitchFamily="34" charset="-122"/>
@@ -4995,7 +4900,7 @@
               </a:rPr>
               <a:t>+42 p.p.</a:t>
             </a:r>
-            <a:endParaRPr lang="en-US" sz="3400" dirty="0"/>
+            <a:endParaRPr lang="en-US" sz="3200" dirty="0"/>
           </a:p>
         </p:txBody>
       </p:sp>
@@ -5007,7 +4912,7 @@
         </p:nvSpPr>
         <p:spPr>
           <a:xfrm>
-            <a:off x="3493008" y="3346704"/>
+            <a:off x="3456432" y="3255264"/>
             <a:ext cx="4937760" cy="182880"/>
           </a:xfrm>
           <a:prstGeom prst="rect">
@@ -5026,7 +4931,7 @@
             <a:r>
               <a:rPr lang="en-US" sz="1200" dirty="0">
                 <a:solidFill>
-                  <a:srgbClr val="16331F"/>
+                  <a:srgbClr val="F2EEE3"/>
                 </a:solidFill>
                 <a:latin typeface="Arial" pitchFamily="34" charset="0"/>
                 <a:ea typeface="Arial" pitchFamily="34" charset="-122"/>
@@ -5046,8 +4951,8 @@
         </p:nvSpPr>
         <p:spPr>
           <a:xfrm>
-            <a:off x="685800" y="4443984"/>
-            <a:ext cx="7772400" cy="201168"/>
+            <a:off x="502920" y="4005072"/>
+            <a:ext cx="8138160" cy="201168"/>
           </a:xfrm>
           <a:prstGeom prst="rect">
             <a:avLst/>
@@ -5063,9 +4968,9 @@
               <a:buNone/>
             </a:pPr>
             <a:r>
-              <a:rPr lang="en-US" sz="750" b="1" dirty="0">
-                <a:solidFill>
-                  <a:srgbClr val="16331F"/>
+              <a:rPr lang="en-US" sz="750" dirty="0">
+                <a:solidFill>
+                  <a:srgbClr val="4A3320"/>
                 </a:solidFill>
                 <a:latin typeface="Arial" pitchFamily="34" charset="0"/>
                 <a:ea typeface="Arial" pitchFamily="34" charset="-122"/>
@@ -5125,7 +5030,7 @@
         <p:spPr>
           <a:xfrm>
             <a:off x="502920" y="457200"/>
-            <a:ext cx="1920240" cy="274320"/>
+            <a:ext cx="1737360" cy="274320"/>
           </a:xfrm>
           <a:prstGeom prst="roundRect">
             <a:avLst>
@@ -5133,11 +5038,11 @@
             </a:avLst>
           </a:prstGeom>
           <a:solidFill>
-            <a:srgbClr val="C8E85C"/>
+            <a:srgbClr val="8FB04E"/>
           </a:solidFill>
           <a:ln w="12700">
             <a:solidFill>
-              <a:srgbClr val="C8E85C"/>
+              <a:srgbClr val="8FB04E"/>
             </a:solidFill>
             <a:prstDash val="solid"/>
           </a:ln>
@@ -5152,7 +5057,7 @@
         <p:spPr>
           <a:xfrm>
             <a:off x="502920" y="457200"/>
-            <a:ext cx="1920240" cy="274320"/>
+            <a:ext cx="1737360" cy="274320"/>
           </a:xfrm>
           <a:prstGeom prst="rect">
             <a:avLst/>
@@ -5170,13 +5075,13 @@
             <a:r>
               <a:rPr lang="en-US" sz="900" b="1" spc="140" kern="0" dirty="0">
                 <a:solidFill>
-                  <a:srgbClr val="16331F"/>
-                </a:solidFill>
-                <a:latin typeface="Arial" pitchFamily="34" charset="0"/>
-                <a:ea typeface="Arial" pitchFamily="34" charset="-122"/>
-                <a:cs typeface="Arial" pitchFamily="34" charset="-120"/>
-              </a:rPr>
-              <a:t>AS TRÊS CONDIÇÕES</a:t>
+                  <a:srgbClr val="0C0C0B"/>
+                </a:solidFill>
+                <a:latin typeface="Arial" pitchFamily="34" charset="0"/>
+                <a:ea typeface="Arial" pitchFamily="34" charset="-122"/>
+                <a:cs typeface="Arial" pitchFamily="34" charset="-120"/>
+              </a:rPr>
+              <a:t>PRÓXIMO PASSO</a:t>
             </a:r>
             <a:endParaRPr lang="en-US" sz="900" dirty="0"/>
           </a:p>
@@ -5191,7 +5096,7 @@
         <p:spPr>
           <a:xfrm>
             <a:off x="502920" y="932688"/>
-            <a:ext cx="5852160" cy="475488"/>
+            <a:ext cx="5852160" cy="449072"/>
           </a:xfrm>
           <a:prstGeom prst="rect">
             <a:avLst/>
@@ -5205,14 +5110,14 @@
           <a:p>
             <a:pPr indent="0" marL="0">
               <a:lnSpc>
-                <a:spcPts val="3744"/>
+                <a:spcPts val="3536"/>
               </a:lnSpc>
               <a:buNone/>
             </a:pPr>
             <a:r>
-              <a:rPr lang="en-US" sz="3600" b="1" spc="-140" kern="0" dirty="0">
-                <a:solidFill>
-                  <a:srgbClr val="F5F1E6"/>
+              <a:rPr lang="en-US" sz="3400" b="1" spc="-140" kern="0" dirty="0">
+                <a:solidFill>
+                  <a:srgbClr val="FFFFFF"/>
                 </a:solidFill>
                 <a:latin typeface="Arial" pitchFamily="34" charset="0"/>
                 <a:ea typeface="Arial" pitchFamily="34" charset="-122"/>
@@ -5220,7 +5125,7 @@
               </a:rPr>
               <a:t>O que precisa ser verdade.</a:t>
             </a:r>
-            <a:endParaRPr lang="en-US" sz="3600" dirty="0"/>
+            <a:endParaRPr lang="en-US" sz="3400" dirty="0"/>
           </a:p>
         </p:txBody>
       </p:sp>
@@ -5232,20 +5137,20 @@
         </p:nvSpPr>
         <p:spPr>
           <a:xfrm>
-            <a:off x="502920" y="1956816"/>
-            <a:ext cx="2615184" cy="1773936"/>
+            <a:off x="502920" y="1847088"/>
+            <a:ext cx="2615184" cy="1481328"/>
           </a:xfrm>
           <a:prstGeom prst="roundRect">
             <a:avLst>
-              <a:gd name="adj" fmla="val 4639"/>
+              <a:gd name="adj" fmla="val 5556"/>
             </a:avLst>
           </a:prstGeom>
           <a:solidFill>
-            <a:srgbClr val="16331F"/>
+            <a:srgbClr val="1B1C1A"/>
           </a:solidFill>
           <a:ln w="12700">
             <a:solidFill>
-              <a:srgbClr val="16331F"/>
+              <a:srgbClr val="1B1C1A"/>
             </a:solidFill>
             <a:prstDash val="solid"/>
           </a:ln>
@@ -5259,18 +5164,18 @@
         </p:nvSpPr>
         <p:spPr>
           <a:xfrm>
-            <a:off x="685800" y="2121408"/>
-            <a:ext cx="548640" cy="548640"/>
+            <a:off x="704088" y="1993392"/>
+            <a:ext cx="512064" cy="512064"/>
           </a:xfrm>
           <a:prstGeom prst="ellipse">
             <a:avLst/>
           </a:prstGeom>
           <a:solidFill>
-            <a:srgbClr val="C8E85C"/>
+            <a:srgbClr val="1E3320"/>
           </a:solidFill>
           <a:ln w="12700">
             <a:solidFill>
-              <a:srgbClr val="C8E85C"/>
+              <a:srgbClr val="1E3320"/>
             </a:solidFill>
             <a:prstDash val="solid"/>
           </a:ln>
@@ -5278,7 +5183,7 @@
       </p:sp>
       <p:pic>
         <p:nvPicPr>
-          <p:cNvPr id="7" name="Image 0" descr="/home/user/clipping/design-system/.preview/deck-assets/ico/pilha-dark.png">    </p:cNvPr>
+          <p:cNvPr id="7" name="Image 0" descr="/home/user/clipping/design-system/.preview/deck-assets/ico/pilha-acid.png">    </p:cNvPr>
           <p:cNvPicPr>
             <a:picLocks noChangeAspect="1"/>
           </p:cNvPicPr>
@@ -5292,8 +5197,8 @@
         </p:blipFill>
         <p:spPr>
           <a:xfrm>
-            <a:off x="806501" y="2242109"/>
-            <a:ext cx="307238" cy="307238"/>
+            <a:off x="816742" y="2106046"/>
+            <a:ext cx="286756" cy="286756"/>
           </a:xfrm>
           <a:prstGeom prst="rect">
             <a:avLst/>
@@ -5308,8 +5213,8 @@
         </p:nvSpPr>
         <p:spPr>
           <a:xfrm>
-            <a:off x="1435608" y="2194560"/>
-            <a:ext cx="731520" cy="383032"/>
+            <a:off x="1417320" y="2066544"/>
+            <a:ext cx="731520" cy="353568"/>
           </a:xfrm>
           <a:prstGeom prst="rect">
             <a:avLst/>
@@ -5325,9 +5230,9 @@
               <a:buNone/>
             </a:pPr>
             <a:r>
-              <a:rPr lang="en-US" sz="2600" b="1" spc="-180" kern="0" dirty="0">
-                <a:solidFill>
-                  <a:srgbClr val="C8E85C"/>
+              <a:rPr lang="en-US" sz="2400" b="1" spc="-180" kern="0" dirty="0">
+                <a:solidFill>
+                  <a:srgbClr val="8FB04E"/>
                 </a:solidFill>
                 <a:latin typeface="Arial" pitchFamily="34" charset="0"/>
                 <a:ea typeface="Arial" pitchFamily="34" charset="-122"/>
@@ -5335,7 +5240,7 @@
               </a:rPr>
               <a:t>01</a:t>
             </a:r>
-            <a:endParaRPr lang="en-US" sz="2600" dirty="0"/>
+            <a:endParaRPr lang="en-US" sz="2400" dirty="0"/>
           </a:p>
         </p:txBody>
       </p:sp>
@@ -5347,8 +5252,8 @@
         </p:nvSpPr>
         <p:spPr>
           <a:xfrm>
-            <a:off x="740664" y="2834640"/>
-            <a:ext cx="2139696" cy="420624"/>
+            <a:off x="740664" y="2633472"/>
+            <a:ext cx="2139696" cy="292608"/>
           </a:xfrm>
           <a:prstGeom prst="rect">
             <a:avLst/>
@@ -5364,9 +5269,9 @@
               <a:buNone/>
             </a:pPr>
             <a:r>
-              <a:rPr lang="en-US" sz="1700" b="1" spc="-60" kern="0" dirty="0">
-                <a:solidFill>
-                  <a:srgbClr val="F5F1E6"/>
+              <a:rPr lang="en-US" sz="1600" b="1" spc="-60" kern="0" dirty="0">
+                <a:solidFill>
+                  <a:srgbClr val="FFFFFF"/>
                 </a:solidFill>
                 <a:latin typeface="Arial" pitchFamily="34" charset="0"/>
                 <a:ea typeface="Arial" pitchFamily="34" charset="-122"/>
@@ -5374,7 +5279,7 @@
               </a:rPr>
               <a:t>biomassa regular</a:t>
             </a:r>
-            <a:endParaRPr lang="en-US" sz="1700" dirty="0"/>
+            <a:endParaRPr lang="en-US" sz="1600" dirty="0"/>
           </a:p>
         </p:txBody>
       </p:sp>
@@ -5386,7 +5291,7 @@
         </p:nvSpPr>
         <p:spPr>
           <a:xfrm>
-            <a:off x="740664" y="3364992"/>
+            <a:off x="740664" y="2999232"/>
             <a:ext cx="2139696" cy="182880"/>
           </a:xfrm>
           <a:prstGeom prst="rect">
@@ -5405,7 +5310,7 @@
             <a:r>
               <a:rPr lang="en-US" sz="900" dirty="0">
                 <a:solidFill>
-                  <a:srgbClr val="C8E85C"/>
+                  <a:srgbClr val="AEB7B9"/>
                 </a:solidFill>
                 <a:latin typeface="Arial" pitchFamily="34" charset="0"/>
                 <a:ea typeface="Arial" pitchFamily="34" charset="-122"/>
@@ -5425,20 +5330,20 @@
         </p:nvSpPr>
         <p:spPr>
           <a:xfrm>
-            <a:off x="3264408" y="1956816"/>
-            <a:ext cx="2615184" cy="1773936"/>
+            <a:off x="3264408" y="1847088"/>
+            <a:ext cx="2615184" cy="1481328"/>
           </a:xfrm>
           <a:prstGeom prst="roundRect">
             <a:avLst>
-              <a:gd name="adj" fmla="val 4639"/>
+              <a:gd name="adj" fmla="val 5556"/>
             </a:avLst>
           </a:prstGeom>
           <a:solidFill>
-            <a:srgbClr val="C8E85C"/>
+            <a:srgbClr val="1B1C1A"/>
           </a:solidFill>
           <a:ln w="12700">
             <a:solidFill>
-              <a:srgbClr val="C8E85C"/>
+              <a:srgbClr val="1B1C1A"/>
             </a:solidFill>
             <a:prstDash val="solid"/>
           </a:ln>
@@ -5452,18 +5357,18 @@
         </p:nvSpPr>
         <p:spPr>
           <a:xfrm>
-            <a:off x="3447288" y="2121408"/>
-            <a:ext cx="548640" cy="548640"/>
+            <a:off x="3465576" y="1993392"/>
+            <a:ext cx="512064" cy="512064"/>
           </a:xfrm>
           <a:prstGeom prst="ellipse">
             <a:avLst/>
           </a:prstGeom>
           <a:solidFill>
-            <a:srgbClr val="16331F"/>
+            <a:srgbClr val="1E3320"/>
           </a:solidFill>
           <a:ln w="12700">
             <a:solidFill>
-              <a:srgbClr val="16331F"/>
+              <a:srgbClr val="1E3320"/>
             </a:solidFill>
             <a:prstDash val="solid"/>
           </a:ln>
@@ -5485,8 +5390,8 @@
         </p:blipFill>
         <p:spPr>
           <a:xfrm>
-            <a:off x="3567989" y="2242109"/>
-            <a:ext cx="307238" cy="307238"/>
+            <a:off x="3578230" y="2106046"/>
+            <a:ext cx="286756" cy="286756"/>
           </a:xfrm>
           <a:prstGeom prst="rect">
             <a:avLst/>
@@ -5501,8 +5406,8 @@
         </p:nvSpPr>
         <p:spPr>
           <a:xfrm>
-            <a:off x="4197096" y="2194560"/>
-            <a:ext cx="731520" cy="383032"/>
+            <a:off x="4178808" y="2066544"/>
+            <a:ext cx="731520" cy="353568"/>
           </a:xfrm>
           <a:prstGeom prst="rect">
             <a:avLst/>
@@ -5518,9 +5423,9 @@
               <a:buNone/>
             </a:pPr>
             <a:r>
-              <a:rPr lang="en-US" sz="2600" b="1" spc="-180" kern="0" dirty="0">
-                <a:solidFill>
-                  <a:srgbClr val="16331F"/>
+              <a:rPr lang="en-US" sz="2400" b="1" spc="-180" kern="0" dirty="0">
+                <a:solidFill>
+                  <a:srgbClr val="8FB04E"/>
                 </a:solidFill>
                 <a:latin typeface="Arial" pitchFamily="34" charset="0"/>
                 <a:ea typeface="Arial" pitchFamily="34" charset="-122"/>
@@ -5528,7 +5433,7 @@
               </a:rPr>
               <a:t>02</a:t>
             </a:r>
-            <a:endParaRPr lang="en-US" sz="2600" dirty="0"/>
+            <a:endParaRPr lang="en-US" sz="2400" dirty="0"/>
           </a:p>
         </p:txBody>
       </p:sp>
@@ -5540,8 +5445,8 @@
         </p:nvSpPr>
         <p:spPr>
           <a:xfrm>
-            <a:off x="3502152" y="2834640"/>
-            <a:ext cx="2139696" cy="420624"/>
+            <a:off x="3502152" y="2633472"/>
+            <a:ext cx="2139696" cy="292608"/>
           </a:xfrm>
           <a:prstGeom prst="rect">
             <a:avLst/>
@@ -5557,9 +5462,9 @@
               <a:buNone/>
             </a:pPr>
             <a:r>
-              <a:rPr lang="en-US" sz="1700" b="1" spc="-60" kern="0" dirty="0">
-                <a:solidFill>
-                  <a:srgbClr val="16331F"/>
+              <a:rPr lang="en-US" sz="1600" b="1" spc="-60" kern="0" dirty="0">
+                <a:solidFill>
+                  <a:srgbClr val="FFFFFF"/>
                 </a:solidFill>
                 <a:latin typeface="Arial" pitchFamily="34" charset="0"/>
                 <a:ea typeface="Arial" pitchFamily="34" charset="-122"/>
@@ -5567,7 +5472,7 @@
               </a:rPr>
               <a:t>espaço na rotina</a:t>
             </a:r>
-            <a:endParaRPr lang="en-US" sz="1700" dirty="0"/>
+            <a:endParaRPr lang="en-US" sz="1600" dirty="0"/>
           </a:p>
         </p:txBody>
       </p:sp>
@@ -5579,7 +5484,7 @@
         </p:nvSpPr>
         <p:spPr>
           <a:xfrm>
-            <a:off x="3502152" y="3364992"/>
+            <a:off x="3502152" y="2999232"/>
             <a:ext cx="2139696" cy="182880"/>
           </a:xfrm>
           <a:prstGeom prst="rect">
@@ -5598,7 +5503,7 @@
             <a:r>
               <a:rPr lang="en-US" sz="900" dirty="0">
                 <a:solidFill>
-                  <a:srgbClr val="16331F"/>
+                  <a:srgbClr val="AEB7B9"/>
                 </a:solidFill>
                 <a:latin typeface="Arial" pitchFamily="34" charset="0"/>
                 <a:ea typeface="Arial" pitchFamily="34" charset="-122"/>
@@ -5618,20 +5523,20 @@
         </p:nvSpPr>
         <p:spPr>
           <a:xfrm>
-            <a:off x="6025896" y="1956816"/>
-            <a:ext cx="2615184" cy="1773936"/>
+            <a:off x="6025896" y="1847088"/>
+            <a:ext cx="2615184" cy="1481328"/>
           </a:xfrm>
           <a:prstGeom prst="roundRect">
             <a:avLst>
-              <a:gd name="adj" fmla="val 4639"/>
+              <a:gd name="adj" fmla="val 5556"/>
             </a:avLst>
           </a:prstGeom>
           <a:solidFill>
-            <a:srgbClr val="16331F"/>
+            <a:srgbClr val="1B1C1A"/>
           </a:solidFill>
           <a:ln w="12700">
             <a:solidFill>
-              <a:srgbClr val="16331F"/>
+              <a:srgbClr val="1B1C1A"/>
             </a:solidFill>
             <a:prstDash val="solid"/>
           </a:ln>
@@ -5645,18 +5550,18 @@
         </p:nvSpPr>
         <p:spPr>
           <a:xfrm>
-            <a:off x="6208776" y="2121408"/>
-            <a:ext cx="548640" cy="548640"/>
+            <a:off x="6227064" y="1993392"/>
+            <a:ext cx="512064" cy="512064"/>
           </a:xfrm>
           <a:prstGeom prst="ellipse">
             <a:avLst/>
           </a:prstGeom>
           <a:solidFill>
-            <a:srgbClr val="C8E85C"/>
+            <a:srgbClr val="1E3320"/>
           </a:solidFill>
           <a:ln w="12700">
             <a:solidFill>
-              <a:srgbClr val="C8E85C"/>
+              <a:srgbClr val="1E3320"/>
             </a:solidFill>
             <a:prstDash val="solid"/>
           </a:ln>
@@ -5664,7 +5569,7 @@
       </p:sp>
       <p:pic>
         <p:nvPicPr>
-          <p:cNvPr id="19" name="Image 2" descr="/home/user/clipping/design-system/.preview/deck-assets/ico/solo-dark.png">    </p:cNvPr>
+          <p:cNvPr id="19" name="Image 2" descr="/home/user/clipping/design-system/.preview/deck-assets/ico/solo-acid.png">    </p:cNvPr>
           <p:cNvPicPr>
             <a:picLocks noChangeAspect="1"/>
           </p:cNvPicPr>
@@ -5678,8 +5583,8 @@
         </p:blipFill>
         <p:spPr>
           <a:xfrm>
-            <a:off x="6329477" y="2242109"/>
-            <a:ext cx="307238" cy="307238"/>
+            <a:off x="6339718" y="2106046"/>
+            <a:ext cx="286756" cy="286756"/>
           </a:xfrm>
           <a:prstGeom prst="rect">
             <a:avLst/>
@@ -5694,8 +5599,8 @@
         </p:nvSpPr>
         <p:spPr>
           <a:xfrm>
-            <a:off x="6958584" y="2194560"/>
-            <a:ext cx="731520" cy="383032"/>
+            <a:off x="6940296" y="2066544"/>
+            <a:ext cx="731520" cy="353568"/>
           </a:xfrm>
           <a:prstGeom prst="rect">
             <a:avLst/>
@@ -5711,9 +5616,9 @@
               <a:buNone/>
             </a:pPr>
             <a:r>
-              <a:rPr lang="en-US" sz="2600" b="1" spc="-180" kern="0" dirty="0">
-                <a:solidFill>
-                  <a:srgbClr val="C8E85C"/>
+              <a:rPr lang="en-US" sz="2400" b="1" spc="-180" kern="0" dirty="0">
+                <a:solidFill>
+                  <a:srgbClr val="8FB04E"/>
                 </a:solidFill>
                 <a:latin typeface="Arial" pitchFamily="34" charset="0"/>
                 <a:ea typeface="Arial" pitchFamily="34" charset="-122"/>
@@ -5721,7 +5626,7 @@
               </a:rPr>
               <a:t>03</a:t>
             </a:r>
-            <a:endParaRPr lang="en-US" sz="2600" dirty="0"/>
+            <a:endParaRPr lang="en-US" sz="2400" dirty="0"/>
           </a:p>
         </p:txBody>
       </p:sp>
@@ -5733,8 +5638,8 @@
         </p:nvSpPr>
         <p:spPr>
           <a:xfrm>
-            <a:off x="6263640" y="2834640"/>
-            <a:ext cx="2139696" cy="420624"/>
+            <a:off x="6263640" y="2633472"/>
+            <a:ext cx="2139696" cy="292608"/>
           </a:xfrm>
           <a:prstGeom prst="rect">
             <a:avLst/>
@@ -5750,9 +5655,9 @@
               <a:buNone/>
             </a:pPr>
             <a:r>
-              <a:rPr lang="en-US" sz="1700" b="1" spc="-60" kern="0" dirty="0">
-                <a:solidFill>
-                  <a:srgbClr val="F5F1E6"/>
+              <a:rPr lang="en-US" sz="1600" b="1" spc="-60" kern="0" dirty="0">
+                <a:solidFill>
+                  <a:srgbClr val="FFFFFF"/>
                 </a:solidFill>
                 <a:latin typeface="Arial" pitchFamily="34" charset="0"/>
                 <a:ea typeface="Arial" pitchFamily="34" charset="-122"/>
@@ -5760,20 +5665,125 @@
               </a:rPr>
               <a:t>destino para o char</a:t>
             </a:r>
+            <a:endParaRPr lang="en-US" sz="1600" dirty="0"/>
+          </a:p>
+        </p:txBody>
+      </p:sp>
+      <p:sp>
+        <p:nvSpPr>
+          <p:cNvPr id="22" name="Text 17"/>
+          <p:cNvSpPr txBox="1"/>
+          <p:nvPr/>
+        </p:nvSpPr>
+        <p:spPr>
+          <a:xfrm>
+            <a:off x="6263640" y="2999232"/>
+            <a:ext cx="2139696" cy="182880"/>
+          </a:xfrm>
+          <a:prstGeom prst="rect">
+            <a:avLst/>
+          </a:prstGeom>
+          <a:noFill/>
+          <a:ln/>
+        </p:spPr>
+        <p:txBody>
+          <a:bodyPr wrap="square" lIns="0" tIns="0" rIns="0" bIns="0" rtlCol="0" anchor="ctr"/>
+          <a:lstStyle/>
+          <a:p>
+            <a:pPr algn="l" indent="0" marL="0">
+              <a:buNone/>
+            </a:pPr>
+            <a:r>
+              <a:rPr lang="en-US" sz="900" dirty="0">
+                <a:solidFill>
+                  <a:srgbClr val="AEB7B9"/>
+                </a:solidFill>
+                <a:latin typeface="Arial" pitchFamily="34" charset="0"/>
+                <a:ea typeface="Arial" pitchFamily="34" charset="-122"/>
+                <a:cs typeface="Arial" pitchFamily="34" charset="-120"/>
+              </a:rPr>
+              <a:t>solo, produtores, materiais</a:t>
+            </a:r>
+            <a:endParaRPr lang="en-US" sz="900" dirty="0"/>
+          </a:p>
+        </p:txBody>
+      </p:sp>
+      <p:sp>
+        <p:nvSpPr>
+          <p:cNvPr id="23" name="Shape 18"/>
+          <p:cNvSpPr/>
+          <p:nvPr/>
+        </p:nvSpPr>
+        <p:spPr>
+          <a:xfrm>
+            <a:off x="502920" y="3529584"/>
+            <a:ext cx="8138160" cy="932688"/>
+          </a:xfrm>
+          <a:prstGeom prst="roundRect">
+            <a:avLst>
+              <a:gd name="adj" fmla="val 9804"/>
+            </a:avLst>
+          </a:prstGeom>
+          <a:solidFill>
+            <a:srgbClr val="8FB04E"/>
+          </a:solidFill>
+          <a:ln w="12700">
+            <a:solidFill>
+              <a:srgbClr val="8FB04E"/>
+            </a:solidFill>
+            <a:prstDash val="solid"/>
+          </a:ln>
+        </p:spPr>
+      </p:sp>
+      <p:sp>
+        <p:nvSpPr>
+          <p:cNvPr id="24" name="Text 19"/>
+          <p:cNvSpPr txBox="1"/>
+          <p:nvPr/>
+        </p:nvSpPr>
+        <p:spPr>
+          <a:xfrm>
+            <a:off x="749808" y="3694176"/>
+            <a:ext cx="5852160" cy="310896"/>
+          </a:xfrm>
+          <a:prstGeom prst="rect">
+            <a:avLst/>
+          </a:prstGeom>
+          <a:noFill/>
+          <a:ln/>
+        </p:spPr>
+        <p:txBody>
+          <a:bodyPr wrap="square" lIns="0" tIns="0" rIns="0" bIns="0" rtlCol="0" anchor="t"/>
+          <a:lstStyle/>
+          <a:p>
+            <a:pPr indent="0" marL="0">
+              <a:buNone/>
+            </a:pPr>
+            <a:r>
+              <a:rPr lang="en-US" sz="1700" b="1" spc="-50" kern="0" dirty="0">
+                <a:solidFill>
+                  <a:srgbClr val="0C0C0B"/>
+                </a:solidFill>
+                <a:latin typeface="Arial" pitchFamily="34" charset="0"/>
+                <a:ea typeface="Arial" pitchFamily="34" charset="-122"/>
+                <a:cs typeface="Arial" pitchFamily="34" charset="-120"/>
+              </a:rPr>
+              <a:t>Caracterizar a casca da unidade em laboratório.</a:t>
+            </a:r>
             <a:endParaRPr lang="en-US" sz="1700" dirty="0"/>
           </a:p>
         </p:txBody>
       </p:sp>
       <p:sp>
         <p:nvSpPr>
-          <p:cNvPr id="22" name="Text 17"/>
-          <p:cNvSpPr txBox="1"/>
-          <p:nvPr/>
-        </p:nvSpPr>
-        <p:spPr>
-          <a:xfrm>
-            <a:off x="6263640" y="3364992"/>
-            <a:ext cx="2139696" cy="182880"/>
+          <p:cNvPr id="25" name="Text 20"/>
+          <p:cNvSpPr txBox="1"/>
+          <p:nvPr/>
+        </p:nvSpPr>
+        <p:spPr>
+          <a:xfrm>
+            <a:off x="749808" y="4096512"/>
+            <a:ext cx="2560320" cy="182880"/>
           </a:xfrm>
           <a:prstGeom prst="rect">
             <a:avLst/>
@@ -5789,62 +5799,101 @@
               <a:buNone/>
             </a:pPr>
             <a:r>
-              <a:rPr lang="en-US" sz="900" dirty="0">
-                <a:solidFill>
-                  <a:srgbClr val="C8E85C"/>
-                </a:solidFill>
-                <a:latin typeface="Arial" pitchFamily="34" charset="0"/>
-                <a:ea typeface="Arial" pitchFamily="34" charset="-122"/>
-                <a:cs typeface="Arial" pitchFamily="34" charset="-120"/>
-              </a:rPr>
-              <a:t>solo, produtores, materiais</a:t>
-            </a:r>
-            <a:endParaRPr lang="en-US" sz="900" dirty="0"/>
-          </a:p>
-        </p:txBody>
-      </p:sp>
-      <p:sp>
-        <p:nvSpPr>
-          <p:cNvPr id="23" name="Text 18"/>
-          <p:cNvSpPr txBox="1"/>
-          <p:nvPr/>
-        </p:nvSpPr>
-        <p:spPr>
-          <a:xfrm>
-            <a:off x="502920" y="3986784"/>
-            <a:ext cx="8138160" cy="384048"/>
-          </a:xfrm>
-          <a:prstGeom prst="rect">
-            <a:avLst/>
-          </a:prstGeom>
-          <a:noFill/>
-          <a:ln/>
-        </p:spPr>
-        <p:txBody>
-          <a:bodyPr wrap="square" lIns="0" tIns="0" rIns="0" bIns="0" rtlCol="0" anchor="t"/>
-          <a:lstStyle/>
-          <a:p>
-            <a:pPr indent="0" marL="0">
-              <a:buNone/>
-            </a:pPr>
-            <a:r>
-              <a:rPr lang="en-US" sz="2000" b="1" spc="-60" kern="0" dirty="0">
-                <a:solidFill>
-                  <a:srgbClr val="C8E85C"/>
-                </a:solidFill>
-                <a:latin typeface="Arial" pitchFamily="34" charset="0"/>
-                <a:ea typeface="Arial" pitchFamily="34" charset="-122"/>
-                <a:cs typeface="Arial" pitchFamily="34" charset="-120"/>
-              </a:rPr>
-              <a:t>Se isso for verdade, o coco tem uma segunda vida.</a:t>
-            </a:r>
-            <a:endParaRPr lang="en-US" sz="2000" dirty="0"/>
-          </a:p>
-        </p:txBody>
-      </p:sp>
-      <p:sp>
-        <p:nvSpPr>
-          <p:cNvPr id="24" name="Text 19"/>
+              <a:rPr lang="en-US" sz="1000" dirty="0">
+                <a:solidFill>
+                  <a:srgbClr val="1E3320"/>
+                </a:solidFill>
+                <a:latin typeface="Arial" pitchFamily="34" charset="0"/>
+                <a:ea typeface="Arial" pitchFamily="34" charset="-122"/>
+                <a:cs typeface="Arial" pitchFamily="34" charset="-120"/>
+              </a:rPr>
+              <a:t>1.  uma amostra da casca</a:t>
+            </a:r>
+            <a:endParaRPr lang="en-US" sz="1000" dirty="0"/>
+          </a:p>
+        </p:txBody>
+      </p:sp>
+      <p:sp>
+        <p:nvSpPr>
+          <p:cNvPr id="26" name="Text 21"/>
+          <p:cNvSpPr txBox="1"/>
+          <p:nvPr/>
+        </p:nvSpPr>
+        <p:spPr>
+          <a:xfrm>
+            <a:off x="3401568" y="4096512"/>
+            <a:ext cx="2560320" cy="182880"/>
+          </a:xfrm>
+          <a:prstGeom prst="rect">
+            <a:avLst/>
+          </a:prstGeom>
+          <a:noFill/>
+          <a:ln/>
+        </p:spPr>
+        <p:txBody>
+          <a:bodyPr wrap="square" lIns="0" tIns="0" rIns="0" bIns="0" rtlCol="0" anchor="ctr"/>
+          <a:lstStyle/>
+          <a:p>
+            <a:pPr algn="l" indent="0" marL="0">
+              <a:buNone/>
+            </a:pPr>
+            <a:r>
+              <a:rPr lang="en-US" sz="1000" dirty="0">
+                <a:solidFill>
+                  <a:srgbClr val="1E3320"/>
+                </a:solidFill>
+                <a:latin typeface="Arial" pitchFamily="34" charset="0"/>
+                <a:ea typeface="Arial" pitchFamily="34" charset="-122"/>
+                <a:cs typeface="Arial" pitchFamily="34" charset="-120"/>
+              </a:rPr>
+              <a:t>2.  o volume mensal gerado</a:t>
+            </a:r>
+            <a:endParaRPr lang="en-US" sz="1000" dirty="0"/>
+          </a:p>
+        </p:txBody>
+      </p:sp>
+      <p:sp>
+        <p:nvSpPr>
+          <p:cNvPr id="27" name="Text 22"/>
+          <p:cNvSpPr txBox="1"/>
+          <p:nvPr/>
+        </p:nvSpPr>
+        <p:spPr>
+          <a:xfrm>
+            <a:off x="6053328" y="4096512"/>
+            <a:ext cx="2560320" cy="182880"/>
+          </a:xfrm>
+          <a:prstGeom prst="rect">
+            <a:avLst/>
+          </a:prstGeom>
+          <a:noFill/>
+          <a:ln/>
+        </p:spPr>
+        <p:txBody>
+          <a:bodyPr wrap="square" lIns="0" tIns="0" rIns="0" bIns="0" rtlCol="0" anchor="ctr"/>
+          <a:lstStyle/>
+          <a:p>
+            <a:pPr algn="l" indent="0" marL="0">
+              <a:buNone/>
+            </a:pPr>
+            <a:r>
+              <a:rPr lang="en-US" sz="1000" dirty="0">
+                <a:solidFill>
+                  <a:srgbClr val="1E3320"/>
+                </a:solidFill>
+                <a:latin typeface="Arial" pitchFamily="34" charset="0"/>
+                <a:ea typeface="Arial" pitchFamily="34" charset="-122"/>
+                <a:cs typeface="Arial" pitchFamily="34" charset="-120"/>
+              </a:rPr>
+              <a:t>3.  a destinação atual</a:t>
+            </a:r>
+            <a:endParaRPr lang="en-US" sz="1000" dirty="0"/>
+          </a:p>
+        </p:txBody>
+      </p:sp>
+      <p:sp>
+        <p:nvSpPr>
+          <p:cNvPr id="28" name="Text 23"/>
           <p:cNvSpPr txBox="1"/>
           <p:nvPr/>
         </p:nvSpPr>
@@ -5869,13 +5918,13 @@
             <a:r>
               <a:rPr lang="en-US" sz="750" dirty="0">
                 <a:solidFill>
-                  <a:srgbClr val="6E7A62"/>
-                </a:solidFill>
-                <a:latin typeface="Arial" pitchFamily="34" charset="0"/>
-                <a:ea typeface="Arial" pitchFamily="34" charset="-122"/>
-                <a:cs typeface="Arial" pitchFamily="34" charset="-120"/>
-              </a:rPr>
-              <a:t>nenhuma das três é um pedido — são as condições que tornariam a rota real</a:t>
+                  <a:srgbClr val="8B928C"/>
+                </a:solidFill>
+                <a:latin typeface="Arial" pitchFamily="34" charset="0"/>
+                <a:ea typeface="Arial" pitchFamily="34" charset="-122"/>
+                <a:cs typeface="Arial" pitchFamily="34" charset="-120"/>
+              </a:rPr>
+              <a:t>RECICLAR · EPA · Petrolina / PE</a:t>
             </a:r>
             <a:endParaRPr lang="en-US" sz="750" dirty="0"/>
           </a:p>

--- a/deck/pepsico-petrolina-porque.pptx
+++ b/deck/pepsico-petrolina-porque.pptx
@@ -508,7 +508,7 @@
           <a:p>
             <a:r>
               <a:rPr lang="en-US" dirty="0"/>
-              <a:t>Tese em uma frase: a casca de coco é boa biomassa para pirólise, e o biochar conversa com metas que a PepsiCo já publicou. O deck termina num próximo passo objetivo — amostra, volume e destinação.</a:t>
+              <a:t>Tese em uma frase: a casca de coco é boa biomassa para pirólise, e o biochar conversa com metas que a PepsiCo já publicou. O deck termina num próximo passo objetivo, amostra, volume e destinação.</a:t>
             </a:r>
             <a:endParaRPr lang="en-US" dirty="0"/>
           </a:p>
@@ -596,7 +596,7 @@
           <a:p>
             <a:r>
               <a:rPr lang="en-US" dirty="0"/>
-              <a:t>80–85% da massa do fruto é casca. A biomassa já está no pátio, hoje, nesta quantidade. A umidade de 30–70% as-received é o desafio conhecido — secagem integrada com calor do próprio processo.</a:t>
+              <a:t>80–85% da massa do fruto é casca. A biomassa já está no pátio, hoje, nesta quantidade. A umidade de 30–70% as-received é o desafio conhecido, secagem integrada com calor do próprio processo.</a:t>
             </a:r>
             <a:endParaRPr lang="en-US" dirty="0"/>
           </a:p>
@@ -860,7 +860,7 @@
           <a:p>
             <a:r>
               <a:rPr lang="en-US" dirty="0"/>
-              <a:t>Casca úmida é volumosa e perecível; biochar é seco, cerca de 30% da massa, inerte e estável por séculos — não vira passivo.</a:t>
+              <a:t>Casca úmida é volumosa e perecível; biochar é seco, cerca de 30% da massa, inerte e estável por séculos, não vira passivo.</a:t>
             </a:r>
             <a:endParaRPr lang="en-US" dirty="0"/>
           </a:p>
@@ -1036,7 +1036,7 @@
           <a:p>
             <a:r>
               <a:rPr lang="en-US" dirty="0"/>
-              <a:t>As três condições são a aderência dita de forma indireta — deixar o gerente reagir a cada uma. O pedido é único e objetivo: amostra, volume mensal e destinação atual. Nada disso exige trabalho novo do lado deles.</a:t>
+              <a:t>As três condições são a aderência dita de forma indireta, deixar o gerente reagir a cada uma. O pedido é único e objetivo: amostra, volume mensal e destinação atual. Nada disso exige trabalho novo do lado deles.</a:t>
             </a:r>
             <a:endParaRPr lang="en-US" dirty="0"/>
           </a:p>
@@ -1476,7 +1476,7 @@
                 <a:ea typeface="Arial" pitchFamily="34" charset="-122"/>
                 <a:cs typeface="Arial" pitchFamily="34" charset="-120"/>
               </a:rPr>
-              <a:t>PETROLINA · PE</a:t>
+              <a:t>PETROLINA, PE</a:t>
             </a:r>
             <a:endParaRPr lang="en-US" sz="900" dirty="0"/>
           </a:p>
@@ -1636,7 +1636,7 @@
                 <a:ea typeface="Arial" pitchFamily="34" charset="-122"/>
                 <a:cs typeface="Arial" pitchFamily="34" charset="-120"/>
               </a:rPr>
-              <a:t>RECICLAR · EPA</a:t>
+              <a:t>RECICLAR, EPA</a:t>
             </a:r>
             <a:endParaRPr lang="en-US" sz="850" dirty="0"/>
           </a:p>
@@ -2166,7 +2166,7 @@
                 <a:ea typeface="Arial" pitchFamily="34" charset="-122"/>
                 <a:cs typeface="Arial" pitchFamily="34" charset="-120"/>
               </a:rPr>
-              <a:t>caracterização de casca e fibra · Devens et al., 2018 · Windeatt et al., 2014</a:t>
+              <a:t>caracterização de casca e fibra, Devens et al., 2018, Windeatt et al., 2014</a:t>
             </a:r>
             <a:endParaRPr lang="en-US" sz="750" dirty="0"/>
           </a:p>
@@ -2691,7 +2691,7 @@
                 <a:ea typeface="Arial" pitchFamily="34" charset="-122"/>
                 <a:cs typeface="Arial" pitchFamily="34" charset="-120"/>
               </a:rPr>
-              <a:t>literatura técnica · Devens et al., 2018 · Windeatt et al., 2014</a:t>
+              <a:t>literatura técnica, Devens et al., 2018, Windeatt et al., 2014</a:t>
             </a:r>
             <a:endParaRPr lang="en-US" sz="750" dirty="0"/>
           </a:p>
@@ -3571,7 +3571,7 @@
                 <a:ea typeface="Arial" pitchFamily="34" charset="-122"/>
                 <a:cs typeface="Arial" pitchFamily="34" charset="-120"/>
               </a:rPr>
-              <a:t>rendimento de benchmark de literatura para casca de coco — a validar com a biomassa da unidade</a:t>
+              <a:t>rendimento de benchmark de literatura para casca de coco, a validar com a biomassa da unidade</a:t>
             </a:r>
             <a:endParaRPr lang="en-US" sz="750" dirty="0"/>
           </a:p>
@@ -4145,7 +4145,7 @@
                 <a:ea typeface="Arial" pitchFamily="34" charset="-122"/>
                 <a:cs typeface="Arial" pitchFamily="34" charset="-120"/>
               </a:rPr>
-              <a:t>certificável em Puro.earth · EBC · metano evitado em pilhas úmidas: metodologia Puro.earth (2025)</a:t>
+              <a:t>certificável em Puro.earth, EBC, metano evitado em pilhas úmidas: metodologia Puro.earth (2025)</a:t>
             </a:r>
             <a:endParaRPr lang="en-US" sz="750" dirty="0"/>
           </a:p>
@@ -4679,7 +4679,7 @@
                 <a:ea typeface="Arial" pitchFamily="34" charset="-122"/>
                 <a:cs typeface="Arial" pitchFamily="34" charset="-120"/>
               </a:rPr>
-              <a:t>escopo 3 · energia</a:t>
+              <a:t>escopo 3, energia</a:t>
             </a:r>
             <a:endParaRPr lang="en-US" sz="800" dirty="0"/>
           </a:p>
@@ -4808,7 +4808,7 @@
                 <a:ea typeface="Arial" pitchFamily="34" charset="-122"/>
                 <a:cs typeface="Arial" pitchFamily="34" charset="-120"/>
               </a:rPr>
-              <a:t>net-zero · SBTi</a:t>
+              <a:t>net-zero, SBTi</a:t>
             </a:r>
             <a:endParaRPr lang="en-US" sz="800" dirty="0"/>
           </a:p>
@@ -4976,7 +4976,7 @@
                 <a:ea typeface="Arial" pitchFamily="34" charset="-122"/>
                 <a:cs typeface="Arial" pitchFamily="34" charset="-120"/>
               </a:rPr>
-              <a:t>Embrapa Semiárido, Petrolina · 2026   ·   PepsiCo Climate Transition Plan, mai/2025 · metas validadas pela SBTi   ·   1,24 Mt já contratadas pela Microsoft (Exomad Green, Puro.earth)</a:t>
+              <a:t>Embrapa Semiárido, Petrolina, 2026   /   PepsiCo Climate Transition Plan, mai/2025, metas validadas pela SBTi   /   1,24 Mt já contratadas pela Microsoft (Exomad Green, Puro.earth)</a:t>
             </a:r>
             <a:endParaRPr lang="en-US" sz="750" dirty="0"/>
           </a:p>
@@ -5924,7 +5924,7 @@
                 <a:ea typeface="Arial" pitchFamily="34" charset="-122"/>
                 <a:cs typeface="Arial" pitchFamily="34" charset="-120"/>
               </a:rPr>
-              <a:t>RECICLAR · EPA · Petrolina / PE</a:t>
+              <a:t>RECICLAR, EPA, Petrolina / PE</a:t>
             </a:r>
             <a:endParaRPr lang="en-US" sz="750" dirty="0"/>
           </a:p>
